--- a/test-documents/powerpoint/pptx/powerpoint_sample.pptx
+++ b/test-documents/powerpoint/pptx/powerpoint_sample.pptx
@@ -5,17 +5,16 @@
     <p:sldMasterId id="2147483648" r:id="rId1"/>
   </p:sldMasterIdLst>
   <p:sldIdLst>
-    <p:sldId id="256" r:id="rId2"/>
-    <p:sldId id="257" r:id="rId3"/>
-    <p:sldId id="258" r:id="rId4"/>
+    <p:sldId id="256" r:id="rId7"/>
+    <p:sldId id="257" r:id="rId9"/>
   </p:sldIdLst>
-  <p:sldSz cx="12192000" cy="6858000"/>
+  <p:sldSz cx="9144000" cy="6858000" type="screen4x3"/>
   <p:notesSz cx="6858000" cy="9144000"/>
   <p:defaultTextStyle>
     <a:defPPr>
-      <a:defRPr lang="en-CH"/>
+      <a:defRPr lang="en-US"/>
     </a:defPPr>
-    <a:lvl1pPr marL="0" algn="l" defTabSz="914400" rtl="0" eaLnBrk="1" latinLnBrk="0" hangingPunct="1">
+    <a:lvl1pPr marL="0" algn="l" defTabSz="457200" rtl="0" eaLnBrk="1" latinLnBrk="0" hangingPunct="1">
       <a:defRPr sz="1800" kern="1200">
         <a:solidFill>
           <a:schemeClr val="tx1"/>
@@ -25,7 +24,7 @@
         <a:cs typeface="+mn-cs"/>
       </a:defRPr>
     </a:lvl1pPr>
-    <a:lvl2pPr marL="457200" algn="l" defTabSz="914400" rtl="0" eaLnBrk="1" latinLnBrk="0" hangingPunct="1">
+    <a:lvl2pPr marL="457200" algn="l" defTabSz="457200" rtl="0" eaLnBrk="1" latinLnBrk="0" hangingPunct="1">
       <a:defRPr sz="1800" kern="1200">
         <a:solidFill>
           <a:schemeClr val="tx1"/>
@@ -35,7 +34,7 @@
         <a:cs typeface="+mn-cs"/>
       </a:defRPr>
     </a:lvl2pPr>
-    <a:lvl3pPr marL="914400" algn="l" defTabSz="914400" rtl="0" eaLnBrk="1" latinLnBrk="0" hangingPunct="1">
+    <a:lvl3pPr marL="914400" algn="l" defTabSz="457200" rtl="0" eaLnBrk="1" latinLnBrk="0" hangingPunct="1">
       <a:defRPr sz="1800" kern="1200">
         <a:solidFill>
           <a:schemeClr val="tx1"/>
@@ -45,7 +44,7 @@
         <a:cs typeface="+mn-cs"/>
       </a:defRPr>
     </a:lvl3pPr>
-    <a:lvl4pPr marL="1371600" algn="l" defTabSz="914400" rtl="0" eaLnBrk="1" latinLnBrk="0" hangingPunct="1">
+    <a:lvl4pPr marL="1371600" algn="l" defTabSz="457200" rtl="0" eaLnBrk="1" latinLnBrk="0" hangingPunct="1">
       <a:defRPr sz="1800" kern="1200">
         <a:solidFill>
           <a:schemeClr val="tx1"/>
@@ -55,7 +54,7 @@
         <a:cs typeface="+mn-cs"/>
       </a:defRPr>
     </a:lvl4pPr>
-    <a:lvl5pPr marL="1828800" algn="l" defTabSz="914400" rtl="0" eaLnBrk="1" latinLnBrk="0" hangingPunct="1">
+    <a:lvl5pPr marL="1828800" algn="l" defTabSz="457200" rtl="0" eaLnBrk="1" latinLnBrk="0" hangingPunct="1">
       <a:defRPr sz="1800" kern="1200">
         <a:solidFill>
           <a:schemeClr val="tx1"/>
@@ -65,7 +64,7 @@
         <a:cs typeface="+mn-cs"/>
       </a:defRPr>
     </a:lvl5pPr>
-    <a:lvl6pPr marL="2286000" algn="l" defTabSz="914400" rtl="0" eaLnBrk="1" latinLnBrk="0" hangingPunct="1">
+    <a:lvl6pPr marL="2286000" algn="l" defTabSz="457200" rtl="0" eaLnBrk="1" latinLnBrk="0" hangingPunct="1">
       <a:defRPr sz="1800" kern="1200">
         <a:solidFill>
           <a:schemeClr val="tx1"/>
@@ -75,7 +74,7 @@
         <a:cs typeface="+mn-cs"/>
       </a:defRPr>
     </a:lvl6pPr>
-    <a:lvl7pPr marL="2743200" algn="l" defTabSz="914400" rtl="0" eaLnBrk="1" latinLnBrk="0" hangingPunct="1">
+    <a:lvl7pPr marL="2743200" algn="l" defTabSz="457200" rtl="0" eaLnBrk="1" latinLnBrk="0" hangingPunct="1">
       <a:defRPr sz="1800" kern="1200">
         <a:solidFill>
           <a:schemeClr val="tx1"/>
@@ -85,7 +84,7 @@
         <a:cs typeface="+mn-cs"/>
       </a:defRPr>
     </a:lvl7pPr>
-    <a:lvl8pPr marL="3200400" algn="l" defTabSz="914400" rtl="0" eaLnBrk="1" latinLnBrk="0" hangingPunct="1">
+    <a:lvl8pPr marL="3200400" algn="l" defTabSz="457200" rtl="0" eaLnBrk="1" latinLnBrk="0" hangingPunct="1">
       <a:defRPr sz="1800" kern="1200">
         <a:solidFill>
           <a:schemeClr val="tx1"/>
@@ -95,7 +94,7 @@
         <a:cs typeface="+mn-cs"/>
       </a:defRPr>
     </a:lvl8pPr>
-    <a:lvl9pPr marL="3657600" algn="l" defTabSz="914400" rtl="0" eaLnBrk="1" latinLnBrk="0" hangingPunct="1">
+    <a:lvl9pPr marL="3657600" algn="l" defTabSz="457200" rtl="0" eaLnBrk="1" latinLnBrk="0" hangingPunct="1">
       <a:defRPr sz="1800" kern="1200">
         <a:solidFill>
           <a:schemeClr val="tx1"/>
@@ -106,11 +105,6 @@
       </a:defRPr>
     </a:lvl9pPr>
   </p:defaultTextStyle>
-  <p:extLst>
-    <p:ext uri="{EFAFB233-063F-42B5-8137-9DF3F51BA10A}">
-      <p15:sldGuideLst xmlns:p15="http://schemas.microsoft.com/office/powerpoint/2012/main"/>
-    </p:ext>
-  </p:extLst>
 </p:presentation>
 </file>
 
@@ -509,7 +503,7 @@
           <a:lstStyle/>
           <a:p>
             <a:r>
-              <a:t>Some notes on the second slide.</a:t>
+              <a:t>Presenter note: emphasize local-first architecture.</a:t>
             </a:r>
           </a:p>
         </p:txBody>
@@ -579,12 +573,7 @@
           <a:lstStyle/>
           <a:p>
             <a:r>
-              <a:t>Final notes on the third slide.</a:t>
-            </a:r>
-          </a:p>
-          <a:p>
-            <a:r>
-              <a:t>Second line of notes.</a:t>
+              <a:t>Table slide for markdown table rendering.</a:t>
             </a:r>
           </a:p>
         </p:txBody>
@@ -628,13 +617,7 @@
       </p:grpSpPr>
       <p:sp>
         <p:nvSpPr>
-          <p:cNvPr id="2" name="Title 1">
-            <a:extLst>
-              <a:ext uri="{FF2B5EF4-FFF2-40B4-BE49-F238E27FC236}">
-                <a16:creationId xmlns:a16="http://schemas.microsoft.com/office/drawing/2014/main" id="{4B23A3BA-B457-2700-8373-59A65037005E}"/>
-              </a:ext>
-            </a:extLst>
-          </p:cNvPr>
+          <p:cNvPr id="2" name="Title 1"/>
           <p:cNvSpPr>
             <a:spLocks noGrp="1"/>
           </p:cNvSpPr>
@@ -644,35 +627,25 @@
         </p:nvSpPr>
         <p:spPr>
           <a:xfrm>
-            <a:off x="1524000" y="1122363"/>
-            <a:ext cx="9144000" cy="2387600"/>
+            <a:off x="685800" y="2130425"/>
+            <a:ext cx="7772400" cy="1470025"/>
           </a:xfrm>
         </p:spPr>
         <p:txBody>
-          <a:bodyPr anchor="b"/>
-          <a:lstStyle>
-            <a:lvl1pPr algn="ctr">
-              <a:defRPr sz="6000"/>
-            </a:lvl1pPr>
-          </a:lstStyle>
-          <a:p>
-            <a:r>
-              <a:rPr lang="en-GB"/>
+          <a:bodyPr/>
+          <a:lstStyle/>
+          <a:p>
+            <a:r>
+              <a:rPr lang="en-US" smtClean="0"/>
               <a:t>Click to edit Master title style</a:t>
             </a:r>
-            <a:endParaRPr lang="en-CH"/>
-          </a:p>
-        </p:txBody>
-      </p:sp>
-      <p:sp>
-        <p:nvSpPr>
-          <p:cNvPr id="3" name="Subtitle 2">
-            <a:extLst>
-              <a:ext uri="{FF2B5EF4-FFF2-40B4-BE49-F238E27FC236}">
-                <a16:creationId xmlns:a16="http://schemas.microsoft.com/office/drawing/2014/main" id="{ECC903CC-F170-012D-6EA6-936570C4DBF0}"/>
-              </a:ext>
-            </a:extLst>
-          </p:cNvPr>
+            <a:endParaRPr lang="en-US"/>
+          </a:p>
+        </p:txBody>
+      </p:sp>
+      <p:sp>
+        <p:nvSpPr>
+          <p:cNvPr id="3" name="Subtitle 2"/>
           <p:cNvSpPr>
             <a:spLocks noGrp="1"/>
           </p:cNvSpPr>
@@ -682,8 +655,8 @@
         </p:nvSpPr>
         <p:spPr>
           <a:xfrm>
-            <a:off x="1524000" y="3602038"/>
-            <a:ext cx="9144000" cy="1655762"/>
+            <a:off x="1371600" y="3886200"/>
+            <a:ext cx="6400800" cy="1752600"/>
           </a:xfrm>
         </p:spPr>
         <p:txBody>
@@ -691,59 +664,107 @@
           <a:lstStyle>
             <a:lvl1pPr marL="0" indent="0" algn="ctr">
               <a:buNone/>
-              <a:defRPr sz="2400"/>
+              <a:defRPr>
+                <a:solidFill>
+                  <a:schemeClr val="tx1">
+                    <a:tint val="75000"/>
+                  </a:schemeClr>
+                </a:solidFill>
+              </a:defRPr>
             </a:lvl1pPr>
             <a:lvl2pPr marL="457200" indent="0" algn="ctr">
               <a:buNone/>
-              <a:defRPr sz="2000"/>
+              <a:defRPr>
+                <a:solidFill>
+                  <a:schemeClr val="tx1">
+                    <a:tint val="75000"/>
+                  </a:schemeClr>
+                </a:solidFill>
+              </a:defRPr>
             </a:lvl2pPr>
             <a:lvl3pPr marL="914400" indent="0" algn="ctr">
               <a:buNone/>
-              <a:defRPr sz="1800"/>
+              <a:defRPr>
+                <a:solidFill>
+                  <a:schemeClr val="tx1">
+                    <a:tint val="75000"/>
+                  </a:schemeClr>
+                </a:solidFill>
+              </a:defRPr>
             </a:lvl3pPr>
             <a:lvl4pPr marL="1371600" indent="0" algn="ctr">
               <a:buNone/>
-              <a:defRPr sz="1600"/>
+              <a:defRPr>
+                <a:solidFill>
+                  <a:schemeClr val="tx1">
+                    <a:tint val="75000"/>
+                  </a:schemeClr>
+                </a:solidFill>
+              </a:defRPr>
             </a:lvl4pPr>
             <a:lvl5pPr marL="1828800" indent="0" algn="ctr">
               <a:buNone/>
-              <a:defRPr sz="1600"/>
+              <a:defRPr>
+                <a:solidFill>
+                  <a:schemeClr val="tx1">
+                    <a:tint val="75000"/>
+                  </a:schemeClr>
+                </a:solidFill>
+              </a:defRPr>
             </a:lvl5pPr>
             <a:lvl6pPr marL="2286000" indent="0" algn="ctr">
               <a:buNone/>
-              <a:defRPr sz="1600"/>
+              <a:defRPr>
+                <a:solidFill>
+                  <a:schemeClr val="tx1">
+                    <a:tint val="75000"/>
+                  </a:schemeClr>
+                </a:solidFill>
+              </a:defRPr>
             </a:lvl6pPr>
             <a:lvl7pPr marL="2743200" indent="0" algn="ctr">
               <a:buNone/>
-              <a:defRPr sz="1600"/>
+              <a:defRPr>
+                <a:solidFill>
+                  <a:schemeClr val="tx1">
+                    <a:tint val="75000"/>
+                  </a:schemeClr>
+                </a:solidFill>
+              </a:defRPr>
             </a:lvl7pPr>
             <a:lvl8pPr marL="3200400" indent="0" algn="ctr">
               <a:buNone/>
-              <a:defRPr sz="1600"/>
+              <a:defRPr>
+                <a:solidFill>
+                  <a:schemeClr val="tx1">
+                    <a:tint val="75000"/>
+                  </a:schemeClr>
+                </a:solidFill>
+              </a:defRPr>
             </a:lvl8pPr>
             <a:lvl9pPr marL="3657600" indent="0" algn="ctr">
               <a:buNone/>
-              <a:defRPr sz="1600"/>
+              <a:defRPr>
+                <a:solidFill>
+                  <a:schemeClr val="tx1">
+                    <a:tint val="75000"/>
+                  </a:schemeClr>
+                </a:solidFill>
+              </a:defRPr>
             </a:lvl9pPr>
           </a:lstStyle>
           <a:p>
             <a:r>
-              <a:rPr lang="en-GB"/>
+              <a:rPr lang="en-US" smtClean="0"/>
               <a:t>Click to edit Master subtitle style</a:t>
             </a:r>
-            <a:endParaRPr lang="en-CH"/>
-          </a:p>
-        </p:txBody>
-      </p:sp>
-      <p:sp>
-        <p:nvSpPr>
-          <p:cNvPr id="4" name="Date Placeholder 3">
-            <a:extLst>
-              <a:ext uri="{FF2B5EF4-FFF2-40B4-BE49-F238E27FC236}">
-                <a16:creationId xmlns:a16="http://schemas.microsoft.com/office/drawing/2014/main" id="{A3D73E74-BC8C-DDCC-6CC3-0519769E8946}"/>
-              </a:ext>
-            </a:extLst>
-          </p:cNvPr>
+            <a:endParaRPr lang="en-US"/>
+          </a:p>
+        </p:txBody>
+      </p:sp>
+      <p:sp>
+        <p:nvSpPr>
+          <p:cNvPr id="4" name="Date Placeholder 3"/>
           <p:cNvSpPr>
             <a:spLocks noGrp="1"/>
           </p:cNvSpPr>
@@ -756,23 +777,17 @@
           <a:bodyPr/>
           <a:lstStyle/>
           <a:p>
-            <a:fld id="{376CE277-F64F-CD4D-8092-A1FBD0226130}" type="datetimeFigureOut">
-              <a:rPr lang="en-CH" smtClean="0"/>
-              <a:t>10/23/24</a:t>
+            <a:fld id="{5BCAD085-E8A6-8845-BD4E-CB4CCA059FC4}" type="datetimeFigureOut">
+              <a:rPr lang="en-US" smtClean="0"/>
+              <a:t>1/27/13</a:t>
             </a:fld>
-            <a:endParaRPr lang="en-CH"/>
-          </a:p>
-        </p:txBody>
-      </p:sp>
-      <p:sp>
-        <p:nvSpPr>
-          <p:cNvPr id="5" name="Footer Placeholder 4">
-            <a:extLst>
-              <a:ext uri="{FF2B5EF4-FFF2-40B4-BE49-F238E27FC236}">
-                <a16:creationId xmlns:a16="http://schemas.microsoft.com/office/drawing/2014/main" id="{3A6E1D56-2862-F4F3-1845-10D97611AA3E}"/>
-              </a:ext>
-            </a:extLst>
-          </p:cNvPr>
+            <a:endParaRPr lang="en-US"/>
+          </a:p>
+        </p:txBody>
+      </p:sp>
+      <p:sp>
+        <p:nvSpPr>
+          <p:cNvPr id="5" name="Footer Placeholder 4"/>
           <p:cNvSpPr>
             <a:spLocks noGrp="1"/>
           </p:cNvSpPr>
@@ -785,19 +800,13 @@
           <a:bodyPr/>
           <a:lstStyle/>
           <a:p>
-            <a:endParaRPr lang="en-CH"/>
-          </a:p>
-        </p:txBody>
-      </p:sp>
-      <p:sp>
-        <p:nvSpPr>
-          <p:cNvPr id="6" name="Slide Number Placeholder 5">
-            <a:extLst>
-              <a:ext uri="{FF2B5EF4-FFF2-40B4-BE49-F238E27FC236}">
-                <a16:creationId xmlns:a16="http://schemas.microsoft.com/office/drawing/2014/main" id="{6ECB2FC2-8DB8-95E0-B017-6B4BBB8BF7E6}"/>
-              </a:ext>
-            </a:extLst>
-          </p:cNvPr>
+            <a:endParaRPr lang="en-US"/>
+          </a:p>
+        </p:txBody>
+      </p:sp>
+      <p:sp>
+        <p:nvSpPr>
+          <p:cNvPr id="6" name="Slide Number Placeholder 5"/>
           <p:cNvSpPr>
             <a:spLocks noGrp="1"/>
           </p:cNvSpPr>
@@ -810,18 +819,18 @@
           <a:bodyPr/>
           <a:lstStyle/>
           <a:p>
-            <a:fld id="{0107FE2D-0FD9-7D4B-A5A0-7E9AAE6B67D1}" type="slidenum">
-              <a:rPr lang="en-CH" smtClean="0"/>
+            <a:fld id="{C1FF6DA9-008F-8B48-92A6-B652298478BF}" type="slidenum">
+              <a:rPr lang="en-US" smtClean="0"/>
               <a:t>‹#›</a:t>
             </a:fld>
-            <a:endParaRPr lang="en-CH"/>
+            <a:endParaRPr lang="en-US"/>
           </a:p>
         </p:txBody>
       </p:sp>
     </p:spTree>
     <p:extLst>
       <p:ext uri="{BB962C8B-B14F-4D97-AF65-F5344CB8AC3E}">
-        <p14:creationId xmlns:p14="http://schemas.microsoft.com/office/powerpoint/2010/main" val="4033598376"/>
+        <p14:creationId xmlns:p14="http://schemas.microsoft.com/office/powerpoint/2010/main" val="3168075583"/>
       </p:ext>
     </p:extLst>
   </p:cSld>
@@ -850,13 +859,7 @@
       </p:grpSpPr>
       <p:sp>
         <p:nvSpPr>
-          <p:cNvPr id="2" name="Title 1">
-            <a:extLst>
-              <a:ext uri="{FF2B5EF4-FFF2-40B4-BE49-F238E27FC236}">
-                <a16:creationId xmlns:a16="http://schemas.microsoft.com/office/drawing/2014/main" id="{D9772166-B45A-F0C6-DFE3-26A9571FFA74}"/>
-              </a:ext>
-            </a:extLst>
-          </p:cNvPr>
+          <p:cNvPr id="2" name="Title 1"/>
           <p:cNvSpPr>
             <a:spLocks noGrp="1"/>
           </p:cNvSpPr>
@@ -870,22 +873,16 @@
           <a:lstStyle/>
           <a:p>
             <a:r>
-              <a:rPr lang="en-GB"/>
+              <a:rPr lang="en-US" smtClean="0"/>
               <a:t>Click to edit Master title style</a:t>
             </a:r>
-            <a:endParaRPr lang="en-CH"/>
-          </a:p>
-        </p:txBody>
-      </p:sp>
-      <p:sp>
-        <p:nvSpPr>
-          <p:cNvPr id="3" name="Vertical Text Placeholder 2">
-            <a:extLst>
-              <a:ext uri="{FF2B5EF4-FFF2-40B4-BE49-F238E27FC236}">
-                <a16:creationId xmlns:a16="http://schemas.microsoft.com/office/drawing/2014/main" id="{BB00FBDD-A964-EB50-9032-CD8A92D7A7C8}"/>
-              </a:ext>
-            </a:extLst>
-          </p:cNvPr>
+            <a:endParaRPr lang="en-US"/>
+          </a:p>
+        </p:txBody>
+      </p:sp>
+      <p:sp>
+        <p:nvSpPr>
+          <p:cNvPr id="3" name="Vertical Text Placeholder 2"/>
           <p:cNvSpPr>
             <a:spLocks noGrp="1"/>
           </p:cNvSpPr>
@@ -900,50 +897,44 @@
           <a:p>
             <a:pPr lvl="0"/>
             <a:r>
-              <a:rPr lang="en-GB"/>
+              <a:rPr lang="en-US" smtClean="0"/>
               <a:t>Click to edit Master text styles</a:t>
             </a:r>
           </a:p>
           <a:p>
             <a:pPr lvl="1"/>
             <a:r>
-              <a:rPr lang="en-GB"/>
+              <a:rPr lang="en-US" smtClean="0"/>
               <a:t>Second level</a:t>
             </a:r>
           </a:p>
           <a:p>
             <a:pPr lvl="2"/>
             <a:r>
-              <a:rPr lang="en-GB"/>
+              <a:rPr lang="en-US" smtClean="0"/>
               <a:t>Third level</a:t>
             </a:r>
           </a:p>
           <a:p>
             <a:pPr lvl="3"/>
             <a:r>
-              <a:rPr lang="en-GB"/>
+              <a:rPr lang="en-US" smtClean="0"/>
               <a:t>Fourth level</a:t>
             </a:r>
           </a:p>
           <a:p>
             <a:pPr lvl="4"/>
             <a:r>
-              <a:rPr lang="en-GB"/>
+              <a:rPr lang="en-US" smtClean="0"/>
               <a:t>Fifth level</a:t>
             </a:r>
-            <a:endParaRPr lang="en-CH"/>
-          </a:p>
-        </p:txBody>
-      </p:sp>
-      <p:sp>
-        <p:nvSpPr>
-          <p:cNvPr id="4" name="Date Placeholder 3">
-            <a:extLst>
-              <a:ext uri="{FF2B5EF4-FFF2-40B4-BE49-F238E27FC236}">
-                <a16:creationId xmlns:a16="http://schemas.microsoft.com/office/drawing/2014/main" id="{FBA97972-DF54-6908-6C21-6572054EF1CF}"/>
-              </a:ext>
-            </a:extLst>
-          </p:cNvPr>
+            <a:endParaRPr lang="en-US"/>
+          </a:p>
+        </p:txBody>
+      </p:sp>
+      <p:sp>
+        <p:nvSpPr>
+          <p:cNvPr id="4" name="Date Placeholder 3"/>
           <p:cNvSpPr>
             <a:spLocks noGrp="1"/>
           </p:cNvSpPr>
@@ -956,23 +947,17 @@
           <a:bodyPr/>
           <a:lstStyle/>
           <a:p>
-            <a:fld id="{376CE277-F64F-CD4D-8092-A1FBD0226130}" type="datetimeFigureOut">
-              <a:rPr lang="en-CH" smtClean="0"/>
-              <a:t>10/23/24</a:t>
+            <a:fld id="{5BCAD085-E8A6-8845-BD4E-CB4CCA059FC4}" type="datetimeFigureOut">
+              <a:rPr lang="en-US" smtClean="0"/>
+              <a:t>1/27/13</a:t>
             </a:fld>
-            <a:endParaRPr lang="en-CH"/>
-          </a:p>
-        </p:txBody>
-      </p:sp>
-      <p:sp>
-        <p:nvSpPr>
-          <p:cNvPr id="5" name="Footer Placeholder 4">
-            <a:extLst>
-              <a:ext uri="{FF2B5EF4-FFF2-40B4-BE49-F238E27FC236}">
-                <a16:creationId xmlns:a16="http://schemas.microsoft.com/office/drawing/2014/main" id="{B4A10817-9340-F867-1D06-BB779C087334}"/>
-              </a:ext>
-            </a:extLst>
-          </p:cNvPr>
+            <a:endParaRPr lang="en-US"/>
+          </a:p>
+        </p:txBody>
+      </p:sp>
+      <p:sp>
+        <p:nvSpPr>
+          <p:cNvPr id="5" name="Footer Placeholder 4"/>
           <p:cNvSpPr>
             <a:spLocks noGrp="1"/>
           </p:cNvSpPr>
@@ -985,19 +970,13 @@
           <a:bodyPr/>
           <a:lstStyle/>
           <a:p>
-            <a:endParaRPr lang="en-CH"/>
-          </a:p>
-        </p:txBody>
-      </p:sp>
-      <p:sp>
-        <p:nvSpPr>
-          <p:cNvPr id="6" name="Slide Number Placeholder 5">
-            <a:extLst>
-              <a:ext uri="{FF2B5EF4-FFF2-40B4-BE49-F238E27FC236}">
-                <a16:creationId xmlns:a16="http://schemas.microsoft.com/office/drawing/2014/main" id="{BCECDBCB-5C38-24FB-6A6C-6383D2AFA066}"/>
-              </a:ext>
-            </a:extLst>
-          </p:cNvPr>
+            <a:endParaRPr lang="en-US"/>
+          </a:p>
+        </p:txBody>
+      </p:sp>
+      <p:sp>
+        <p:nvSpPr>
+          <p:cNvPr id="6" name="Slide Number Placeholder 5"/>
           <p:cNvSpPr>
             <a:spLocks noGrp="1"/>
           </p:cNvSpPr>
@@ -1010,18 +989,18 @@
           <a:bodyPr/>
           <a:lstStyle/>
           <a:p>
-            <a:fld id="{0107FE2D-0FD9-7D4B-A5A0-7E9AAE6B67D1}" type="slidenum">
-              <a:rPr lang="en-CH" smtClean="0"/>
+            <a:fld id="{C1FF6DA9-008F-8B48-92A6-B652298478BF}" type="slidenum">
+              <a:rPr lang="en-US" smtClean="0"/>
               <a:t>‹#›</a:t>
             </a:fld>
-            <a:endParaRPr lang="en-CH"/>
+            <a:endParaRPr lang="en-US"/>
           </a:p>
         </p:txBody>
       </p:sp>
     </p:spTree>
     <p:extLst>
       <p:ext uri="{BB962C8B-B14F-4D97-AF65-F5344CB8AC3E}">
-        <p14:creationId xmlns:p14="http://schemas.microsoft.com/office/powerpoint/2010/main" val="2814014643"/>
+        <p14:creationId xmlns:p14="http://schemas.microsoft.com/office/powerpoint/2010/main" val="2910927964"/>
       </p:ext>
     </p:extLst>
   </p:cSld>
@@ -1050,13 +1029,7 @@
       </p:grpSpPr>
       <p:sp>
         <p:nvSpPr>
-          <p:cNvPr id="2" name="Vertical Title 1">
-            <a:extLst>
-              <a:ext uri="{FF2B5EF4-FFF2-40B4-BE49-F238E27FC236}">
-                <a16:creationId xmlns:a16="http://schemas.microsoft.com/office/drawing/2014/main" id="{097D5419-D34E-A8AD-4056-972C49A4C5D9}"/>
-              </a:ext>
-            </a:extLst>
-          </p:cNvPr>
+          <p:cNvPr id="2" name="Vertical Title 1"/>
           <p:cNvSpPr>
             <a:spLocks noGrp="1"/>
           </p:cNvSpPr>
@@ -1066,8 +1039,8 @@
         </p:nvSpPr>
         <p:spPr>
           <a:xfrm>
-            <a:off x="8724900" y="365125"/>
-            <a:ext cx="2628900" cy="5811838"/>
+            <a:off x="6629400" y="274638"/>
+            <a:ext cx="2057400" cy="5851525"/>
           </a:xfrm>
         </p:spPr>
         <p:txBody>
@@ -1075,22 +1048,16 @@
           <a:lstStyle/>
           <a:p>
             <a:r>
-              <a:rPr lang="en-GB"/>
+              <a:rPr lang="en-US" smtClean="0"/>
               <a:t>Click to edit Master title style</a:t>
             </a:r>
-            <a:endParaRPr lang="en-CH"/>
-          </a:p>
-        </p:txBody>
-      </p:sp>
-      <p:sp>
-        <p:nvSpPr>
-          <p:cNvPr id="3" name="Vertical Text Placeholder 2">
-            <a:extLst>
-              <a:ext uri="{FF2B5EF4-FFF2-40B4-BE49-F238E27FC236}">
-                <a16:creationId xmlns:a16="http://schemas.microsoft.com/office/drawing/2014/main" id="{3C9EA23F-9464-7F31-1C13-CB1E1916362D}"/>
-              </a:ext>
-            </a:extLst>
-          </p:cNvPr>
+            <a:endParaRPr lang="en-US"/>
+          </a:p>
+        </p:txBody>
+      </p:sp>
+      <p:sp>
+        <p:nvSpPr>
+          <p:cNvPr id="3" name="Vertical Text Placeholder 2"/>
           <p:cNvSpPr>
             <a:spLocks noGrp="1"/>
           </p:cNvSpPr>
@@ -1100,8 +1067,8 @@
         </p:nvSpPr>
         <p:spPr>
           <a:xfrm>
-            <a:off x="838200" y="365125"/>
-            <a:ext cx="7734300" cy="5811838"/>
+            <a:off x="457200" y="274638"/>
+            <a:ext cx="6019800" cy="5851525"/>
           </a:xfrm>
         </p:spPr>
         <p:txBody>
@@ -1110,50 +1077,44 @@
           <a:p>
             <a:pPr lvl="0"/>
             <a:r>
-              <a:rPr lang="en-GB"/>
+              <a:rPr lang="en-US" smtClean="0"/>
               <a:t>Click to edit Master text styles</a:t>
             </a:r>
           </a:p>
           <a:p>
             <a:pPr lvl="1"/>
             <a:r>
-              <a:rPr lang="en-GB"/>
+              <a:rPr lang="en-US" smtClean="0"/>
               <a:t>Second level</a:t>
             </a:r>
           </a:p>
           <a:p>
             <a:pPr lvl="2"/>
             <a:r>
-              <a:rPr lang="en-GB"/>
+              <a:rPr lang="en-US" smtClean="0"/>
               <a:t>Third level</a:t>
             </a:r>
           </a:p>
           <a:p>
             <a:pPr lvl="3"/>
             <a:r>
-              <a:rPr lang="en-GB"/>
+              <a:rPr lang="en-US" smtClean="0"/>
               <a:t>Fourth level</a:t>
             </a:r>
           </a:p>
           <a:p>
             <a:pPr lvl="4"/>
             <a:r>
-              <a:rPr lang="en-GB"/>
+              <a:rPr lang="en-US" smtClean="0"/>
               <a:t>Fifth level</a:t>
             </a:r>
-            <a:endParaRPr lang="en-CH"/>
-          </a:p>
-        </p:txBody>
-      </p:sp>
-      <p:sp>
-        <p:nvSpPr>
-          <p:cNvPr id="4" name="Date Placeholder 3">
-            <a:extLst>
-              <a:ext uri="{FF2B5EF4-FFF2-40B4-BE49-F238E27FC236}">
-                <a16:creationId xmlns:a16="http://schemas.microsoft.com/office/drawing/2014/main" id="{E3CAD4BF-687C-205C-56F5-97C610FAB270}"/>
-              </a:ext>
-            </a:extLst>
-          </p:cNvPr>
+            <a:endParaRPr lang="en-US"/>
+          </a:p>
+        </p:txBody>
+      </p:sp>
+      <p:sp>
+        <p:nvSpPr>
+          <p:cNvPr id="4" name="Date Placeholder 3"/>
           <p:cNvSpPr>
             <a:spLocks noGrp="1"/>
           </p:cNvSpPr>
@@ -1166,23 +1127,17 @@
           <a:bodyPr/>
           <a:lstStyle/>
           <a:p>
-            <a:fld id="{376CE277-F64F-CD4D-8092-A1FBD0226130}" type="datetimeFigureOut">
-              <a:rPr lang="en-CH" smtClean="0"/>
-              <a:t>10/23/24</a:t>
+            <a:fld id="{5BCAD085-E8A6-8845-BD4E-CB4CCA059FC4}" type="datetimeFigureOut">
+              <a:rPr lang="en-US" smtClean="0"/>
+              <a:t>1/27/13</a:t>
             </a:fld>
-            <a:endParaRPr lang="en-CH"/>
-          </a:p>
-        </p:txBody>
-      </p:sp>
-      <p:sp>
-        <p:nvSpPr>
-          <p:cNvPr id="5" name="Footer Placeholder 4">
-            <a:extLst>
-              <a:ext uri="{FF2B5EF4-FFF2-40B4-BE49-F238E27FC236}">
-                <a16:creationId xmlns:a16="http://schemas.microsoft.com/office/drawing/2014/main" id="{C598C85F-1BCB-43C6-7F65-F97835A73B6E}"/>
-              </a:ext>
-            </a:extLst>
-          </p:cNvPr>
+            <a:endParaRPr lang="en-US"/>
+          </a:p>
+        </p:txBody>
+      </p:sp>
+      <p:sp>
+        <p:nvSpPr>
+          <p:cNvPr id="5" name="Footer Placeholder 4"/>
           <p:cNvSpPr>
             <a:spLocks noGrp="1"/>
           </p:cNvSpPr>
@@ -1195,19 +1150,13 @@
           <a:bodyPr/>
           <a:lstStyle/>
           <a:p>
-            <a:endParaRPr lang="en-CH"/>
-          </a:p>
-        </p:txBody>
-      </p:sp>
-      <p:sp>
-        <p:nvSpPr>
-          <p:cNvPr id="6" name="Slide Number Placeholder 5">
-            <a:extLst>
-              <a:ext uri="{FF2B5EF4-FFF2-40B4-BE49-F238E27FC236}">
-                <a16:creationId xmlns:a16="http://schemas.microsoft.com/office/drawing/2014/main" id="{F80D2BD8-7D18-596D-A877-998C6FD9063F}"/>
-              </a:ext>
-            </a:extLst>
-          </p:cNvPr>
+            <a:endParaRPr lang="en-US"/>
+          </a:p>
+        </p:txBody>
+      </p:sp>
+      <p:sp>
+        <p:nvSpPr>
+          <p:cNvPr id="6" name="Slide Number Placeholder 5"/>
           <p:cNvSpPr>
             <a:spLocks noGrp="1"/>
           </p:cNvSpPr>
@@ -1220,18 +1169,18 @@
           <a:bodyPr/>
           <a:lstStyle/>
           <a:p>
-            <a:fld id="{0107FE2D-0FD9-7D4B-A5A0-7E9AAE6B67D1}" type="slidenum">
-              <a:rPr lang="en-CH" smtClean="0"/>
+            <a:fld id="{C1FF6DA9-008F-8B48-92A6-B652298478BF}" type="slidenum">
+              <a:rPr lang="en-US" smtClean="0"/>
               <a:t>‹#›</a:t>
             </a:fld>
-            <a:endParaRPr lang="en-CH"/>
+            <a:endParaRPr lang="en-US"/>
           </a:p>
         </p:txBody>
       </p:sp>
     </p:spTree>
     <p:extLst>
       <p:ext uri="{BB962C8B-B14F-4D97-AF65-F5344CB8AC3E}">
-        <p14:creationId xmlns:p14="http://schemas.microsoft.com/office/powerpoint/2010/main" val="311478085"/>
+        <p14:creationId xmlns:p14="http://schemas.microsoft.com/office/powerpoint/2010/main" val="3612223792"/>
       </p:ext>
     </p:extLst>
   </p:cSld>
@@ -1260,13 +1209,7 @@
       </p:grpSpPr>
       <p:sp>
         <p:nvSpPr>
-          <p:cNvPr id="2" name="Title 1">
-            <a:extLst>
-              <a:ext uri="{FF2B5EF4-FFF2-40B4-BE49-F238E27FC236}">
-                <a16:creationId xmlns:a16="http://schemas.microsoft.com/office/drawing/2014/main" id="{35E45DD0-ABF7-E126-CFB8-9B80C3B9735F}"/>
-              </a:ext>
-            </a:extLst>
-          </p:cNvPr>
+          <p:cNvPr id="2" name="Title 1"/>
           <p:cNvSpPr>
             <a:spLocks noGrp="1"/>
           </p:cNvSpPr>
@@ -1280,22 +1223,16 @@
           <a:lstStyle/>
           <a:p>
             <a:r>
-              <a:rPr lang="en-GB"/>
+              <a:rPr lang="en-US" smtClean="0"/>
               <a:t>Click to edit Master title style</a:t>
             </a:r>
-            <a:endParaRPr lang="en-CH"/>
-          </a:p>
-        </p:txBody>
-      </p:sp>
-      <p:sp>
-        <p:nvSpPr>
-          <p:cNvPr id="3" name="Content Placeholder 2">
-            <a:extLst>
-              <a:ext uri="{FF2B5EF4-FFF2-40B4-BE49-F238E27FC236}">
-                <a16:creationId xmlns:a16="http://schemas.microsoft.com/office/drawing/2014/main" id="{E5520883-AF19-700D-7354-DB3AA3196CC7}"/>
-              </a:ext>
-            </a:extLst>
-          </p:cNvPr>
+            <a:endParaRPr lang="en-US"/>
+          </a:p>
+        </p:txBody>
+      </p:sp>
+      <p:sp>
+        <p:nvSpPr>
+          <p:cNvPr id="3" name="Content Placeholder 2"/>
           <p:cNvSpPr>
             <a:spLocks noGrp="1"/>
           </p:cNvSpPr>
@@ -1310,50 +1247,44 @@
           <a:p>
             <a:pPr lvl="0"/>
             <a:r>
-              <a:rPr lang="en-GB"/>
+              <a:rPr lang="en-US" smtClean="0"/>
               <a:t>Click to edit Master text styles</a:t>
             </a:r>
           </a:p>
           <a:p>
             <a:pPr lvl="1"/>
             <a:r>
-              <a:rPr lang="en-GB"/>
+              <a:rPr lang="en-US" smtClean="0"/>
               <a:t>Second level</a:t>
             </a:r>
           </a:p>
           <a:p>
             <a:pPr lvl="2"/>
             <a:r>
-              <a:rPr lang="en-GB"/>
+              <a:rPr lang="en-US" smtClean="0"/>
               <a:t>Third level</a:t>
             </a:r>
           </a:p>
           <a:p>
             <a:pPr lvl="3"/>
             <a:r>
-              <a:rPr lang="en-GB"/>
+              <a:rPr lang="en-US" smtClean="0"/>
               <a:t>Fourth level</a:t>
             </a:r>
           </a:p>
           <a:p>
             <a:pPr lvl="4"/>
             <a:r>
-              <a:rPr lang="en-GB"/>
+              <a:rPr lang="en-US" smtClean="0"/>
               <a:t>Fifth level</a:t>
             </a:r>
-            <a:endParaRPr lang="en-CH"/>
-          </a:p>
-        </p:txBody>
-      </p:sp>
-      <p:sp>
-        <p:nvSpPr>
-          <p:cNvPr id="4" name="Date Placeholder 3">
-            <a:extLst>
-              <a:ext uri="{FF2B5EF4-FFF2-40B4-BE49-F238E27FC236}">
-                <a16:creationId xmlns:a16="http://schemas.microsoft.com/office/drawing/2014/main" id="{EFFD9BDF-8A10-5201-93F4-45BDF20ADE47}"/>
-              </a:ext>
-            </a:extLst>
-          </p:cNvPr>
+            <a:endParaRPr lang="en-US"/>
+          </a:p>
+        </p:txBody>
+      </p:sp>
+      <p:sp>
+        <p:nvSpPr>
+          <p:cNvPr id="4" name="Date Placeholder 3"/>
           <p:cNvSpPr>
             <a:spLocks noGrp="1"/>
           </p:cNvSpPr>
@@ -1366,23 +1297,17 @@
           <a:bodyPr/>
           <a:lstStyle/>
           <a:p>
-            <a:fld id="{376CE277-F64F-CD4D-8092-A1FBD0226130}" type="datetimeFigureOut">
-              <a:rPr lang="en-CH" smtClean="0"/>
-              <a:t>10/23/24</a:t>
+            <a:fld id="{5BCAD085-E8A6-8845-BD4E-CB4CCA059FC4}" type="datetimeFigureOut">
+              <a:rPr lang="en-US" smtClean="0"/>
+              <a:t>1/27/13</a:t>
             </a:fld>
-            <a:endParaRPr lang="en-CH"/>
-          </a:p>
-        </p:txBody>
-      </p:sp>
-      <p:sp>
-        <p:nvSpPr>
-          <p:cNvPr id="5" name="Footer Placeholder 4">
-            <a:extLst>
-              <a:ext uri="{FF2B5EF4-FFF2-40B4-BE49-F238E27FC236}">
-                <a16:creationId xmlns:a16="http://schemas.microsoft.com/office/drawing/2014/main" id="{2E4D5C52-F393-D605-197E-917195C7032B}"/>
-              </a:ext>
-            </a:extLst>
-          </p:cNvPr>
+            <a:endParaRPr lang="en-US"/>
+          </a:p>
+        </p:txBody>
+      </p:sp>
+      <p:sp>
+        <p:nvSpPr>
+          <p:cNvPr id="5" name="Footer Placeholder 4"/>
           <p:cNvSpPr>
             <a:spLocks noGrp="1"/>
           </p:cNvSpPr>
@@ -1395,19 +1320,13 @@
           <a:bodyPr/>
           <a:lstStyle/>
           <a:p>
-            <a:endParaRPr lang="en-CH"/>
-          </a:p>
-        </p:txBody>
-      </p:sp>
-      <p:sp>
-        <p:nvSpPr>
-          <p:cNvPr id="6" name="Slide Number Placeholder 5">
-            <a:extLst>
-              <a:ext uri="{FF2B5EF4-FFF2-40B4-BE49-F238E27FC236}">
-                <a16:creationId xmlns:a16="http://schemas.microsoft.com/office/drawing/2014/main" id="{0041EAC7-6970-6ADE-D17A-85097EA87A56}"/>
-              </a:ext>
-            </a:extLst>
-          </p:cNvPr>
+            <a:endParaRPr lang="en-US"/>
+          </a:p>
+        </p:txBody>
+      </p:sp>
+      <p:sp>
+        <p:nvSpPr>
+          <p:cNvPr id="6" name="Slide Number Placeholder 5"/>
           <p:cNvSpPr>
             <a:spLocks noGrp="1"/>
           </p:cNvSpPr>
@@ -1420,18 +1339,18 @@
           <a:bodyPr/>
           <a:lstStyle/>
           <a:p>
-            <a:fld id="{0107FE2D-0FD9-7D4B-A5A0-7E9AAE6B67D1}" type="slidenum">
-              <a:rPr lang="en-CH" smtClean="0"/>
+            <a:fld id="{C1FF6DA9-008F-8B48-92A6-B652298478BF}" type="slidenum">
+              <a:rPr lang="en-US" smtClean="0"/>
               <a:t>‹#›</a:t>
             </a:fld>
-            <a:endParaRPr lang="en-CH"/>
+            <a:endParaRPr lang="en-US"/>
           </a:p>
         </p:txBody>
       </p:sp>
     </p:spTree>
     <p:extLst>
       <p:ext uri="{BB962C8B-B14F-4D97-AF65-F5344CB8AC3E}">
-        <p14:creationId xmlns:p14="http://schemas.microsoft.com/office/powerpoint/2010/main" val="3960011593"/>
+        <p14:creationId xmlns:p14="http://schemas.microsoft.com/office/powerpoint/2010/main" val="2614314258"/>
       </p:ext>
     </p:extLst>
   </p:cSld>
@@ -1460,13 +1379,7 @@
       </p:grpSpPr>
       <p:sp>
         <p:nvSpPr>
-          <p:cNvPr id="2" name="Title 1">
-            <a:extLst>
-              <a:ext uri="{FF2B5EF4-FFF2-40B4-BE49-F238E27FC236}">
-                <a16:creationId xmlns:a16="http://schemas.microsoft.com/office/drawing/2014/main" id="{59AC4C6D-C2AA-ECD6-8450-7FD876308EB8}"/>
-              </a:ext>
-            </a:extLst>
-          </p:cNvPr>
+          <p:cNvPr id="2" name="Title 1"/>
           <p:cNvSpPr>
             <a:spLocks noGrp="1"/>
           </p:cNvSpPr>
@@ -1476,137 +1389,131 @@
         </p:nvSpPr>
         <p:spPr>
           <a:xfrm>
-            <a:off x="831850" y="1709738"/>
-            <a:ext cx="10515600" cy="2852737"/>
+            <a:off x="722313" y="4406900"/>
+            <a:ext cx="7772400" cy="1362075"/>
           </a:xfrm>
         </p:spPr>
         <p:txBody>
+          <a:bodyPr anchor="t"/>
+          <a:lstStyle>
+            <a:lvl1pPr algn="l">
+              <a:defRPr sz="4000" b="1" cap="all"/>
+            </a:lvl1pPr>
+          </a:lstStyle>
+          <a:p>
+            <a:r>
+              <a:rPr lang="en-US" smtClean="0"/>
+              <a:t>Click to edit Master title style</a:t>
+            </a:r>
+            <a:endParaRPr lang="en-US"/>
+          </a:p>
+        </p:txBody>
+      </p:sp>
+      <p:sp>
+        <p:nvSpPr>
+          <p:cNvPr id="3" name="Text Placeholder 2"/>
+          <p:cNvSpPr>
+            <a:spLocks noGrp="1"/>
+          </p:cNvSpPr>
+          <p:nvPr>
+            <p:ph type="body" idx="1"/>
+          </p:nvPr>
+        </p:nvSpPr>
+        <p:spPr>
+          <a:xfrm>
+            <a:off x="722313" y="2906713"/>
+            <a:ext cx="7772400" cy="1500187"/>
+          </a:xfrm>
+        </p:spPr>
+        <p:txBody>
           <a:bodyPr anchor="b"/>
           <a:lstStyle>
-            <a:lvl1pPr>
-              <a:defRPr sz="6000"/>
-            </a:lvl1pPr>
-          </a:lstStyle>
-          <a:p>
-            <a:r>
-              <a:rPr lang="en-GB"/>
-              <a:t>Click to edit Master title style</a:t>
-            </a:r>
-            <a:endParaRPr lang="en-CH"/>
-          </a:p>
-        </p:txBody>
-      </p:sp>
-      <p:sp>
-        <p:nvSpPr>
-          <p:cNvPr id="3" name="Text Placeholder 2">
-            <a:extLst>
-              <a:ext uri="{FF2B5EF4-FFF2-40B4-BE49-F238E27FC236}">
-                <a16:creationId xmlns:a16="http://schemas.microsoft.com/office/drawing/2014/main" id="{04F4876E-41DE-D370-67E3-44998F3D5848}"/>
-              </a:ext>
-            </a:extLst>
-          </p:cNvPr>
-          <p:cNvSpPr>
-            <a:spLocks noGrp="1"/>
-          </p:cNvSpPr>
-          <p:nvPr>
-            <p:ph type="body" idx="1"/>
-          </p:nvPr>
-        </p:nvSpPr>
-        <p:spPr>
-          <a:xfrm>
-            <a:off x="831850" y="4589463"/>
-            <a:ext cx="10515600" cy="1500187"/>
-          </a:xfrm>
-        </p:spPr>
-        <p:txBody>
-          <a:bodyPr/>
-          <a:lstStyle>
             <a:lvl1pPr marL="0" indent="0">
               <a:buNone/>
-              <a:defRPr sz="2400">
+              <a:defRPr sz="2000">
                 <a:solidFill>
                   <a:schemeClr val="tx1">
-                    <a:tint val="82000"/>
+                    <a:tint val="75000"/>
                   </a:schemeClr>
                 </a:solidFill>
               </a:defRPr>
             </a:lvl1pPr>
             <a:lvl2pPr marL="457200" indent="0">
               <a:buNone/>
-              <a:defRPr sz="2000">
+              <a:defRPr sz="1800">
                 <a:solidFill>
                   <a:schemeClr val="tx1">
-                    <a:tint val="82000"/>
+                    <a:tint val="75000"/>
                   </a:schemeClr>
                 </a:solidFill>
               </a:defRPr>
             </a:lvl2pPr>
             <a:lvl3pPr marL="914400" indent="0">
               <a:buNone/>
-              <a:defRPr sz="1800">
+              <a:defRPr sz="1600">
                 <a:solidFill>
                   <a:schemeClr val="tx1">
-                    <a:tint val="82000"/>
+                    <a:tint val="75000"/>
                   </a:schemeClr>
                 </a:solidFill>
               </a:defRPr>
             </a:lvl3pPr>
             <a:lvl4pPr marL="1371600" indent="0">
               <a:buNone/>
-              <a:defRPr sz="1600">
+              <a:defRPr sz="1400">
                 <a:solidFill>
                   <a:schemeClr val="tx1">
-                    <a:tint val="82000"/>
+                    <a:tint val="75000"/>
                   </a:schemeClr>
                 </a:solidFill>
               </a:defRPr>
             </a:lvl4pPr>
             <a:lvl5pPr marL="1828800" indent="0">
               <a:buNone/>
-              <a:defRPr sz="1600">
+              <a:defRPr sz="1400">
                 <a:solidFill>
                   <a:schemeClr val="tx1">
-                    <a:tint val="82000"/>
+                    <a:tint val="75000"/>
                   </a:schemeClr>
                 </a:solidFill>
               </a:defRPr>
             </a:lvl5pPr>
             <a:lvl6pPr marL="2286000" indent="0">
               <a:buNone/>
-              <a:defRPr sz="1600">
+              <a:defRPr sz="1400">
                 <a:solidFill>
                   <a:schemeClr val="tx1">
-                    <a:tint val="82000"/>
+                    <a:tint val="75000"/>
                   </a:schemeClr>
                 </a:solidFill>
               </a:defRPr>
             </a:lvl6pPr>
             <a:lvl7pPr marL="2743200" indent="0">
               <a:buNone/>
-              <a:defRPr sz="1600">
+              <a:defRPr sz="1400">
                 <a:solidFill>
                   <a:schemeClr val="tx1">
-                    <a:tint val="82000"/>
+                    <a:tint val="75000"/>
                   </a:schemeClr>
                 </a:solidFill>
               </a:defRPr>
             </a:lvl7pPr>
             <a:lvl8pPr marL="3200400" indent="0">
               <a:buNone/>
-              <a:defRPr sz="1600">
+              <a:defRPr sz="1400">
                 <a:solidFill>
                   <a:schemeClr val="tx1">
-                    <a:tint val="82000"/>
+                    <a:tint val="75000"/>
                   </a:schemeClr>
                 </a:solidFill>
               </a:defRPr>
             </a:lvl8pPr>
             <a:lvl9pPr marL="3657600" indent="0">
               <a:buNone/>
-              <a:defRPr sz="1600">
+              <a:defRPr sz="1400">
                 <a:solidFill>
                   <a:schemeClr val="tx1">
-                    <a:tint val="82000"/>
+                    <a:tint val="75000"/>
                   </a:schemeClr>
                 </a:solidFill>
               </a:defRPr>
@@ -1615,7 +1522,7 @@
           <a:p>
             <a:pPr lvl="0"/>
             <a:r>
-              <a:rPr lang="en-GB"/>
+              <a:rPr lang="en-US" smtClean="0"/>
               <a:t>Click to edit Master text styles</a:t>
             </a:r>
           </a:p>
@@ -1623,13 +1530,7 @@
       </p:sp>
       <p:sp>
         <p:nvSpPr>
-          <p:cNvPr id="4" name="Date Placeholder 3">
-            <a:extLst>
-              <a:ext uri="{FF2B5EF4-FFF2-40B4-BE49-F238E27FC236}">
-                <a16:creationId xmlns:a16="http://schemas.microsoft.com/office/drawing/2014/main" id="{6BA04D15-E789-BFCE-BA2C-E43C96EEC9F3}"/>
-              </a:ext>
-            </a:extLst>
-          </p:cNvPr>
+          <p:cNvPr id="4" name="Date Placeholder 3"/>
           <p:cNvSpPr>
             <a:spLocks noGrp="1"/>
           </p:cNvSpPr>
@@ -1642,23 +1543,17 @@
           <a:bodyPr/>
           <a:lstStyle/>
           <a:p>
-            <a:fld id="{376CE277-F64F-CD4D-8092-A1FBD0226130}" type="datetimeFigureOut">
-              <a:rPr lang="en-CH" smtClean="0"/>
-              <a:t>10/23/24</a:t>
+            <a:fld id="{5BCAD085-E8A6-8845-BD4E-CB4CCA059FC4}" type="datetimeFigureOut">
+              <a:rPr lang="en-US" smtClean="0"/>
+              <a:t>1/27/13</a:t>
             </a:fld>
-            <a:endParaRPr lang="en-CH"/>
-          </a:p>
-        </p:txBody>
-      </p:sp>
-      <p:sp>
-        <p:nvSpPr>
-          <p:cNvPr id="5" name="Footer Placeholder 4">
-            <a:extLst>
-              <a:ext uri="{FF2B5EF4-FFF2-40B4-BE49-F238E27FC236}">
-                <a16:creationId xmlns:a16="http://schemas.microsoft.com/office/drawing/2014/main" id="{EBEAE4A9-B6BD-76A1-62B4-6A81C178FD34}"/>
-              </a:ext>
-            </a:extLst>
-          </p:cNvPr>
+            <a:endParaRPr lang="en-US"/>
+          </a:p>
+        </p:txBody>
+      </p:sp>
+      <p:sp>
+        <p:nvSpPr>
+          <p:cNvPr id="5" name="Footer Placeholder 4"/>
           <p:cNvSpPr>
             <a:spLocks noGrp="1"/>
           </p:cNvSpPr>
@@ -1671,19 +1566,13 @@
           <a:bodyPr/>
           <a:lstStyle/>
           <a:p>
-            <a:endParaRPr lang="en-CH"/>
-          </a:p>
-        </p:txBody>
-      </p:sp>
-      <p:sp>
-        <p:nvSpPr>
-          <p:cNvPr id="6" name="Slide Number Placeholder 5">
-            <a:extLst>
-              <a:ext uri="{FF2B5EF4-FFF2-40B4-BE49-F238E27FC236}">
-                <a16:creationId xmlns:a16="http://schemas.microsoft.com/office/drawing/2014/main" id="{3E9AED5F-9DDD-ED4D-FA38-580EE8C3FA66}"/>
-              </a:ext>
-            </a:extLst>
-          </p:cNvPr>
+            <a:endParaRPr lang="en-US"/>
+          </a:p>
+        </p:txBody>
+      </p:sp>
+      <p:sp>
+        <p:nvSpPr>
+          <p:cNvPr id="6" name="Slide Number Placeholder 5"/>
           <p:cNvSpPr>
             <a:spLocks noGrp="1"/>
           </p:cNvSpPr>
@@ -1696,18 +1585,18 @@
           <a:bodyPr/>
           <a:lstStyle/>
           <a:p>
-            <a:fld id="{0107FE2D-0FD9-7D4B-A5A0-7E9AAE6B67D1}" type="slidenum">
-              <a:rPr lang="en-CH" smtClean="0"/>
+            <a:fld id="{C1FF6DA9-008F-8B48-92A6-B652298478BF}" type="slidenum">
+              <a:rPr lang="en-US" smtClean="0"/>
               <a:t>‹#›</a:t>
             </a:fld>
-            <a:endParaRPr lang="en-CH"/>
+            <a:endParaRPr lang="en-US"/>
           </a:p>
         </p:txBody>
       </p:sp>
     </p:spTree>
     <p:extLst>
       <p:ext uri="{BB962C8B-B14F-4D97-AF65-F5344CB8AC3E}">
-        <p14:creationId xmlns:p14="http://schemas.microsoft.com/office/powerpoint/2010/main" val="3763261183"/>
+        <p14:creationId xmlns:p14="http://schemas.microsoft.com/office/powerpoint/2010/main" val="960648375"/>
       </p:ext>
     </p:extLst>
   </p:cSld>
@@ -1736,13 +1625,7 @@
       </p:grpSpPr>
       <p:sp>
         <p:nvSpPr>
-          <p:cNvPr id="2" name="Title 1">
-            <a:extLst>
-              <a:ext uri="{FF2B5EF4-FFF2-40B4-BE49-F238E27FC236}">
-                <a16:creationId xmlns:a16="http://schemas.microsoft.com/office/drawing/2014/main" id="{EC2AD60E-B5CC-ACEB-6903-A642EB7FE459}"/>
-              </a:ext>
-            </a:extLst>
-          </p:cNvPr>
+          <p:cNvPr id="2" name="Title 1"/>
           <p:cNvSpPr>
             <a:spLocks noGrp="1"/>
           </p:cNvSpPr>
@@ -1756,22 +1639,16 @@
           <a:lstStyle/>
           <a:p>
             <a:r>
-              <a:rPr lang="en-GB"/>
+              <a:rPr lang="en-US" smtClean="0"/>
               <a:t>Click to edit Master title style</a:t>
             </a:r>
-            <a:endParaRPr lang="en-CH"/>
-          </a:p>
-        </p:txBody>
-      </p:sp>
-      <p:sp>
-        <p:nvSpPr>
-          <p:cNvPr id="3" name="Content Placeholder 2">
-            <a:extLst>
-              <a:ext uri="{FF2B5EF4-FFF2-40B4-BE49-F238E27FC236}">
-                <a16:creationId xmlns:a16="http://schemas.microsoft.com/office/drawing/2014/main" id="{75A5EC18-FF4B-D84F-B849-5592EFBB96AE}"/>
-              </a:ext>
-            </a:extLst>
-          </p:cNvPr>
+            <a:endParaRPr lang="en-US"/>
+          </a:p>
+        </p:txBody>
+      </p:sp>
+      <p:sp>
+        <p:nvSpPr>
+          <p:cNvPr id="3" name="Content Placeholder 2"/>
           <p:cNvSpPr>
             <a:spLocks noGrp="1"/>
           </p:cNvSpPr>
@@ -1781,60 +1658,82 @@
         </p:nvSpPr>
         <p:spPr>
           <a:xfrm>
-            <a:off x="838200" y="1825625"/>
-            <a:ext cx="5181600" cy="4351338"/>
+            <a:off x="457200" y="1600200"/>
+            <a:ext cx="4038600" cy="4525963"/>
           </a:xfrm>
         </p:spPr>
         <p:txBody>
           <a:bodyPr/>
-          <a:lstStyle/>
+          <a:lstStyle>
+            <a:lvl1pPr>
+              <a:defRPr sz="2800"/>
+            </a:lvl1pPr>
+            <a:lvl2pPr>
+              <a:defRPr sz="2400"/>
+            </a:lvl2pPr>
+            <a:lvl3pPr>
+              <a:defRPr sz="2000"/>
+            </a:lvl3pPr>
+            <a:lvl4pPr>
+              <a:defRPr sz="1800"/>
+            </a:lvl4pPr>
+            <a:lvl5pPr>
+              <a:defRPr sz="1800"/>
+            </a:lvl5pPr>
+            <a:lvl6pPr>
+              <a:defRPr sz="1800"/>
+            </a:lvl6pPr>
+            <a:lvl7pPr>
+              <a:defRPr sz="1800"/>
+            </a:lvl7pPr>
+            <a:lvl8pPr>
+              <a:defRPr sz="1800"/>
+            </a:lvl8pPr>
+            <a:lvl9pPr>
+              <a:defRPr sz="1800"/>
+            </a:lvl9pPr>
+          </a:lstStyle>
           <a:p>
             <a:pPr lvl="0"/>
             <a:r>
-              <a:rPr lang="en-GB"/>
+              <a:rPr lang="en-US" smtClean="0"/>
               <a:t>Click to edit Master text styles</a:t>
             </a:r>
           </a:p>
           <a:p>
             <a:pPr lvl="1"/>
             <a:r>
-              <a:rPr lang="en-GB"/>
+              <a:rPr lang="en-US" smtClean="0"/>
               <a:t>Second level</a:t>
             </a:r>
           </a:p>
           <a:p>
             <a:pPr lvl="2"/>
             <a:r>
-              <a:rPr lang="en-GB"/>
+              <a:rPr lang="en-US" smtClean="0"/>
               <a:t>Third level</a:t>
             </a:r>
           </a:p>
           <a:p>
             <a:pPr lvl="3"/>
             <a:r>
-              <a:rPr lang="en-GB"/>
+              <a:rPr lang="en-US" smtClean="0"/>
               <a:t>Fourth level</a:t>
             </a:r>
           </a:p>
           <a:p>
             <a:pPr lvl="4"/>
             <a:r>
-              <a:rPr lang="en-GB"/>
+              <a:rPr lang="en-US" smtClean="0"/>
               <a:t>Fifth level</a:t>
             </a:r>
-            <a:endParaRPr lang="en-CH"/>
-          </a:p>
-        </p:txBody>
-      </p:sp>
-      <p:sp>
-        <p:nvSpPr>
-          <p:cNvPr id="4" name="Content Placeholder 3">
-            <a:extLst>
-              <a:ext uri="{FF2B5EF4-FFF2-40B4-BE49-F238E27FC236}">
-                <a16:creationId xmlns:a16="http://schemas.microsoft.com/office/drawing/2014/main" id="{3D7C9269-1A02-0D62-C120-066AFD48A4D4}"/>
-              </a:ext>
-            </a:extLst>
-          </p:cNvPr>
+            <a:endParaRPr lang="en-US"/>
+          </a:p>
+        </p:txBody>
+      </p:sp>
+      <p:sp>
+        <p:nvSpPr>
+          <p:cNvPr id="4" name="Content Placeholder 3"/>
           <p:cNvSpPr>
             <a:spLocks noGrp="1"/>
           </p:cNvSpPr>
@@ -1844,60 +1743,82 @@
         </p:nvSpPr>
         <p:spPr>
           <a:xfrm>
-            <a:off x="6172200" y="1825625"/>
-            <a:ext cx="5181600" cy="4351338"/>
+            <a:off x="4648200" y="1600200"/>
+            <a:ext cx="4038600" cy="4525963"/>
           </a:xfrm>
         </p:spPr>
         <p:txBody>
           <a:bodyPr/>
-          <a:lstStyle/>
+          <a:lstStyle>
+            <a:lvl1pPr>
+              <a:defRPr sz="2800"/>
+            </a:lvl1pPr>
+            <a:lvl2pPr>
+              <a:defRPr sz="2400"/>
+            </a:lvl2pPr>
+            <a:lvl3pPr>
+              <a:defRPr sz="2000"/>
+            </a:lvl3pPr>
+            <a:lvl4pPr>
+              <a:defRPr sz="1800"/>
+            </a:lvl4pPr>
+            <a:lvl5pPr>
+              <a:defRPr sz="1800"/>
+            </a:lvl5pPr>
+            <a:lvl6pPr>
+              <a:defRPr sz="1800"/>
+            </a:lvl6pPr>
+            <a:lvl7pPr>
+              <a:defRPr sz="1800"/>
+            </a:lvl7pPr>
+            <a:lvl8pPr>
+              <a:defRPr sz="1800"/>
+            </a:lvl8pPr>
+            <a:lvl9pPr>
+              <a:defRPr sz="1800"/>
+            </a:lvl9pPr>
+          </a:lstStyle>
           <a:p>
             <a:pPr lvl="0"/>
             <a:r>
-              <a:rPr lang="en-GB"/>
+              <a:rPr lang="en-US" smtClean="0"/>
               <a:t>Click to edit Master text styles</a:t>
             </a:r>
           </a:p>
           <a:p>
             <a:pPr lvl="1"/>
             <a:r>
-              <a:rPr lang="en-GB"/>
+              <a:rPr lang="en-US" smtClean="0"/>
               <a:t>Second level</a:t>
             </a:r>
           </a:p>
           <a:p>
             <a:pPr lvl="2"/>
             <a:r>
-              <a:rPr lang="en-GB"/>
+              <a:rPr lang="en-US" smtClean="0"/>
               <a:t>Third level</a:t>
             </a:r>
           </a:p>
           <a:p>
             <a:pPr lvl="3"/>
             <a:r>
-              <a:rPr lang="en-GB"/>
+              <a:rPr lang="en-US" smtClean="0"/>
               <a:t>Fourth level</a:t>
             </a:r>
           </a:p>
           <a:p>
             <a:pPr lvl="4"/>
             <a:r>
-              <a:rPr lang="en-GB"/>
+              <a:rPr lang="en-US" smtClean="0"/>
               <a:t>Fifth level</a:t>
             </a:r>
-            <a:endParaRPr lang="en-CH"/>
-          </a:p>
-        </p:txBody>
-      </p:sp>
-      <p:sp>
-        <p:nvSpPr>
-          <p:cNvPr id="5" name="Date Placeholder 4">
-            <a:extLst>
-              <a:ext uri="{FF2B5EF4-FFF2-40B4-BE49-F238E27FC236}">
-                <a16:creationId xmlns:a16="http://schemas.microsoft.com/office/drawing/2014/main" id="{9C7BC4C4-1A3A-91CB-3785-3B68F3F6EE0B}"/>
-              </a:ext>
-            </a:extLst>
-          </p:cNvPr>
+            <a:endParaRPr lang="en-US"/>
+          </a:p>
+        </p:txBody>
+      </p:sp>
+      <p:sp>
+        <p:nvSpPr>
+          <p:cNvPr id="5" name="Date Placeholder 4"/>
           <p:cNvSpPr>
             <a:spLocks noGrp="1"/>
           </p:cNvSpPr>
@@ -1910,23 +1831,17 @@
           <a:bodyPr/>
           <a:lstStyle/>
           <a:p>
-            <a:fld id="{376CE277-F64F-CD4D-8092-A1FBD0226130}" type="datetimeFigureOut">
-              <a:rPr lang="en-CH" smtClean="0"/>
-              <a:t>10/23/24</a:t>
+            <a:fld id="{5BCAD085-E8A6-8845-BD4E-CB4CCA059FC4}" type="datetimeFigureOut">
+              <a:rPr lang="en-US" smtClean="0"/>
+              <a:t>1/27/13</a:t>
             </a:fld>
-            <a:endParaRPr lang="en-CH"/>
-          </a:p>
-        </p:txBody>
-      </p:sp>
-      <p:sp>
-        <p:nvSpPr>
-          <p:cNvPr id="6" name="Footer Placeholder 5">
-            <a:extLst>
-              <a:ext uri="{FF2B5EF4-FFF2-40B4-BE49-F238E27FC236}">
-                <a16:creationId xmlns:a16="http://schemas.microsoft.com/office/drawing/2014/main" id="{6CC434F9-C5C2-E1BA-EAE2-13CC8F5CDE66}"/>
-              </a:ext>
-            </a:extLst>
-          </p:cNvPr>
+            <a:endParaRPr lang="en-US"/>
+          </a:p>
+        </p:txBody>
+      </p:sp>
+      <p:sp>
+        <p:nvSpPr>
+          <p:cNvPr id="6" name="Footer Placeholder 5"/>
           <p:cNvSpPr>
             <a:spLocks noGrp="1"/>
           </p:cNvSpPr>
@@ -1939,19 +1854,13 @@
           <a:bodyPr/>
           <a:lstStyle/>
           <a:p>
-            <a:endParaRPr lang="en-CH"/>
-          </a:p>
-        </p:txBody>
-      </p:sp>
-      <p:sp>
-        <p:nvSpPr>
-          <p:cNvPr id="7" name="Slide Number Placeholder 6">
-            <a:extLst>
-              <a:ext uri="{FF2B5EF4-FFF2-40B4-BE49-F238E27FC236}">
-                <a16:creationId xmlns:a16="http://schemas.microsoft.com/office/drawing/2014/main" id="{8E88415F-6E4A-472E-460C-972764C3DD46}"/>
-              </a:ext>
-            </a:extLst>
-          </p:cNvPr>
+            <a:endParaRPr lang="en-US"/>
+          </a:p>
+        </p:txBody>
+      </p:sp>
+      <p:sp>
+        <p:nvSpPr>
+          <p:cNvPr id="7" name="Slide Number Placeholder 6"/>
           <p:cNvSpPr>
             <a:spLocks noGrp="1"/>
           </p:cNvSpPr>
@@ -1964,18 +1873,18 @@
           <a:bodyPr/>
           <a:lstStyle/>
           <a:p>
-            <a:fld id="{0107FE2D-0FD9-7D4B-A5A0-7E9AAE6B67D1}" type="slidenum">
-              <a:rPr lang="en-CH" smtClean="0"/>
+            <a:fld id="{C1FF6DA9-008F-8B48-92A6-B652298478BF}" type="slidenum">
+              <a:rPr lang="en-US" smtClean="0"/>
               <a:t>‹#›</a:t>
             </a:fld>
-            <a:endParaRPr lang="en-CH"/>
+            <a:endParaRPr lang="en-US"/>
           </a:p>
         </p:txBody>
       </p:sp>
     </p:spTree>
     <p:extLst>
       <p:ext uri="{BB962C8B-B14F-4D97-AF65-F5344CB8AC3E}">
-        <p14:creationId xmlns:p14="http://schemas.microsoft.com/office/powerpoint/2010/main" val="2667300570"/>
+        <p14:creationId xmlns:p14="http://schemas.microsoft.com/office/powerpoint/2010/main" val="2782244947"/>
       </p:ext>
     </p:extLst>
   </p:cSld>
@@ -2004,58 +1913,45 @@
       </p:grpSpPr>
       <p:sp>
         <p:nvSpPr>
-          <p:cNvPr id="2" name="Title 1">
-            <a:extLst>
-              <a:ext uri="{FF2B5EF4-FFF2-40B4-BE49-F238E27FC236}">
-                <a16:creationId xmlns:a16="http://schemas.microsoft.com/office/drawing/2014/main" id="{86C84AE6-C416-D33E-6936-D1DA3E219E67}"/>
-              </a:ext>
-            </a:extLst>
-          </p:cNvPr>
+          <p:cNvPr id="2" name="Title 1"/>
           <p:cNvSpPr>
             <a:spLocks noGrp="1"/>
           </p:cNvSpPr>
           <p:nvPr>
             <p:ph type="title"/>
+          </p:nvPr>
+        </p:nvSpPr>
+        <p:spPr/>
+        <p:txBody>
+          <a:bodyPr/>
+          <a:lstStyle>
+            <a:lvl1pPr>
+              <a:defRPr/>
+            </a:lvl1pPr>
+          </a:lstStyle>
+          <a:p>
+            <a:r>
+              <a:rPr lang="en-US" smtClean="0"/>
+              <a:t>Click to edit Master title style</a:t>
+            </a:r>
+            <a:endParaRPr lang="en-US"/>
+          </a:p>
+        </p:txBody>
+      </p:sp>
+      <p:sp>
+        <p:nvSpPr>
+          <p:cNvPr id="3" name="Text Placeholder 2"/>
+          <p:cNvSpPr>
+            <a:spLocks noGrp="1"/>
+          </p:cNvSpPr>
+          <p:nvPr>
+            <p:ph type="body" idx="1"/>
           </p:nvPr>
         </p:nvSpPr>
         <p:spPr>
           <a:xfrm>
-            <a:off x="839788" y="365125"/>
-            <a:ext cx="10515600" cy="1325563"/>
-          </a:xfrm>
-        </p:spPr>
-        <p:txBody>
-          <a:bodyPr/>
-          <a:lstStyle/>
-          <a:p>
-            <a:r>
-              <a:rPr lang="en-GB"/>
-              <a:t>Click to edit Master title style</a:t>
-            </a:r>
-            <a:endParaRPr lang="en-CH"/>
-          </a:p>
-        </p:txBody>
-      </p:sp>
-      <p:sp>
-        <p:nvSpPr>
-          <p:cNvPr id="3" name="Text Placeholder 2">
-            <a:extLst>
-              <a:ext uri="{FF2B5EF4-FFF2-40B4-BE49-F238E27FC236}">
-                <a16:creationId xmlns:a16="http://schemas.microsoft.com/office/drawing/2014/main" id="{4DA84CFB-8BE5-5C8A-85C8-011B954C17A4}"/>
-              </a:ext>
-            </a:extLst>
-          </p:cNvPr>
-          <p:cNvSpPr>
-            <a:spLocks noGrp="1"/>
-          </p:cNvSpPr>
-          <p:nvPr>
-            <p:ph type="body" idx="1"/>
-          </p:nvPr>
-        </p:nvSpPr>
-        <p:spPr>
-          <a:xfrm>
-            <a:off x="839788" y="1681163"/>
-            <a:ext cx="5157787" cy="823912"/>
+            <a:off x="457200" y="1535113"/>
+            <a:ext cx="4040188" cy="639762"/>
           </a:xfrm>
         </p:spPr>
         <p:txBody>
@@ -2101,7 +1997,7 @@
           <a:p>
             <a:pPr lvl="0"/>
             <a:r>
-              <a:rPr lang="en-GB"/>
+              <a:rPr lang="en-US" smtClean="0"/>
               <a:t>Click to edit Master text styles</a:t>
             </a:r>
           </a:p>
@@ -2109,13 +2005,7 @@
       </p:sp>
       <p:sp>
         <p:nvSpPr>
-          <p:cNvPr id="4" name="Content Placeholder 3">
-            <a:extLst>
-              <a:ext uri="{FF2B5EF4-FFF2-40B4-BE49-F238E27FC236}">
-                <a16:creationId xmlns:a16="http://schemas.microsoft.com/office/drawing/2014/main" id="{C9737E40-CCD8-7123-43F7-13D856B08C50}"/>
-              </a:ext>
-            </a:extLst>
-          </p:cNvPr>
+          <p:cNvPr id="4" name="Content Placeholder 3"/>
           <p:cNvSpPr>
             <a:spLocks noGrp="1"/>
           </p:cNvSpPr>
@@ -2125,60 +2015,82 @@
         </p:nvSpPr>
         <p:spPr>
           <a:xfrm>
-            <a:off x="839788" y="2505075"/>
-            <a:ext cx="5157787" cy="3684588"/>
+            <a:off x="457200" y="2174875"/>
+            <a:ext cx="4040188" cy="3951288"/>
           </a:xfrm>
         </p:spPr>
         <p:txBody>
           <a:bodyPr/>
-          <a:lstStyle/>
+          <a:lstStyle>
+            <a:lvl1pPr>
+              <a:defRPr sz="2400"/>
+            </a:lvl1pPr>
+            <a:lvl2pPr>
+              <a:defRPr sz="2000"/>
+            </a:lvl2pPr>
+            <a:lvl3pPr>
+              <a:defRPr sz="1800"/>
+            </a:lvl3pPr>
+            <a:lvl4pPr>
+              <a:defRPr sz="1600"/>
+            </a:lvl4pPr>
+            <a:lvl5pPr>
+              <a:defRPr sz="1600"/>
+            </a:lvl5pPr>
+            <a:lvl6pPr>
+              <a:defRPr sz="1600"/>
+            </a:lvl6pPr>
+            <a:lvl7pPr>
+              <a:defRPr sz="1600"/>
+            </a:lvl7pPr>
+            <a:lvl8pPr>
+              <a:defRPr sz="1600"/>
+            </a:lvl8pPr>
+            <a:lvl9pPr>
+              <a:defRPr sz="1600"/>
+            </a:lvl9pPr>
+          </a:lstStyle>
           <a:p>
             <a:pPr lvl="0"/>
             <a:r>
-              <a:rPr lang="en-GB"/>
+              <a:rPr lang="en-US" smtClean="0"/>
               <a:t>Click to edit Master text styles</a:t>
             </a:r>
           </a:p>
           <a:p>
             <a:pPr lvl="1"/>
             <a:r>
-              <a:rPr lang="en-GB"/>
+              <a:rPr lang="en-US" smtClean="0"/>
               <a:t>Second level</a:t>
             </a:r>
           </a:p>
           <a:p>
             <a:pPr lvl="2"/>
             <a:r>
-              <a:rPr lang="en-GB"/>
+              <a:rPr lang="en-US" smtClean="0"/>
               <a:t>Third level</a:t>
             </a:r>
           </a:p>
           <a:p>
             <a:pPr lvl="3"/>
             <a:r>
-              <a:rPr lang="en-GB"/>
+              <a:rPr lang="en-US" smtClean="0"/>
               <a:t>Fourth level</a:t>
             </a:r>
           </a:p>
           <a:p>
             <a:pPr lvl="4"/>
             <a:r>
-              <a:rPr lang="en-GB"/>
+              <a:rPr lang="en-US" smtClean="0"/>
               <a:t>Fifth level</a:t>
             </a:r>
-            <a:endParaRPr lang="en-CH"/>
-          </a:p>
-        </p:txBody>
-      </p:sp>
-      <p:sp>
-        <p:nvSpPr>
-          <p:cNvPr id="5" name="Text Placeholder 4">
-            <a:extLst>
-              <a:ext uri="{FF2B5EF4-FFF2-40B4-BE49-F238E27FC236}">
-                <a16:creationId xmlns:a16="http://schemas.microsoft.com/office/drawing/2014/main" id="{AAA16496-D13C-2036-87DC-707C220FDA27}"/>
-              </a:ext>
-            </a:extLst>
-          </p:cNvPr>
+            <a:endParaRPr lang="en-US"/>
+          </a:p>
+        </p:txBody>
+      </p:sp>
+      <p:sp>
+        <p:nvSpPr>
+          <p:cNvPr id="5" name="Text Placeholder 4"/>
           <p:cNvSpPr>
             <a:spLocks noGrp="1"/>
           </p:cNvSpPr>
@@ -2188,8 +2100,8 @@
         </p:nvSpPr>
         <p:spPr>
           <a:xfrm>
-            <a:off x="6172200" y="1681163"/>
-            <a:ext cx="5183188" cy="823912"/>
+            <a:off x="4645025" y="1535113"/>
+            <a:ext cx="4041775" cy="639762"/>
           </a:xfrm>
         </p:spPr>
         <p:txBody>
@@ -2235,7 +2147,7 @@
           <a:p>
             <a:pPr lvl="0"/>
             <a:r>
-              <a:rPr lang="en-GB"/>
+              <a:rPr lang="en-US" smtClean="0"/>
               <a:t>Click to edit Master text styles</a:t>
             </a:r>
           </a:p>
@@ -2243,13 +2155,7 @@
       </p:sp>
       <p:sp>
         <p:nvSpPr>
-          <p:cNvPr id="6" name="Content Placeholder 5">
-            <a:extLst>
-              <a:ext uri="{FF2B5EF4-FFF2-40B4-BE49-F238E27FC236}">
-                <a16:creationId xmlns:a16="http://schemas.microsoft.com/office/drawing/2014/main" id="{BBCEDA3F-235F-B869-A09F-F22956EFB2DB}"/>
-              </a:ext>
-            </a:extLst>
-          </p:cNvPr>
+          <p:cNvPr id="6" name="Content Placeholder 5"/>
           <p:cNvSpPr>
             <a:spLocks noGrp="1"/>
           </p:cNvSpPr>
@@ -2259,60 +2165,82 @@
         </p:nvSpPr>
         <p:spPr>
           <a:xfrm>
-            <a:off x="6172200" y="2505075"/>
-            <a:ext cx="5183188" cy="3684588"/>
+            <a:off x="4645025" y="2174875"/>
+            <a:ext cx="4041775" cy="3951288"/>
           </a:xfrm>
         </p:spPr>
         <p:txBody>
           <a:bodyPr/>
-          <a:lstStyle/>
+          <a:lstStyle>
+            <a:lvl1pPr>
+              <a:defRPr sz="2400"/>
+            </a:lvl1pPr>
+            <a:lvl2pPr>
+              <a:defRPr sz="2000"/>
+            </a:lvl2pPr>
+            <a:lvl3pPr>
+              <a:defRPr sz="1800"/>
+            </a:lvl3pPr>
+            <a:lvl4pPr>
+              <a:defRPr sz="1600"/>
+            </a:lvl4pPr>
+            <a:lvl5pPr>
+              <a:defRPr sz="1600"/>
+            </a:lvl5pPr>
+            <a:lvl6pPr>
+              <a:defRPr sz="1600"/>
+            </a:lvl6pPr>
+            <a:lvl7pPr>
+              <a:defRPr sz="1600"/>
+            </a:lvl7pPr>
+            <a:lvl8pPr>
+              <a:defRPr sz="1600"/>
+            </a:lvl8pPr>
+            <a:lvl9pPr>
+              <a:defRPr sz="1600"/>
+            </a:lvl9pPr>
+          </a:lstStyle>
           <a:p>
             <a:pPr lvl="0"/>
             <a:r>
-              <a:rPr lang="en-GB"/>
+              <a:rPr lang="en-US" smtClean="0"/>
               <a:t>Click to edit Master text styles</a:t>
             </a:r>
           </a:p>
           <a:p>
             <a:pPr lvl="1"/>
             <a:r>
-              <a:rPr lang="en-GB"/>
+              <a:rPr lang="en-US" smtClean="0"/>
               <a:t>Second level</a:t>
             </a:r>
           </a:p>
           <a:p>
             <a:pPr lvl="2"/>
             <a:r>
-              <a:rPr lang="en-GB"/>
+              <a:rPr lang="en-US" smtClean="0"/>
               <a:t>Third level</a:t>
             </a:r>
           </a:p>
           <a:p>
             <a:pPr lvl="3"/>
             <a:r>
-              <a:rPr lang="en-GB"/>
+              <a:rPr lang="en-US" smtClean="0"/>
               <a:t>Fourth level</a:t>
             </a:r>
           </a:p>
           <a:p>
             <a:pPr lvl="4"/>
             <a:r>
-              <a:rPr lang="en-GB"/>
+              <a:rPr lang="en-US" smtClean="0"/>
               <a:t>Fifth level</a:t>
             </a:r>
-            <a:endParaRPr lang="en-CH"/>
-          </a:p>
-        </p:txBody>
-      </p:sp>
-      <p:sp>
-        <p:nvSpPr>
-          <p:cNvPr id="7" name="Date Placeholder 6">
-            <a:extLst>
-              <a:ext uri="{FF2B5EF4-FFF2-40B4-BE49-F238E27FC236}">
-                <a16:creationId xmlns:a16="http://schemas.microsoft.com/office/drawing/2014/main" id="{D6974848-534A-C9F5-7200-29927352EA28}"/>
-              </a:ext>
-            </a:extLst>
-          </p:cNvPr>
+            <a:endParaRPr lang="en-US"/>
+          </a:p>
+        </p:txBody>
+      </p:sp>
+      <p:sp>
+        <p:nvSpPr>
+          <p:cNvPr id="7" name="Date Placeholder 6"/>
           <p:cNvSpPr>
             <a:spLocks noGrp="1"/>
           </p:cNvSpPr>
@@ -2325,23 +2253,17 @@
           <a:bodyPr/>
           <a:lstStyle/>
           <a:p>
-            <a:fld id="{376CE277-F64F-CD4D-8092-A1FBD0226130}" type="datetimeFigureOut">
-              <a:rPr lang="en-CH" smtClean="0"/>
-              <a:t>10/23/24</a:t>
+            <a:fld id="{5BCAD085-E8A6-8845-BD4E-CB4CCA059FC4}" type="datetimeFigureOut">
+              <a:rPr lang="en-US" smtClean="0"/>
+              <a:t>1/27/13</a:t>
             </a:fld>
-            <a:endParaRPr lang="en-CH"/>
-          </a:p>
-        </p:txBody>
-      </p:sp>
-      <p:sp>
-        <p:nvSpPr>
-          <p:cNvPr id="8" name="Footer Placeholder 7">
-            <a:extLst>
-              <a:ext uri="{FF2B5EF4-FFF2-40B4-BE49-F238E27FC236}">
-                <a16:creationId xmlns:a16="http://schemas.microsoft.com/office/drawing/2014/main" id="{E8D00B17-54FD-D9A7-6723-AF4B7014DAB5}"/>
-              </a:ext>
-            </a:extLst>
-          </p:cNvPr>
+            <a:endParaRPr lang="en-US"/>
+          </a:p>
+        </p:txBody>
+      </p:sp>
+      <p:sp>
+        <p:nvSpPr>
+          <p:cNvPr id="8" name="Footer Placeholder 7"/>
           <p:cNvSpPr>
             <a:spLocks noGrp="1"/>
           </p:cNvSpPr>
@@ -2354,19 +2276,13 @@
           <a:bodyPr/>
           <a:lstStyle/>
           <a:p>
-            <a:endParaRPr lang="en-CH"/>
-          </a:p>
-        </p:txBody>
-      </p:sp>
-      <p:sp>
-        <p:nvSpPr>
-          <p:cNvPr id="9" name="Slide Number Placeholder 8">
-            <a:extLst>
-              <a:ext uri="{FF2B5EF4-FFF2-40B4-BE49-F238E27FC236}">
-                <a16:creationId xmlns:a16="http://schemas.microsoft.com/office/drawing/2014/main" id="{85E45C03-9019-3586-F8E2-EF4445F11EB6}"/>
-              </a:ext>
-            </a:extLst>
-          </p:cNvPr>
+            <a:endParaRPr lang="en-US"/>
+          </a:p>
+        </p:txBody>
+      </p:sp>
+      <p:sp>
+        <p:nvSpPr>
+          <p:cNvPr id="9" name="Slide Number Placeholder 8"/>
           <p:cNvSpPr>
             <a:spLocks noGrp="1"/>
           </p:cNvSpPr>
@@ -2379,18 +2295,18 @@
           <a:bodyPr/>
           <a:lstStyle/>
           <a:p>
-            <a:fld id="{0107FE2D-0FD9-7D4B-A5A0-7E9AAE6B67D1}" type="slidenum">
-              <a:rPr lang="en-CH" smtClean="0"/>
+            <a:fld id="{C1FF6DA9-008F-8B48-92A6-B652298478BF}" type="slidenum">
+              <a:rPr lang="en-US" smtClean="0"/>
               <a:t>‹#›</a:t>
             </a:fld>
-            <a:endParaRPr lang="en-CH"/>
+            <a:endParaRPr lang="en-US"/>
           </a:p>
         </p:txBody>
       </p:sp>
     </p:spTree>
     <p:extLst>
       <p:ext uri="{BB962C8B-B14F-4D97-AF65-F5344CB8AC3E}">
-        <p14:creationId xmlns:p14="http://schemas.microsoft.com/office/powerpoint/2010/main" val="3019529714"/>
+        <p14:creationId xmlns:p14="http://schemas.microsoft.com/office/powerpoint/2010/main" val="990158736"/>
       </p:ext>
     </p:extLst>
   </p:cSld>
@@ -2419,13 +2335,7 @@
       </p:grpSpPr>
       <p:sp>
         <p:nvSpPr>
-          <p:cNvPr id="2" name="Title 1">
-            <a:extLst>
-              <a:ext uri="{FF2B5EF4-FFF2-40B4-BE49-F238E27FC236}">
-                <a16:creationId xmlns:a16="http://schemas.microsoft.com/office/drawing/2014/main" id="{6F264694-033E-7F5B-6EA9-E8C2D568997F}"/>
-              </a:ext>
-            </a:extLst>
-          </p:cNvPr>
+          <p:cNvPr id="2" name="Title 1"/>
           <p:cNvSpPr>
             <a:spLocks noGrp="1"/>
           </p:cNvSpPr>
@@ -2439,22 +2349,16 @@
           <a:lstStyle/>
           <a:p>
             <a:r>
-              <a:rPr lang="en-GB"/>
+              <a:rPr lang="en-US" smtClean="0"/>
               <a:t>Click to edit Master title style</a:t>
             </a:r>
-            <a:endParaRPr lang="en-CH"/>
-          </a:p>
-        </p:txBody>
-      </p:sp>
-      <p:sp>
-        <p:nvSpPr>
-          <p:cNvPr id="3" name="Date Placeholder 2">
-            <a:extLst>
-              <a:ext uri="{FF2B5EF4-FFF2-40B4-BE49-F238E27FC236}">
-                <a16:creationId xmlns:a16="http://schemas.microsoft.com/office/drawing/2014/main" id="{FD581C36-2910-F3D5-A5B4-EEE95B832CF7}"/>
-              </a:ext>
-            </a:extLst>
-          </p:cNvPr>
+            <a:endParaRPr lang="en-US"/>
+          </a:p>
+        </p:txBody>
+      </p:sp>
+      <p:sp>
+        <p:nvSpPr>
+          <p:cNvPr id="3" name="Date Placeholder 2"/>
           <p:cNvSpPr>
             <a:spLocks noGrp="1"/>
           </p:cNvSpPr>
@@ -2467,23 +2371,17 @@
           <a:bodyPr/>
           <a:lstStyle/>
           <a:p>
-            <a:fld id="{376CE277-F64F-CD4D-8092-A1FBD0226130}" type="datetimeFigureOut">
-              <a:rPr lang="en-CH" smtClean="0"/>
-              <a:t>10/23/24</a:t>
+            <a:fld id="{5BCAD085-E8A6-8845-BD4E-CB4CCA059FC4}" type="datetimeFigureOut">
+              <a:rPr lang="en-US" smtClean="0"/>
+              <a:t>1/27/13</a:t>
             </a:fld>
-            <a:endParaRPr lang="en-CH"/>
-          </a:p>
-        </p:txBody>
-      </p:sp>
-      <p:sp>
-        <p:nvSpPr>
-          <p:cNvPr id="4" name="Footer Placeholder 3">
-            <a:extLst>
-              <a:ext uri="{FF2B5EF4-FFF2-40B4-BE49-F238E27FC236}">
-                <a16:creationId xmlns:a16="http://schemas.microsoft.com/office/drawing/2014/main" id="{D5A2B2D1-9B28-CE89-0639-174727978AF9}"/>
-              </a:ext>
-            </a:extLst>
-          </p:cNvPr>
+            <a:endParaRPr lang="en-US"/>
+          </a:p>
+        </p:txBody>
+      </p:sp>
+      <p:sp>
+        <p:nvSpPr>
+          <p:cNvPr id="4" name="Footer Placeholder 3"/>
           <p:cNvSpPr>
             <a:spLocks noGrp="1"/>
           </p:cNvSpPr>
@@ -2496,19 +2394,13 @@
           <a:bodyPr/>
           <a:lstStyle/>
           <a:p>
-            <a:endParaRPr lang="en-CH"/>
-          </a:p>
-        </p:txBody>
-      </p:sp>
-      <p:sp>
-        <p:nvSpPr>
-          <p:cNvPr id="5" name="Slide Number Placeholder 4">
-            <a:extLst>
-              <a:ext uri="{FF2B5EF4-FFF2-40B4-BE49-F238E27FC236}">
-                <a16:creationId xmlns:a16="http://schemas.microsoft.com/office/drawing/2014/main" id="{4E42D83C-469D-600B-9ECA-7E6C037A7284}"/>
-              </a:ext>
-            </a:extLst>
-          </p:cNvPr>
+            <a:endParaRPr lang="en-US"/>
+          </a:p>
+        </p:txBody>
+      </p:sp>
+      <p:sp>
+        <p:nvSpPr>
+          <p:cNvPr id="5" name="Slide Number Placeholder 4"/>
           <p:cNvSpPr>
             <a:spLocks noGrp="1"/>
           </p:cNvSpPr>
@@ -2521,18 +2413,18 @@
           <a:bodyPr/>
           <a:lstStyle/>
           <a:p>
-            <a:fld id="{0107FE2D-0FD9-7D4B-A5A0-7E9AAE6B67D1}" type="slidenum">
-              <a:rPr lang="en-CH" smtClean="0"/>
+            <a:fld id="{C1FF6DA9-008F-8B48-92A6-B652298478BF}" type="slidenum">
+              <a:rPr lang="en-US" smtClean="0"/>
               <a:t>‹#›</a:t>
             </a:fld>
-            <a:endParaRPr lang="en-CH"/>
+            <a:endParaRPr lang="en-US"/>
           </a:p>
         </p:txBody>
       </p:sp>
     </p:spTree>
     <p:extLst>
       <p:ext uri="{BB962C8B-B14F-4D97-AF65-F5344CB8AC3E}">
-        <p14:creationId xmlns:p14="http://schemas.microsoft.com/office/powerpoint/2010/main" val="505662284"/>
+        <p14:creationId xmlns:p14="http://schemas.microsoft.com/office/powerpoint/2010/main" val="727027711"/>
       </p:ext>
     </p:extLst>
   </p:cSld>
@@ -2561,13 +2453,7 @@
       </p:grpSpPr>
       <p:sp>
         <p:nvSpPr>
-          <p:cNvPr id="2" name="Date Placeholder 1">
-            <a:extLst>
-              <a:ext uri="{FF2B5EF4-FFF2-40B4-BE49-F238E27FC236}">
-                <a16:creationId xmlns:a16="http://schemas.microsoft.com/office/drawing/2014/main" id="{6112A4DB-92D9-D107-F6D8-068D22CBCA5A}"/>
-              </a:ext>
-            </a:extLst>
-          </p:cNvPr>
+          <p:cNvPr id="2" name="Date Placeholder 1"/>
           <p:cNvSpPr>
             <a:spLocks noGrp="1"/>
           </p:cNvSpPr>
@@ -2580,23 +2466,17 @@
           <a:bodyPr/>
           <a:lstStyle/>
           <a:p>
-            <a:fld id="{376CE277-F64F-CD4D-8092-A1FBD0226130}" type="datetimeFigureOut">
-              <a:rPr lang="en-CH" smtClean="0"/>
-              <a:t>10/23/24</a:t>
+            <a:fld id="{5BCAD085-E8A6-8845-BD4E-CB4CCA059FC4}" type="datetimeFigureOut">
+              <a:rPr lang="en-US" smtClean="0"/>
+              <a:t>1/27/13</a:t>
             </a:fld>
-            <a:endParaRPr lang="en-CH"/>
-          </a:p>
-        </p:txBody>
-      </p:sp>
-      <p:sp>
-        <p:nvSpPr>
-          <p:cNvPr id="3" name="Footer Placeholder 2">
-            <a:extLst>
-              <a:ext uri="{FF2B5EF4-FFF2-40B4-BE49-F238E27FC236}">
-                <a16:creationId xmlns:a16="http://schemas.microsoft.com/office/drawing/2014/main" id="{D4AE6556-9ECC-F32E-1833-14A9414CF26A}"/>
-              </a:ext>
-            </a:extLst>
-          </p:cNvPr>
+            <a:endParaRPr lang="en-US"/>
+          </a:p>
+        </p:txBody>
+      </p:sp>
+      <p:sp>
+        <p:nvSpPr>
+          <p:cNvPr id="3" name="Footer Placeholder 2"/>
           <p:cNvSpPr>
             <a:spLocks noGrp="1"/>
           </p:cNvSpPr>
@@ -2609,19 +2489,13 @@
           <a:bodyPr/>
           <a:lstStyle/>
           <a:p>
-            <a:endParaRPr lang="en-CH"/>
-          </a:p>
-        </p:txBody>
-      </p:sp>
-      <p:sp>
-        <p:nvSpPr>
-          <p:cNvPr id="4" name="Slide Number Placeholder 3">
-            <a:extLst>
-              <a:ext uri="{FF2B5EF4-FFF2-40B4-BE49-F238E27FC236}">
-                <a16:creationId xmlns:a16="http://schemas.microsoft.com/office/drawing/2014/main" id="{D24A386F-941D-28B2-37FC-7BA8C2C57637}"/>
-              </a:ext>
-            </a:extLst>
-          </p:cNvPr>
+            <a:endParaRPr lang="en-US"/>
+          </a:p>
+        </p:txBody>
+      </p:sp>
+      <p:sp>
+        <p:nvSpPr>
+          <p:cNvPr id="4" name="Slide Number Placeholder 3"/>
           <p:cNvSpPr>
             <a:spLocks noGrp="1"/>
           </p:cNvSpPr>
@@ -2634,18 +2508,18 @@
           <a:bodyPr/>
           <a:lstStyle/>
           <a:p>
-            <a:fld id="{0107FE2D-0FD9-7D4B-A5A0-7E9AAE6B67D1}" type="slidenum">
-              <a:rPr lang="en-CH" smtClean="0"/>
+            <a:fld id="{C1FF6DA9-008F-8B48-92A6-B652298478BF}" type="slidenum">
+              <a:rPr lang="en-US" smtClean="0"/>
               <a:t>‹#›</a:t>
             </a:fld>
-            <a:endParaRPr lang="en-CH"/>
+            <a:endParaRPr lang="en-US"/>
           </a:p>
         </p:txBody>
       </p:sp>
     </p:spTree>
     <p:extLst>
       <p:ext uri="{BB962C8B-B14F-4D97-AF65-F5344CB8AC3E}">
-        <p14:creationId xmlns:p14="http://schemas.microsoft.com/office/powerpoint/2010/main" val="2111930249"/>
+        <p14:creationId xmlns:p14="http://schemas.microsoft.com/office/powerpoint/2010/main" val="1212999818"/>
       </p:ext>
     </p:extLst>
   </p:cSld>
@@ -2674,13 +2548,7 @@
       </p:grpSpPr>
       <p:sp>
         <p:nvSpPr>
-          <p:cNvPr id="2" name="Title 1">
-            <a:extLst>
-              <a:ext uri="{FF2B5EF4-FFF2-40B4-BE49-F238E27FC236}">
-                <a16:creationId xmlns:a16="http://schemas.microsoft.com/office/drawing/2014/main" id="{8929C316-348C-5FD4-46B1-4F5CF7F6B0DF}"/>
-              </a:ext>
-            </a:extLst>
-          </p:cNvPr>
+          <p:cNvPr id="2" name="Title 1"/>
           <p:cNvSpPr>
             <a:spLocks noGrp="1"/>
           </p:cNvSpPr>
@@ -2690,35 +2558,29 @@
         </p:nvSpPr>
         <p:spPr>
           <a:xfrm>
-            <a:off x="839788" y="457200"/>
-            <a:ext cx="3932237" cy="1600200"/>
+            <a:off x="457200" y="273050"/>
+            <a:ext cx="3008313" cy="1162050"/>
           </a:xfrm>
         </p:spPr>
         <p:txBody>
           <a:bodyPr anchor="b"/>
           <a:lstStyle>
-            <a:lvl1pPr>
-              <a:defRPr sz="3200"/>
+            <a:lvl1pPr algn="l">
+              <a:defRPr sz="2000" b="1"/>
             </a:lvl1pPr>
           </a:lstStyle>
           <a:p>
             <a:r>
-              <a:rPr lang="en-GB"/>
+              <a:rPr lang="en-US" smtClean="0"/>
               <a:t>Click to edit Master title style</a:t>
             </a:r>
-            <a:endParaRPr lang="en-CH"/>
-          </a:p>
-        </p:txBody>
-      </p:sp>
-      <p:sp>
-        <p:nvSpPr>
-          <p:cNvPr id="3" name="Content Placeholder 2">
-            <a:extLst>
-              <a:ext uri="{FF2B5EF4-FFF2-40B4-BE49-F238E27FC236}">
-                <a16:creationId xmlns:a16="http://schemas.microsoft.com/office/drawing/2014/main" id="{6E57E431-CF2E-DE9C-1DFA-4455CA7558F2}"/>
-              </a:ext>
-            </a:extLst>
-          </p:cNvPr>
+            <a:endParaRPr lang="en-US"/>
+          </a:p>
+        </p:txBody>
+      </p:sp>
+      <p:sp>
+        <p:nvSpPr>
+          <p:cNvPr id="3" name="Content Placeholder 2"/>
           <p:cNvSpPr>
             <a:spLocks noGrp="1"/>
           </p:cNvSpPr>
@@ -2728,8 +2590,8 @@
         </p:nvSpPr>
         <p:spPr>
           <a:xfrm>
-            <a:off x="5183188" y="987425"/>
-            <a:ext cx="6172200" cy="4873625"/>
+            <a:off x="3575050" y="273050"/>
+            <a:ext cx="5111750" cy="5853113"/>
           </a:xfrm>
         </p:spPr>
         <p:txBody>
@@ -2766,50 +2628,44 @@
           <a:p>
             <a:pPr lvl="0"/>
             <a:r>
-              <a:rPr lang="en-GB"/>
+              <a:rPr lang="en-US" smtClean="0"/>
               <a:t>Click to edit Master text styles</a:t>
             </a:r>
           </a:p>
           <a:p>
             <a:pPr lvl="1"/>
             <a:r>
-              <a:rPr lang="en-GB"/>
+              <a:rPr lang="en-US" smtClean="0"/>
               <a:t>Second level</a:t>
             </a:r>
           </a:p>
           <a:p>
             <a:pPr lvl="2"/>
             <a:r>
-              <a:rPr lang="en-GB"/>
+              <a:rPr lang="en-US" smtClean="0"/>
               <a:t>Third level</a:t>
             </a:r>
           </a:p>
           <a:p>
             <a:pPr lvl="3"/>
             <a:r>
-              <a:rPr lang="en-GB"/>
+              <a:rPr lang="en-US" smtClean="0"/>
               <a:t>Fourth level</a:t>
             </a:r>
           </a:p>
           <a:p>
             <a:pPr lvl="4"/>
             <a:r>
-              <a:rPr lang="en-GB"/>
+              <a:rPr lang="en-US" smtClean="0"/>
               <a:t>Fifth level</a:t>
             </a:r>
-            <a:endParaRPr lang="en-CH"/>
-          </a:p>
-        </p:txBody>
-      </p:sp>
-      <p:sp>
-        <p:nvSpPr>
-          <p:cNvPr id="4" name="Text Placeholder 3">
-            <a:extLst>
-              <a:ext uri="{FF2B5EF4-FFF2-40B4-BE49-F238E27FC236}">
-                <a16:creationId xmlns:a16="http://schemas.microsoft.com/office/drawing/2014/main" id="{8DA60372-CB9A-7FF5-F2A3-1F00F8BED154}"/>
-              </a:ext>
-            </a:extLst>
-          </p:cNvPr>
+            <a:endParaRPr lang="en-US"/>
+          </a:p>
+        </p:txBody>
+      </p:sp>
+      <p:sp>
+        <p:nvSpPr>
+          <p:cNvPr id="4" name="Text Placeholder 3"/>
           <p:cNvSpPr>
             <a:spLocks noGrp="1"/>
           </p:cNvSpPr>
@@ -2819,8 +2675,8 @@
         </p:nvSpPr>
         <p:spPr>
           <a:xfrm>
-            <a:off x="839788" y="2057400"/>
-            <a:ext cx="3932237" cy="3811588"/>
+            <a:off x="457200" y="1435100"/>
+            <a:ext cx="3008313" cy="4691063"/>
           </a:xfrm>
         </p:spPr>
         <p:txBody>
@@ -2828,45 +2684,45 @@
           <a:lstStyle>
             <a:lvl1pPr marL="0" indent="0">
               <a:buNone/>
-              <a:defRPr sz="1600"/>
+              <a:defRPr sz="1400"/>
             </a:lvl1pPr>
             <a:lvl2pPr marL="457200" indent="0">
               <a:buNone/>
-              <a:defRPr sz="1400"/>
+              <a:defRPr sz="1200"/>
             </a:lvl2pPr>
             <a:lvl3pPr marL="914400" indent="0">
               <a:buNone/>
-              <a:defRPr sz="1200"/>
+              <a:defRPr sz="1000"/>
             </a:lvl3pPr>
             <a:lvl4pPr marL="1371600" indent="0">
               <a:buNone/>
-              <a:defRPr sz="1000"/>
+              <a:defRPr sz="900"/>
             </a:lvl4pPr>
             <a:lvl5pPr marL="1828800" indent="0">
               <a:buNone/>
-              <a:defRPr sz="1000"/>
+              <a:defRPr sz="900"/>
             </a:lvl5pPr>
             <a:lvl6pPr marL="2286000" indent="0">
               <a:buNone/>
-              <a:defRPr sz="1000"/>
+              <a:defRPr sz="900"/>
             </a:lvl6pPr>
             <a:lvl7pPr marL="2743200" indent="0">
               <a:buNone/>
-              <a:defRPr sz="1000"/>
+              <a:defRPr sz="900"/>
             </a:lvl7pPr>
             <a:lvl8pPr marL="3200400" indent="0">
               <a:buNone/>
-              <a:defRPr sz="1000"/>
+              <a:defRPr sz="900"/>
             </a:lvl8pPr>
             <a:lvl9pPr marL="3657600" indent="0">
               <a:buNone/>
-              <a:defRPr sz="1000"/>
+              <a:defRPr sz="900"/>
             </a:lvl9pPr>
           </a:lstStyle>
           <a:p>
             <a:pPr lvl="0"/>
             <a:r>
-              <a:rPr lang="en-GB"/>
+              <a:rPr lang="en-US" smtClean="0"/>
               <a:t>Click to edit Master text styles</a:t>
             </a:r>
           </a:p>
@@ -2874,13 +2730,7 @@
       </p:sp>
       <p:sp>
         <p:nvSpPr>
-          <p:cNvPr id="5" name="Date Placeholder 4">
-            <a:extLst>
-              <a:ext uri="{FF2B5EF4-FFF2-40B4-BE49-F238E27FC236}">
-                <a16:creationId xmlns:a16="http://schemas.microsoft.com/office/drawing/2014/main" id="{D5CCE260-BD3B-CC04-5E8E-323AC2B901F2}"/>
-              </a:ext>
-            </a:extLst>
-          </p:cNvPr>
+          <p:cNvPr id="5" name="Date Placeholder 4"/>
           <p:cNvSpPr>
             <a:spLocks noGrp="1"/>
           </p:cNvSpPr>
@@ -2893,23 +2743,17 @@
           <a:bodyPr/>
           <a:lstStyle/>
           <a:p>
-            <a:fld id="{376CE277-F64F-CD4D-8092-A1FBD0226130}" type="datetimeFigureOut">
-              <a:rPr lang="en-CH" smtClean="0"/>
-              <a:t>10/23/24</a:t>
+            <a:fld id="{5BCAD085-E8A6-8845-BD4E-CB4CCA059FC4}" type="datetimeFigureOut">
+              <a:rPr lang="en-US" smtClean="0"/>
+              <a:t>1/27/13</a:t>
             </a:fld>
-            <a:endParaRPr lang="en-CH"/>
-          </a:p>
-        </p:txBody>
-      </p:sp>
-      <p:sp>
-        <p:nvSpPr>
-          <p:cNvPr id="6" name="Footer Placeholder 5">
-            <a:extLst>
-              <a:ext uri="{FF2B5EF4-FFF2-40B4-BE49-F238E27FC236}">
-                <a16:creationId xmlns:a16="http://schemas.microsoft.com/office/drawing/2014/main" id="{B1E2353D-4C40-A92B-D39F-D849D4095B69}"/>
-              </a:ext>
-            </a:extLst>
-          </p:cNvPr>
+            <a:endParaRPr lang="en-US"/>
+          </a:p>
+        </p:txBody>
+      </p:sp>
+      <p:sp>
+        <p:nvSpPr>
+          <p:cNvPr id="6" name="Footer Placeholder 5"/>
           <p:cNvSpPr>
             <a:spLocks noGrp="1"/>
           </p:cNvSpPr>
@@ -2922,19 +2766,13 @@
           <a:bodyPr/>
           <a:lstStyle/>
           <a:p>
-            <a:endParaRPr lang="en-CH"/>
-          </a:p>
-        </p:txBody>
-      </p:sp>
-      <p:sp>
-        <p:nvSpPr>
-          <p:cNvPr id="7" name="Slide Number Placeholder 6">
-            <a:extLst>
-              <a:ext uri="{FF2B5EF4-FFF2-40B4-BE49-F238E27FC236}">
-                <a16:creationId xmlns:a16="http://schemas.microsoft.com/office/drawing/2014/main" id="{7C053456-0BB7-C8A7-54B2-C9AFA3592249}"/>
-              </a:ext>
-            </a:extLst>
-          </p:cNvPr>
+            <a:endParaRPr lang="en-US"/>
+          </a:p>
+        </p:txBody>
+      </p:sp>
+      <p:sp>
+        <p:nvSpPr>
+          <p:cNvPr id="7" name="Slide Number Placeholder 6"/>
           <p:cNvSpPr>
             <a:spLocks noGrp="1"/>
           </p:cNvSpPr>
@@ -2947,18 +2785,18 @@
           <a:bodyPr/>
           <a:lstStyle/>
           <a:p>
-            <a:fld id="{0107FE2D-0FD9-7D4B-A5A0-7E9AAE6B67D1}" type="slidenum">
-              <a:rPr lang="en-CH" smtClean="0"/>
+            <a:fld id="{C1FF6DA9-008F-8B48-92A6-B652298478BF}" type="slidenum">
+              <a:rPr lang="en-US" smtClean="0"/>
               <a:t>‹#›</a:t>
             </a:fld>
-            <a:endParaRPr lang="en-CH"/>
+            <a:endParaRPr lang="en-US"/>
           </a:p>
         </p:txBody>
       </p:sp>
     </p:spTree>
     <p:extLst>
       <p:ext uri="{BB962C8B-B14F-4D97-AF65-F5344CB8AC3E}">
-        <p14:creationId xmlns:p14="http://schemas.microsoft.com/office/powerpoint/2010/main" val="1821406399"/>
+        <p14:creationId xmlns:p14="http://schemas.microsoft.com/office/powerpoint/2010/main" val="1840726560"/>
       </p:ext>
     </p:extLst>
   </p:cSld>
@@ -2987,13 +2825,7 @@
       </p:grpSpPr>
       <p:sp>
         <p:nvSpPr>
-          <p:cNvPr id="2" name="Title 1">
-            <a:extLst>
-              <a:ext uri="{FF2B5EF4-FFF2-40B4-BE49-F238E27FC236}">
-                <a16:creationId xmlns:a16="http://schemas.microsoft.com/office/drawing/2014/main" id="{E9AE9744-F37B-6499-48ED-492D7CE49CF9}"/>
-              </a:ext>
-            </a:extLst>
-          </p:cNvPr>
+          <p:cNvPr id="2" name="Title 1"/>
           <p:cNvSpPr>
             <a:spLocks noGrp="1"/>
           </p:cNvSpPr>
@@ -3003,35 +2835,29 @@
         </p:nvSpPr>
         <p:spPr>
           <a:xfrm>
-            <a:off x="839788" y="457200"/>
-            <a:ext cx="3932237" cy="1600200"/>
+            <a:off x="1792288" y="4800600"/>
+            <a:ext cx="5486400" cy="566738"/>
           </a:xfrm>
         </p:spPr>
         <p:txBody>
           <a:bodyPr anchor="b"/>
           <a:lstStyle>
-            <a:lvl1pPr>
-              <a:defRPr sz="3200"/>
+            <a:lvl1pPr algn="l">
+              <a:defRPr sz="2000" b="1"/>
             </a:lvl1pPr>
           </a:lstStyle>
           <a:p>
             <a:r>
-              <a:rPr lang="en-GB"/>
+              <a:rPr lang="en-US" smtClean="0"/>
               <a:t>Click to edit Master title style</a:t>
             </a:r>
-            <a:endParaRPr lang="en-CH"/>
-          </a:p>
-        </p:txBody>
-      </p:sp>
-      <p:sp>
-        <p:nvSpPr>
-          <p:cNvPr id="3" name="Picture Placeholder 2">
-            <a:extLst>
-              <a:ext uri="{FF2B5EF4-FFF2-40B4-BE49-F238E27FC236}">
-                <a16:creationId xmlns:a16="http://schemas.microsoft.com/office/drawing/2014/main" id="{451C9C90-0DEF-8F5A-E9AA-78388FBB3891}"/>
-              </a:ext>
-            </a:extLst>
-          </p:cNvPr>
+            <a:endParaRPr lang="en-US"/>
+          </a:p>
+        </p:txBody>
+      </p:sp>
+      <p:sp>
+        <p:nvSpPr>
+          <p:cNvPr id="3" name="Picture Placeholder 2"/>
           <p:cNvSpPr>
             <a:spLocks noGrp="1"/>
           </p:cNvSpPr>
@@ -3041,8 +2867,8 @@
         </p:nvSpPr>
         <p:spPr>
           <a:xfrm>
-            <a:off x="5183188" y="987425"/>
-            <a:ext cx="6172200" cy="4873625"/>
+            <a:off x="1792288" y="612775"/>
+            <a:ext cx="5486400" cy="4114800"/>
           </a:xfrm>
         </p:spPr>
         <p:txBody>
@@ -3086,19 +2912,13 @@
             </a:lvl9pPr>
           </a:lstStyle>
           <a:p>
-            <a:endParaRPr lang="en-CH"/>
-          </a:p>
-        </p:txBody>
-      </p:sp>
-      <p:sp>
-        <p:nvSpPr>
-          <p:cNvPr id="4" name="Text Placeholder 3">
-            <a:extLst>
-              <a:ext uri="{FF2B5EF4-FFF2-40B4-BE49-F238E27FC236}">
-                <a16:creationId xmlns:a16="http://schemas.microsoft.com/office/drawing/2014/main" id="{1134C853-0A81-5921-13A7-04E05D3028B2}"/>
-              </a:ext>
-            </a:extLst>
-          </p:cNvPr>
+            <a:endParaRPr lang="en-US"/>
+          </a:p>
+        </p:txBody>
+      </p:sp>
+      <p:sp>
+        <p:nvSpPr>
+          <p:cNvPr id="4" name="Text Placeholder 3"/>
           <p:cNvSpPr>
             <a:spLocks noGrp="1"/>
           </p:cNvSpPr>
@@ -3108,8 +2928,8 @@
         </p:nvSpPr>
         <p:spPr>
           <a:xfrm>
-            <a:off x="839788" y="2057400"/>
-            <a:ext cx="3932237" cy="3811588"/>
+            <a:off x="1792288" y="5367338"/>
+            <a:ext cx="5486400" cy="804862"/>
           </a:xfrm>
         </p:spPr>
         <p:txBody>
@@ -3117,45 +2937,45 @@
           <a:lstStyle>
             <a:lvl1pPr marL="0" indent="0">
               <a:buNone/>
-              <a:defRPr sz="1600"/>
+              <a:defRPr sz="1400"/>
             </a:lvl1pPr>
             <a:lvl2pPr marL="457200" indent="0">
               <a:buNone/>
-              <a:defRPr sz="1400"/>
+              <a:defRPr sz="1200"/>
             </a:lvl2pPr>
             <a:lvl3pPr marL="914400" indent="0">
               <a:buNone/>
-              <a:defRPr sz="1200"/>
+              <a:defRPr sz="1000"/>
             </a:lvl3pPr>
             <a:lvl4pPr marL="1371600" indent="0">
               <a:buNone/>
-              <a:defRPr sz="1000"/>
+              <a:defRPr sz="900"/>
             </a:lvl4pPr>
             <a:lvl5pPr marL="1828800" indent="0">
               <a:buNone/>
-              <a:defRPr sz="1000"/>
+              <a:defRPr sz="900"/>
             </a:lvl5pPr>
             <a:lvl6pPr marL="2286000" indent="0">
               <a:buNone/>
-              <a:defRPr sz="1000"/>
+              <a:defRPr sz="900"/>
             </a:lvl6pPr>
             <a:lvl7pPr marL="2743200" indent="0">
               <a:buNone/>
-              <a:defRPr sz="1000"/>
+              <a:defRPr sz="900"/>
             </a:lvl7pPr>
             <a:lvl8pPr marL="3200400" indent="0">
               <a:buNone/>
-              <a:defRPr sz="1000"/>
+              <a:defRPr sz="900"/>
             </a:lvl8pPr>
             <a:lvl9pPr marL="3657600" indent="0">
               <a:buNone/>
-              <a:defRPr sz="1000"/>
+              <a:defRPr sz="900"/>
             </a:lvl9pPr>
           </a:lstStyle>
           <a:p>
             <a:pPr lvl="0"/>
             <a:r>
-              <a:rPr lang="en-GB"/>
+              <a:rPr lang="en-US" smtClean="0"/>
               <a:t>Click to edit Master text styles</a:t>
             </a:r>
           </a:p>
@@ -3163,13 +2983,7 @@
       </p:sp>
       <p:sp>
         <p:nvSpPr>
-          <p:cNvPr id="5" name="Date Placeholder 4">
-            <a:extLst>
-              <a:ext uri="{FF2B5EF4-FFF2-40B4-BE49-F238E27FC236}">
-                <a16:creationId xmlns:a16="http://schemas.microsoft.com/office/drawing/2014/main" id="{DC76116D-C5C6-906B-A656-AEDE2EC9D583}"/>
-              </a:ext>
-            </a:extLst>
-          </p:cNvPr>
+          <p:cNvPr id="5" name="Date Placeholder 4"/>
           <p:cNvSpPr>
             <a:spLocks noGrp="1"/>
           </p:cNvSpPr>
@@ -3182,23 +2996,17 @@
           <a:bodyPr/>
           <a:lstStyle/>
           <a:p>
-            <a:fld id="{376CE277-F64F-CD4D-8092-A1FBD0226130}" type="datetimeFigureOut">
-              <a:rPr lang="en-CH" smtClean="0"/>
-              <a:t>10/23/24</a:t>
+            <a:fld id="{5BCAD085-E8A6-8845-BD4E-CB4CCA059FC4}" type="datetimeFigureOut">
+              <a:rPr lang="en-US" smtClean="0"/>
+              <a:t>1/27/13</a:t>
             </a:fld>
-            <a:endParaRPr lang="en-CH"/>
-          </a:p>
-        </p:txBody>
-      </p:sp>
-      <p:sp>
-        <p:nvSpPr>
-          <p:cNvPr id="6" name="Footer Placeholder 5">
-            <a:extLst>
-              <a:ext uri="{FF2B5EF4-FFF2-40B4-BE49-F238E27FC236}">
-                <a16:creationId xmlns:a16="http://schemas.microsoft.com/office/drawing/2014/main" id="{DF32825B-903B-1ACE-A5EA-49EAAA405045}"/>
-              </a:ext>
-            </a:extLst>
-          </p:cNvPr>
+            <a:endParaRPr lang="en-US"/>
+          </a:p>
+        </p:txBody>
+      </p:sp>
+      <p:sp>
+        <p:nvSpPr>
+          <p:cNvPr id="6" name="Footer Placeholder 5"/>
           <p:cNvSpPr>
             <a:spLocks noGrp="1"/>
           </p:cNvSpPr>
@@ -3211,19 +3019,13 @@
           <a:bodyPr/>
           <a:lstStyle/>
           <a:p>
-            <a:endParaRPr lang="en-CH"/>
-          </a:p>
-        </p:txBody>
-      </p:sp>
-      <p:sp>
-        <p:nvSpPr>
-          <p:cNvPr id="7" name="Slide Number Placeholder 6">
-            <a:extLst>
-              <a:ext uri="{FF2B5EF4-FFF2-40B4-BE49-F238E27FC236}">
-                <a16:creationId xmlns:a16="http://schemas.microsoft.com/office/drawing/2014/main" id="{03457C1D-7A38-2A4B-3AA8-9CFB7C29ED1C}"/>
-              </a:ext>
-            </a:extLst>
-          </p:cNvPr>
+            <a:endParaRPr lang="en-US"/>
+          </a:p>
+        </p:txBody>
+      </p:sp>
+      <p:sp>
+        <p:nvSpPr>
+          <p:cNvPr id="7" name="Slide Number Placeholder 6"/>
           <p:cNvSpPr>
             <a:spLocks noGrp="1"/>
           </p:cNvSpPr>
@@ -3236,18 +3038,18 @@
           <a:bodyPr/>
           <a:lstStyle/>
           <a:p>
-            <a:fld id="{0107FE2D-0FD9-7D4B-A5A0-7E9AAE6B67D1}" type="slidenum">
-              <a:rPr lang="en-CH" smtClean="0"/>
+            <a:fld id="{C1FF6DA9-008F-8B48-92A6-B652298478BF}" type="slidenum">
+              <a:rPr lang="en-US" smtClean="0"/>
               <a:t>‹#›</a:t>
             </a:fld>
-            <a:endParaRPr lang="en-CH"/>
+            <a:endParaRPr lang="en-US"/>
           </a:p>
         </p:txBody>
       </p:sp>
     </p:spTree>
     <p:extLst>
       <p:ext uri="{BB962C8B-B14F-4D97-AF65-F5344CB8AC3E}">
-        <p14:creationId xmlns:p14="http://schemas.microsoft.com/office/powerpoint/2010/main" val="3751631339"/>
+        <p14:creationId xmlns:p14="http://schemas.microsoft.com/office/powerpoint/2010/main" val="3889236939"/>
       </p:ext>
     </p:extLst>
   </p:cSld>
@@ -3281,13 +3083,7 @@
       </p:grpSpPr>
       <p:sp>
         <p:nvSpPr>
-          <p:cNvPr id="2" name="Title Placeholder 1">
-            <a:extLst>
-              <a:ext uri="{FF2B5EF4-FFF2-40B4-BE49-F238E27FC236}">
-                <a16:creationId xmlns:a16="http://schemas.microsoft.com/office/drawing/2014/main" id="{28A34128-61F1-D13B-98C2-42BE0F517675}"/>
-              </a:ext>
-            </a:extLst>
-          </p:cNvPr>
+          <p:cNvPr id="2" name="Title Placeholder 1"/>
           <p:cNvSpPr>
             <a:spLocks noGrp="1"/>
           </p:cNvSpPr>
@@ -3297,8 +3093,8 @@
         </p:nvSpPr>
         <p:spPr>
           <a:xfrm>
-            <a:off x="838200" y="365125"/>
-            <a:ext cx="10515600" cy="1325563"/>
+            <a:off x="457200" y="274638"/>
+            <a:ext cx="8229600" cy="1143000"/>
           </a:xfrm>
           <a:prstGeom prst="rect">
             <a:avLst/>
@@ -3311,22 +3107,16 @@
           <a:lstStyle/>
           <a:p>
             <a:r>
-              <a:rPr lang="en-GB"/>
+              <a:rPr lang="en-US" smtClean="0"/>
               <a:t>Click to edit Master title style</a:t>
             </a:r>
-            <a:endParaRPr lang="en-CH"/>
-          </a:p>
-        </p:txBody>
-      </p:sp>
-      <p:sp>
-        <p:nvSpPr>
-          <p:cNvPr id="3" name="Text Placeholder 2">
-            <a:extLst>
-              <a:ext uri="{FF2B5EF4-FFF2-40B4-BE49-F238E27FC236}">
-                <a16:creationId xmlns:a16="http://schemas.microsoft.com/office/drawing/2014/main" id="{1C61827C-AC80-44E8-F2C3-342E4F5A0C85}"/>
-              </a:ext>
-            </a:extLst>
-          </p:cNvPr>
+            <a:endParaRPr lang="en-US"/>
+          </a:p>
+        </p:txBody>
+      </p:sp>
+      <p:sp>
+        <p:nvSpPr>
+          <p:cNvPr id="3" name="Text Placeholder 2"/>
           <p:cNvSpPr>
             <a:spLocks noGrp="1"/>
           </p:cNvSpPr>
@@ -3336,8 +3126,8 @@
         </p:nvSpPr>
         <p:spPr>
           <a:xfrm>
-            <a:off x="838200" y="1825625"/>
-            <a:ext cx="10515600" cy="4351338"/>
+            <a:off x="457200" y="1600200"/>
+            <a:ext cx="8229600" cy="4525963"/>
           </a:xfrm>
           <a:prstGeom prst="rect">
             <a:avLst/>
@@ -3351,50 +3141,44 @@
           <a:p>
             <a:pPr lvl="0"/>
             <a:r>
-              <a:rPr lang="en-GB"/>
+              <a:rPr lang="en-US" smtClean="0"/>
               <a:t>Click to edit Master text styles</a:t>
             </a:r>
           </a:p>
           <a:p>
             <a:pPr lvl="1"/>
             <a:r>
-              <a:rPr lang="en-GB"/>
+              <a:rPr lang="en-US" smtClean="0"/>
               <a:t>Second level</a:t>
             </a:r>
           </a:p>
           <a:p>
             <a:pPr lvl="2"/>
             <a:r>
-              <a:rPr lang="en-GB"/>
+              <a:rPr lang="en-US" smtClean="0"/>
               <a:t>Third level</a:t>
             </a:r>
           </a:p>
           <a:p>
             <a:pPr lvl="3"/>
             <a:r>
-              <a:rPr lang="en-GB"/>
+              <a:rPr lang="en-US" smtClean="0"/>
               <a:t>Fourth level</a:t>
             </a:r>
           </a:p>
           <a:p>
             <a:pPr lvl="4"/>
             <a:r>
-              <a:rPr lang="en-GB"/>
+              <a:rPr lang="en-US" smtClean="0"/>
               <a:t>Fifth level</a:t>
             </a:r>
-            <a:endParaRPr lang="en-CH"/>
-          </a:p>
-        </p:txBody>
-      </p:sp>
-      <p:sp>
-        <p:nvSpPr>
-          <p:cNvPr id="4" name="Date Placeholder 3">
-            <a:extLst>
-              <a:ext uri="{FF2B5EF4-FFF2-40B4-BE49-F238E27FC236}">
-                <a16:creationId xmlns:a16="http://schemas.microsoft.com/office/drawing/2014/main" id="{DB0B1B1F-2F5F-E81B-3DDA-2EEC5A5E2465}"/>
-              </a:ext>
-            </a:extLst>
-          </p:cNvPr>
+            <a:endParaRPr lang="en-US"/>
+          </a:p>
+        </p:txBody>
+      </p:sp>
+      <p:sp>
+        <p:nvSpPr>
+          <p:cNvPr id="4" name="Date Placeholder 3"/>
           <p:cNvSpPr>
             <a:spLocks noGrp="1"/>
           </p:cNvSpPr>
@@ -3404,8 +3188,8 @@
         </p:nvSpPr>
         <p:spPr>
           <a:xfrm>
-            <a:off x="838200" y="6356350"/>
-            <a:ext cx="2743200" cy="365125"/>
+            <a:off x="457200" y="6356350"/>
+            <a:ext cx="2133600" cy="365125"/>
           </a:xfrm>
           <a:prstGeom prst="rect">
             <a:avLst/>
@@ -3418,30 +3202,24 @@
               <a:defRPr sz="1200">
                 <a:solidFill>
                   <a:schemeClr val="tx1">
-                    <a:tint val="82000"/>
+                    <a:tint val="75000"/>
                   </a:schemeClr>
                 </a:solidFill>
               </a:defRPr>
             </a:lvl1pPr>
           </a:lstStyle>
           <a:p>
-            <a:fld id="{376CE277-F64F-CD4D-8092-A1FBD0226130}" type="datetimeFigureOut">
-              <a:rPr lang="en-CH" smtClean="0"/>
-              <a:t>10/23/24</a:t>
+            <a:fld id="{5BCAD085-E8A6-8845-BD4E-CB4CCA059FC4}" type="datetimeFigureOut">
+              <a:rPr lang="en-US" smtClean="0"/>
+              <a:t>1/27/13</a:t>
             </a:fld>
-            <a:endParaRPr lang="en-CH"/>
-          </a:p>
-        </p:txBody>
-      </p:sp>
-      <p:sp>
-        <p:nvSpPr>
-          <p:cNvPr id="5" name="Footer Placeholder 4">
-            <a:extLst>
-              <a:ext uri="{FF2B5EF4-FFF2-40B4-BE49-F238E27FC236}">
-                <a16:creationId xmlns:a16="http://schemas.microsoft.com/office/drawing/2014/main" id="{CA5E7902-6B8D-D5C0-6B77-63F4E2E53EB6}"/>
-              </a:ext>
-            </a:extLst>
-          </p:cNvPr>
+            <a:endParaRPr lang="en-US"/>
+          </a:p>
+        </p:txBody>
+      </p:sp>
+      <p:sp>
+        <p:nvSpPr>
+          <p:cNvPr id="5" name="Footer Placeholder 4"/>
           <p:cNvSpPr>
             <a:spLocks noGrp="1"/>
           </p:cNvSpPr>
@@ -3451,8 +3229,8 @@
         </p:nvSpPr>
         <p:spPr>
           <a:xfrm>
-            <a:off x="4038600" y="6356350"/>
-            <a:ext cx="4114800" cy="365125"/>
+            <a:off x="3124200" y="6356350"/>
+            <a:ext cx="2895600" cy="365125"/>
           </a:xfrm>
           <a:prstGeom prst="rect">
             <a:avLst/>
@@ -3465,26 +3243,20 @@
               <a:defRPr sz="1200">
                 <a:solidFill>
                   <a:schemeClr val="tx1">
-                    <a:tint val="82000"/>
+                    <a:tint val="75000"/>
                   </a:schemeClr>
                 </a:solidFill>
               </a:defRPr>
             </a:lvl1pPr>
           </a:lstStyle>
           <a:p>
-            <a:endParaRPr lang="en-CH"/>
-          </a:p>
-        </p:txBody>
-      </p:sp>
-      <p:sp>
-        <p:nvSpPr>
-          <p:cNvPr id="6" name="Slide Number Placeholder 5">
-            <a:extLst>
-              <a:ext uri="{FF2B5EF4-FFF2-40B4-BE49-F238E27FC236}">
-                <a16:creationId xmlns:a16="http://schemas.microsoft.com/office/drawing/2014/main" id="{DBE8D078-C063-008B-27DB-5491722A8712}"/>
-              </a:ext>
-            </a:extLst>
-          </p:cNvPr>
+            <a:endParaRPr lang="en-US"/>
+          </a:p>
+        </p:txBody>
+      </p:sp>
+      <p:sp>
+        <p:nvSpPr>
+          <p:cNvPr id="6" name="Slide Number Placeholder 5"/>
           <p:cNvSpPr>
             <a:spLocks noGrp="1"/>
           </p:cNvSpPr>
@@ -3494,8 +3266,8 @@
         </p:nvSpPr>
         <p:spPr>
           <a:xfrm>
-            <a:off x="8610600" y="6356350"/>
-            <a:ext cx="2743200" cy="365125"/>
+            <a:off x="6553200" y="6356350"/>
+            <a:ext cx="2133600" cy="365125"/>
           </a:xfrm>
           <a:prstGeom prst="rect">
             <a:avLst/>
@@ -3508,25 +3280,25 @@
               <a:defRPr sz="1200">
                 <a:solidFill>
                   <a:schemeClr val="tx1">
-                    <a:tint val="82000"/>
+                    <a:tint val="75000"/>
                   </a:schemeClr>
                 </a:solidFill>
               </a:defRPr>
             </a:lvl1pPr>
           </a:lstStyle>
           <a:p>
-            <a:fld id="{0107FE2D-0FD9-7D4B-A5A0-7E9AAE6B67D1}" type="slidenum">
-              <a:rPr lang="en-CH" smtClean="0"/>
+            <a:fld id="{C1FF6DA9-008F-8B48-92A6-B652298478BF}" type="slidenum">
+              <a:rPr lang="en-US" smtClean="0"/>
               <a:t>‹#›</a:t>
             </a:fld>
-            <a:endParaRPr lang="en-CH"/>
+            <a:endParaRPr lang="en-US"/>
           </a:p>
         </p:txBody>
       </p:sp>
     </p:spTree>
     <p:extLst>
       <p:ext uri="{BB962C8B-B14F-4D97-AF65-F5344CB8AC3E}">
-        <p14:creationId xmlns:p14="http://schemas.microsoft.com/office/powerpoint/2010/main" val="3888497504"/>
+        <p14:creationId xmlns:p14="http://schemas.microsoft.com/office/powerpoint/2010/main" val="2209977519"/>
       </p:ext>
     </p:extLst>
   </p:cSld>
@@ -3546,10 +3318,7 @@
   </p:sldLayoutIdLst>
   <p:txStyles>
     <p:titleStyle>
-      <a:lvl1pPr algn="l" defTabSz="914400" rtl="0" eaLnBrk="1" latinLnBrk="0" hangingPunct="1">
-        <a:lnSpc>
-          <a:spcPct val="90000"/>
-        </a:lnSpc>
+      <a:lvl1pPr algn="ctr" defTabSz="457200" rtl="0" eaLnBrk="1" latinLnBrk="0" hangingPunct="1">
         <a:spcBef>
           <a:spcPct val="0"/>
         </a:spcBef>
@@ -3565,15 +3334,27 @@
       </a:lvl1pPr>
     </p:titleStyle>
     <p:bodyStyle>
-      <a:lvl1pPr marL="228600" indent="-228600" algn="l" defTabSz="914400" rtl="0" eaLnBrk="1" latinLnBrk="0" hangingPunct="1">
-        <a:lnSpc>
-          <a:spcPct val="90000"/>
-        </a:lnSpc>
+      <a:lvl1pPr marL="342900" indent="-342900" algn="l" defTabSz="457200" rtl="0" eaLnBrk="1" latinLnBrk="0" hangingPunct="1">
         <a:spcBef>
-          <a:spcPts val="1000"/>
+          <a:spcPct val="20000"/>
         </a:spcBef>
-        <a:buFont typeface="Arial" panose="020B0604020202020204" pitchFamily="34" charset="0"/>
+        <a:buFont typeface="Arial"/>
         <a:buChar char="•"/>
+        <a:defRPr sz="3200" kern="1200">
+          <a:solidFill>
+            <a:schemeClr val="tx1"/>
+          </a:solidFill>
+          <a:latin typeface="+mn-lt"/>
+          <a:ea typeface="+mn-ea"/>
+          <a:cs typeface="+mn-cs"/>
+        </a:defRPr>
+      </a:lvl1pPr>
+      <a:lvl2pPr marL="742950" indent="-285750" algn="l" defTabSz="457200" rtl="0" eaLnBrk="1" latinLnBrk="0" hangingPunct="1">
+        <a:spcBef>
+          <a:spcPct val="20000"/>
+        </a:spcBef>
+        <a:buFont typeface="Arial"/>
+        <a:buChar char="–"/>
         <a:defRPr sz="2800" kern="1200">
           <a:solidFill>
             <a:schemeClr val="tx1"/>
@@ -3582,15 +3363,12 @@
           <a:ea typeface="+mn-ea"/>
           <a:cs typeface="+mn-cs"/>
         </a:defRPr>
-      </a:lvl1pPr>
-      <a:lvl2pPr marL="685800" indent="-228600" algn="l" defTabSz="914400" rtl="0" eaLnBrk="1" latinLnBrk="0" hangingPunct="1">
-        <a:lnSpc>
-          <a:spcPct val="90000"/>
-        </a:lnSpc>
+      </a:lvl2pPr>
+      <a:lvl3pPr marL="1143000" indent="-228600" algn="l" defTabSz="457200" rtl="0" eaLnBrk="1" latinLnBrk="0" hangingPunct="1">
         <a:spcBef>
-          <a:spcPts val="500"/>
+          <a:spcPct val="20000"/>
         </a:spcBef>
-        <a:buFont typeface="Arial" panose="020B0604020202020204" pitchFamily="34" charset="0"/>
+        <a:buFont typeface="Arial"/>
         <a:buChar char="•"/>
         <a:defRPr sz="2400" kern="1200">
           <a:solidFill>
@@ -3600,15 +3378,42 @@
           <a:ea typeface="+mn-ea"/>
           <a:cs typeface="+mn-cs"/>
         </a:defRPr>
-      </a:lvl2pPr>
-      <a:lvl3pPr marL="1143000" indent="-228600" algn="l" defTabSz="914400" rtl="0" eaLnBrk="1" latinLnBrk="0" hangingPunct="1">
-        <a:lnSpc>
-          <a:spcPct val="90000"/>
-        </a:lnSpc>
+      </a:lvl3pPr>
+      <a:lvl4pPr marL="1600200" indent="-228600" algn="l" defTabSz="457200" rtl="0" eaLnBrk="1" latinLnBrk="0" hangingPunct="1">
         <a:spcBef>
-          <a:spcPts val="500"/>
+          <a:spcPct val="20000"/>
         </a:spcBef>
-        <a:buFont typeface="Arial" panose="020B0604020202020204" pitchFamily="34" charset="0"/>
+        <a:buFont typeface="Arial"/>
+        <a:buChar char="–"/>
+        <a:defRPr sz="2000" kern="1200">
+          <a:solidFill>
+            <a:schemeClr val="tx1"/>
+          </a:solidFill>
+          <a:latin typeface="+mn-lt"/>
+          <a:ea typeface="+mn-ea"/>
+          <a:cs typeface="+mn-cs"/>
+        </a:defRPr>
+      </a:lvl4pPr>
+      <a:lvl5pPr marL="2057400" indent="-228600" algn="l" defTabSz="457200" rtl="0" eaLnBrk="1" latinLnBrk="0" hangingPunct="1">
+        <a:spcBef>
+          <a:spcPct val="20000"/>
+        </a:spcBef>
+        <a:buFont typeface="Arial"/>
+        <a:buChar char="»"/>
+        <a:defRPr sz="2000" kern="1200">
+          <a:solidFill>
+            <a:schemeClr val="tx1"/>
+          </a:solidFill>
+          <a:latin typeface="+mn-lt"/>
+          <a:ea typeface="+mn-ea"/>
+          <a:cs typeface="+mn-cs"/>
+        </a:defRPr>
+      </a:lvl5pPr>
+      <a:lvl6pPr marL="2514600" indent="-228600" algn="l" defTabSz="457200" rtl="0" eaLnBrk="1" latinLnBrk="0" hangingPunct="1">
+        <a:spcBef>
+          <a:spcPct val="20000"/>
+        </a:spcBef>
+        <a:buFont typeface="Arial"/>
         <a:buChar char="•"/>
         <a:defRPr sz="2000" kern="1200">
           <a:solidFill>
@@ -3618,71 +3423,14 @@
           <a:ea typeface="+mn-ea"/>
           <a:cs typeface="+mn-cs"/>
         </a:defRPr>
-      </a:lvl3pPr>
-      <a:lvl4pPr marL="1600200" indent="-228600" algn="l" defTabSz="914400" rtl="0" eaLnBrk="1" latinLnBrk="0" hangingPunct="1">
-        <a:lnSpc>
-          <a:spcPct val="90000"/>
-        </a:lnSpc>
+      </a:lvl6pPr>
+      <a:lvl7pPr marL="2971800" indent="-228600" algn="l" defTabSz="457200" rtl="0" eaLnBrk="1" latinLnBrk="0" hangingPunct="1">
         <a:spcBef>
-          <a:spcPts val="500"/>
+          <a:spcPct val="20000"/>
         </a:spcBef>
-        <a:buFont typeface="Arial" panose="020B0604020202020204" pitchFamily="34" charset="0"/>
+        <a:buFont typeface="Arial"/>
         <a:buChar char="•"/>
-        <a:defRPr sz="1800" kern="1200">
-          <a:solidFill>
-            <a:schemeClr val="tx1"/>
-          </a:solidFill>
-          <a:latin typeface="+mn-lt"/>
-          <a:ea typeface="+mn-ea"/>
-          <a:cs typeface="+mn-cs"/>
-        </a:defRPr>
-      </a:lvl4pPr>
-      <a:lvl5pPr marL="2057400" indent="-228600" algn="l" defTabSz="914400" rtl="0" eaLnBrk="1" latinLnBrk="0" hangingPunct="1">
-        <a:lnSpc>
-          <a:spcPct val="90000"/>
-        </a:lnSpc>
-        <a:spcBef>
-          <a:spcPts val="500"/>
-        </a:spcBef>
-        <a:buFont typeface="Arial" panose="020B0604020202020204" pitchFamily="34" charset="0"/>
-        <a:buChar char="•"/>
-        <a:defRPr sz="1800" kern="1200">
-          <a:solidFill>
-            <a:schemeClr val="tx1"/>
-          </a:solidFill>
-          <a:latin typeface="+mn-lt"/>
-          <a:ea typeface="+mn-ea"/>
-          <a:cs typeface="+mn-cs"/>
-        </a:defRPr>
-      </a:lvl5pPr>
-      <a:lvl6pPr marL="2514600" indent="-228600" algn="l" defTabSz="914400" rtl="0" eaLnBrk="1" latinLnBrk="0" hangingPunct="1">
-        <a:lnSpc>
-          <a:spcPct val="90000"/>
-        </a:lnSpc>
-        <a:spcBef>
-          <a:spcPts val="500"/>
-        </a:spcBef>
-        <a:buFont typeface="Arial" panose="020B0604020202020204" pitchFamily="34" charset="0"/>
-        <a:buChar char="•"/>
-        <a:defRPr sz="1800" kern="1200">
-          <a:solidFill>
-            <a:schemeClr val="tx1"/>
-          </a:solidFill>
-          <a:latin typeface="+mn-lt"/>
-          <a:ea typeface="+mn-ea"/>
-          <a:cs typeface="+mn-cs"/>
-        </a:defRPr>
-      </a:lvl6pPr>
-      <a:lvl7pPr marL="2971800" indent="-228600" algn="l" defTabSz="914400" rtl="0" eaLnBrk="1" latinLnBrk="0" hangingPunct="1">
-        <a:lnSpc>
-          <a:spcPct val="90000"/>
-        </a:lnSpc>
-        <a:spcBef>
-          <a:spcPts val="500"/>
-        </a:spcBef>
-        <a:buFont typeface="Arial" panose="020B0604020202020204" pitchFamily="34" charset="0"/>
-        <a:buChar char="•"/>
-        <a:defRPr sz="1800" kern="1200">
+        <a:defRPr sz="2000" kern="1200">
           <a:solidFill>
             <a:schemeClr val="tx1"/>
           </a:solidFill>
@@ -3691,16 +3439,13 @@
           <a:cs typeface="+mn-cs"/>
         </a:defRPr>
       </a:lvl7pPr>
-      <a:lvl8pPr marL="3429000" indent="-228600" algn="l" defTabSz="914400" rtl="0" eaLnBrk="1" latinLnBrk="0" hangingPunct="1">
-        <a:lnSpc>
-          <a:spcPct val="90000"/>
-        </a:lnSpc>
+      <a:lvl8pPr marL="3429000" indent="-228600" algn="l" defTabSz="457200" rtl="0" eaLnBrk="1" latinLnBrk="0" hangingPunct="1">
         <a:spcBef>
-          <a:spcPts val="500"/>
+          <a:spcPct val="20000"/>
         </a:spcBef>
-        <a:buFont typeface="Arial" panose="020B0604020202020204" pitchFamily="34" charset="0"/>
+        <a:buFont typeface="Arial"/>
         <a:buChar char="•"/>
-        <a:defRPr sz="1800" kern="1200">
+        <a:defRPr sz="2000" kern="1200">
           <a:solidFill>
             <a:schemeClr val="tx1"/>
           </a:solidFill>
@@ -3709,16 +3454,13 @@
           <a:cs typeface="+mn-cs"/>
         </a:defRPr>
       </a:lvl8pPr>
-      <a:lvl9pPr marL="3886200" indent="-228600" algn="l" defTabSz="914400" rtl="0" eaLnBrk="1" latinLnBrk="0" hangingPunct="1">
-        <a:lnSpc>
-          <a:spcPct val="90000"/>
-        </a:lnSpc>
+      <a:lvl9pPr marL="3886200" indent="-228600" algn="l" defTabSz="457200" rtl="0" eaLnBrk="1" latinLnBrk="0" hangingPunct="1">
         <a:spcBef>
-          <a:spcPts val="500"/>
+          <a:spcPct val="20000"/>
         </a:spcBef>
-        <a:buFont typeface="Arial" panose="020B0604020202020204" pitchFamily="34" charset="0"/>
+        <a:buFont typeface="Arial"/>
         <a:buChar char="•"/>
-        <a:defRPr sz="1800" kern="1200">
+        <a:defRPr sz="2000" kern="1200">
           <a:solidFill>
             <a:schemeClr val="tx1"/>
           </a:solidFill>
@@ -3730,9 +3472,9 @@
     </p:bodyStyle>
     <p:otherStyle>
       <a:defPPr>
-        <a:defRPr lang="en-CH"/>
+        <a:defRPr lang="en-US"/>
       </a:defPPr>
-      <a:lvl1pPr marL="0" algn="l" defTabSz="914400" rtl="0" eaLnBrk="1" latinLnBrk="0" hangingPunct="1">
+      <a:lvl1pPr marL="0" algn="l" defTabSz="457200" rtl="0" eaLnBrk="1" latinLnBrk="0" hangingPunct="1">
         <a:defRPr sz="1800" kern="1200">
           <a:solidFill>
             <a:schemeClr val="tx1"/>
@@ -3742,7 +3484,7 @@
           <a:cs typeface="+mn-cs"/>
         </a:defRPr>
       </a:lvl1pPr>
-      <a:lvl2pPr marL="457200" algn="l" defTabSz="914400" rtl="0" eaLnBrk="1" latinLnBrk="0" hangingPunct="1">
+      <a:lvl2pPr marL="457200" algn="l" defTabSz="457200" rtl="0" eaLnBrk="1" latinLnBrk="0" hangingPunct="1">
         <a:defRPr sz="1800" kern="1200">
           <a:solidFill>
             <a:schemeClr val="tx1"/>
@@ -3752,7 +3494,7 @@
           <a:cs typeface="+mn-cs"/>
         </a:defRPr>
       </a:lvl2pPr>
-      <a:lvl3pPr marL="914400" algn="l" defTabSz="914400" rtl="0" eaLnBrk="1" latinLnBrk="0" hangingPunct="1">
+      <a:lvl3pPr marL="914400" algn="l" defTabSz="457200" rtl="0" eaLnBrk="1" latinLnBrk="0" hangingPunct="1">
         <a:defRPr sz="1800" kern="1200">
           <a:solidFill>
             <a:schemeClr val="tx1"/>
@@ -3762,7 +3504,7 @@
           <a:cs typeface="+mn-cs"/>
         </a:defRPr>
       </a:lvl3pPr>
-      <a:lvl4pPr marL="1371600" algn="l" defTabSz="914400" rtl="0" eaLnBrk="1" latinLnBrk="0" hangingPunct="1">
+      <a:lvl4pPr marL="1371600" algn="l" defTabSz="457200" rtl="0" eaLnBrk="1" latinLnBrk="0" hangingPunct="1">
         <a:defRPr sz="1800" kern="1200">
           <a:solidFill>
             <a:schemeClr val="tx1"/>
@@ -3772,7 +3514,7 @@
           <a:cs typeface="+mn-cs"/>
         </a:defRPr>
       </a:lvl4pPr>
-      <a:lvl5pPr marL="1828800" algn="l" defTabSz="914400" rtl="0" eaLnBrk="1" latinLnBrk="0" hangingPunct="1">
+      <a:lvl5pPr marL="1828800" algn="l" defTabSz="457200" rtl="0" eaLnBrk="1" latinLnBrk="0" hangingPunct="1">
         <a:defRPr sz="1800" kern="1200">
           <a:solidFill>
             <a:schemeClr val="tx1"/>
@@ -3782,7 +3524,7 @@
           <a:cs typeface="+mn-cs"/>
         </a:defRPr>
       </a:lvl5pPr>
-      <a:lvl6pPr marL="2286000" algn="l" defTabSz="914400" rtl="0" eaLnBrk="1" latinLnBrk="0" hangingPunct="1">
+      <a:lvl6pPr marL="2286000" algn="l" defTabSz="457200" rtl="0" eaLnBrk="1" latinLnBrk="0" hangingPunct="1">
         <a:defRPr sz="1800" kern="1200">
           <a:solidFill>
             <a:schemeClr val="tx1"/>
@@ -3792,7 +3534,7 @@
           <a:cs typeface="+mn-cs"/>
         </a:defRPr>
       </a:lvl6pPr>
-      <a:lvl7pPr marL="2743200" algn="l" defTabSz="914400" rtl="0" eaLnBrk="1" latinLnBrk="0" hangingPunct="1">
+      <a:lvl7pPr marL="2743200" algn="l" defTabSz="457200" rtl="0" eaLnBrk="1" latinLnBrk="0" hangingPunct="1">
         <a:defRPr sz="1800" kern="1200">
           <a:solidFill>
             <a:schemeClr val="tx1"/>
@@ -3802,7 +3544,7 @@
           <a:cs typeface="+mn-cs"/>
         </a:defRPr>
       </a:lvl7pPr>
-      <a:lvl8pPr marL="3200400" algn="l" defTabSz="914400" rtl="0" eaLnBrk="1" latinLnBrk="0" hangingPunct="1">
+      <a:lvl8pPr marL="3200400" algn="l" defTabSz="457200" rtl="0" eaLnBrk="1" latinLnBrk="0" hangingPunct="1">
         <a:defRPr sz="1800" kern="1200">
           <a:solidFill>
             <a:schemeClr val="tx1"/>
@@ -3812,7 +3554,7 @@
           <a:cs typeface="+mn-cs"/>
         </a:defRPr>
       </a:lvl8pPr>
-      <a:lvl9pPr marL="3657600" algn="l" defTabSz="914400" rtl="0" eaLnBrk="1" latinLnBrk="0" hangingPunct="1">
+      <a:lvl9pPr marL="3657600" algn="l" defTabSz="457200" rtl="0" eaLnBrk="1" latinLnBrk="0" hangingPunct="1">
         <a:defRPr sz="1800" kern="1200">
           <a:solidFill>
             <a:schemeClr val="tx1"/>
@@ -3828,7 +3570,7 @@
 </file>
 
 <file path=ppt/slides/slide1.xml><?xml version="1.0" encoding="utf-8"?>
-<p:sld xmlns:a="http://schemas.openxmlformats.org/drawingml/2006/main" xmlns:r="http://schemas.openxmlformats.org/officeDocument/2006/relationships" xmlns:p="http://schemas.openxmlformats.org/presentationml/2006/main">
+<p:sld xmlns:a="http://schemas.openxmlformats.org/drawingml/2006/main" xmlns:p="http://schemas.openxmlformats.org/presentationml/2006/main" xmlns:r="http://schemas.openxmlformats.org/officeDocument/2006/relationships">
   <p:cSld>
     <p:spTree>
       <p:nvGrpSpPr>
@@ -3836,103 +3578,112 @@
         <p:cNvGrpSpPr/>
         <p:nvPr/>
       </p:nvGrpSpPr>
-      <p:grpSpPr>
-        <a:xfrm>
-          <a:off x="0" y="0"/>
-          <a:ext cx="0" cy="0"/>
-          <a:chOff x="0" y="0"/>
-          <a:chExt cx="0" cy="0"/>
-        </a:xfrm>
-      </p:grpSpPr>
-      <p:sp>
-        <p:nvSpPr>
-          <p:cNvPr id="2" name="Title 1">
-            <a:extLst>
-              <a:ext uri="{FF2B5EF4-FFF2-40B4-BE49-F238E27FC236}">
-                <a16:creationId xmlns:a16="http://schemas.microsoft.com/office/drawing/2014/main" id="{ECE3F4DA-D10D-2F28-0B9B-6B92671155E0}"/>
-              </a:ext>
-            </a:extLst>
-          </p:cNvPr>
-          <p:cNvSpPr>
-            <a:spLocks noGrp="1"/>
-          </p:cNvSpPr>
-          <p:nvPr>
-            <p:ph type="ctrTitle"/>
-          </p:nvPr>
-        </p:nvSpPr>
-        <p:spPr>
-          <a:xfrm>
-            <a:off x="1524000" y="644526"/>
-            <a:ext cx="9144000" cy="932409"/>
-          </a:xfrm>
-        </p:spPr>
-        <p:txBody>
-          <a:bodyPr/>
-          <a:lstStyle/>
-          <a:p>
-            <a:r>
-              <a:rPr lang="en-CH" dirty="0"/>
-              <a:t>Test Table Slide</a:t>
-            </a:r>
-          </a:p>
-        </p:txBody>
-      </p:sp>
-      <p:sp>
-        <p:nvSpPr>
-          <p:cNvPr id="3" name="Subtitle 2">
-            <a:extLst>
-              <a:ext uri="{FF2B5EF4-FFF2-40B4-BE49-F238E27FC236}">
-                <a16:creationId xmlns:a16="http://schemas.microsoft.com/office/drawing/2014/main" id="{2E4FDD0F-E632-9574-3B7C-0F1BECA67F51}"/>
-              </a:ext>
-            </a:extLst>
-          </p:cNvPr>
-          <p:cNvSpPr>
-            <a:spLocks noGrp="1"/>
-          </p:cNvSpPr>
-          <p:nvPr>
-            <p:ph type="subTitle" idx="1"/>
-          </p:nvPr>
-        </p:nvSpPr>
-        <p:spPr>
-          <a:xfrm>
-            <a:off x="1524000" y="5433848"/>
-            <a:ext cx="9144000" cy="454572"/>
-          </a:xfrm>
-        </p:spPr>
-        <p:txBody>
-          <a:bodyPr/>
-          <a:lstStyle/>
-          <a:p>
-            <a:r>
-              <a:rPr lang="en-CH" dirty="0"/>
-              <a:t>With footnote</a:t>
+      <p:grpSpPr/>
+      <p:sp>
+        <p:nvSpPr>
+          <p:cNvPr id="2" name="Title 1"/>
+          <p:cNvSpPr>
+            <a:spLocks noGrp="1"/>
+          </p:cNvSpPr>
+          <p:nvPr>
+            <p:ph type="title"/>
+          </p:nvPr>
+        </p:nvSpPr>
+        <p:spPr/>
+        <p:txBody>
+          <a:bodyPr/>
+          <a:lstStyle/>
+          <a:p>
+            <a:r>
+              <a:t>Launch Overview</a:t>
+            </a:r>
+          </a:p>
+        </p:txBody>
+      </p:sp>
+      <p:sp>
+        <p:nvSpPr>
+          <p:cNvPr id="3" name="Content Placeholder 2"/>
+          <p:cNvSpPr>
+            <a:spLocks noGrp="1"/>
+          </p:cNvSpPr>
+          <p:nvPr>
+            <p:ph idx="1"/>
+          </p:nvPr>
+        </p:nvSpPr>
+        <p:spPr/>
+        <p:txBody>
+          <a:bodyPr/>
+          <a:lstStyle/>
+          <a:p>
+            <a:pPr/>
+            <a:r>
+              <a:t>Key deliverables</a:t>
+            </a:r>
+          </a:p>
+          <a:p>
+            <a:pPr lvl="1"/>
+            <a:r>
+              <a:t>API compatibility maintained</a:t>
+            </a:r>
+          </a:p>
+          <a:p>
+            <a:pPr lvl="1"/>
+            <a:r>
+              <a:t>Regression suite expanded</a:t>
+            </a:r>
+          </a:p>
+        </p:txBody>
+      </p:sp>
+    </p:spTree>
+  </p:cSld>
+  <p:clrMapOvr>
+    <a:masterClrMapping/>
+  </p:clrMapOvr>
+</p:sld>
+</file>
+
+<file path=ppt/slides/slide2.xml><?xml version="1.0" encoding="utf-8"?>
+<p:sld xmlns:a="http://schemas.openxmlformats.org/drawingml/2006/main" xmlns:p="http://schemas.openxmlformats.org/presentationml/2006/main" xmlns:r="http://schemas.openxmlformats.org/officeDocument/2006/relationships">
+  <p:cSld>
+    <p:spTree>
+      <p:nvGrpSpPr>
+        <p:cNvPr id="1" name=""/>
+        <p:cNvGrpSpPr/>
+        <p:nvPr/>
+      </p:nvGrpSpPr>
+      <p:grpSpPr/>
+      <p:sp>
+        <p:nvSpPr>
+          <p:cNvPr id="2" name="Title 1"/>
+          <p:cNvSpPr>
+            <a:spLocks noGrp="1"/>
+          </p:cNvSpPr>
+          <p:nvPr>
+            <p:ph type="title"/>
+          </p:nvPr>
+        </p:nvSpPr>
+        <p:spPr/>
+        <p:txBody>
+          <a:bodyPr/>
+          <a:lstStyle/>
+          <a:p>
+            <a:r>
+              <a:t>Scorecard</a:t>
             </a:r>
           </a:p>
         </p:txBody>
       </p:sp>
       <p:graphicFrame>
         <p:nvGraphicFramePr>
-          <p:cNvPr id="4" name="Table 3">
-            <a:extLst>
-              <a:ext uri="{FF2B5EF4-FFF2-40B4-BE49-F238E27FC236}">
-                <a16:creationId xmlns:a16="http://schemas.microsoft.com/office/drawing/2014/main" id="{DD579D8A-B275-11A5-722F-38AE6F49F4C1}"/>
-              </a:ext>
-            </a:extLst>
-          </p:cNvPr>
+          <p:cNvPr id="3" name="Table 2"/>
           <p:cNvGraphicFramePr>
             <a:graphicFrameLocks noGrp="1"/>
           </p:cNvGraphicFramePr>
-          <p:nvPr>
-            <p:extLst>
-              <p:ext uri="{D42A27DB-BD31-4B8C-83A1-F6EECF244321}">
-                <p14:modId xmlns:p14="http://schemas.microsoft.com/office/powerpoint/2010/main" val="3133552304"/>
-              </p:ext>
-            </p:extLst>
-          </p:nvPr>
+          <p:nvPr/>
         </p:nvGraphicFramePr>
         <p:xfrm>
-          <a:off x="2031999" y="1945640"/>
-          <a:ext cx="8128001" cy="3337560"/>
+          <a:off x="914400" y="1645920"/>
+          <a:ext cx="5486400" cy="1371600"/>
         </p:xfrm>
         <a:graphic>
           <a:graphicData uri="http://schemas.openxmlformats.org/drawingml/2006/table">
@@ -3941,182 +3692,18 @@
                 <a:tableStyleId>{5C22544A-7EE6-4342-B048-85BDC9FD1C3A}</a:tableStyleId>
               </a:tblPr>
               <a:tblGrid>
-                <a:gridCol w="1161143">
-                  <a:extLst>
-                    <a:ext uri="{9D8B030D-6E8A-4147-A177-3AD203B41FA5}">
-                      <a16:colId xmlns:a16="http://schemas.microsoft.com/office/drawing/2014/main" val="233912538"/>
-                    </a:ext>
-                  </a:extLst>
-                </a:gridCol>
-                <a:gridCol w="1161143">
-                  <a:extLst>
-                    <a:ext uri="{9D8B030D-6E8A-4147-A177-3AD203B41FA5}">
-                      <a16:colId xmlns:a16="http://schemas.microsoft.com/office/drawing/2014/main" val="667778648"/>
-                    </a:ext>
-                  </a:extLst>
-                </a:gridCol>
-                <a:gridCol w="1161143">
-                  <a:extLst>
-                    <a:ext uri="{9D8B030D-6E8A-4147-A177-3AD203B41FA5}">
-                      <a16:colId xmlns:a16="http://schemas.microsoft.com/office/drawing/2014/main" val="1329240650"/>
-                    </a:ext>
-                  </a:extLst>
-                </a:gridCol>
-                <a:gridCol w="1161143">
-                  <a:extLst>
-                    <a:ext uri="{9D8B030D-6E8A-4147-A177-3AD203B41FA5}">
-                      <a16:colId xmlns:a16="http://schemas.microsoft.com/office/drawing/2014/main" val="771788223"/>
-                    </a:ext>
-                  </a:extLst>
-                </a:gridCol>
-                <a:gridCol w="1161143">
-                  <a:extLst>
-                    <a:ext uri="{9D8B030D-6E8A-4147-A177-3AD203B41FA5}">
-                      <a16:colId xmlns:a16="http://schemas.microsoft.com/office/drawing/2014/main" val="3965227635"/>
-                    </a:ext>
-                  </a:extLst>
-                </a:gridCol>
-                <a:gridCol w="1161143">
-                  <a:extLst>
-                    <a:ext uri="{9D8B030D-6E8A-4147-A177-3AD203B41FA5}">
-                      <a16:colId xmlns:a16="http://schemas.microsoft.com/office/drawing/2014/main" val="1126063055"/>
-                    </a:ext>
-                  </a:extLst>
-                </a:gridCol>
-                <a:gridCol w="1161143">
-                  <a:extLst>
-                    <a:ext uri="{9D8B030D-6E8A-4147-A177-3AD203B41FA5}">
-                      <a16:colId xmlns:a16="http://schemas.microsoft.com/office/drawing/2014/main" val="1008578437"/>
-                    </a:ext>
-                  </a:extLst>
-                </a:gridCol>
+                <a:gridCol w="1828800"/>
+                <a:gridCol w="1828800"/>
+                <a:gridCol w="1828800"/>
               </a:tblGrid>
-              <a:tr h="370840">
-                <a:tc>
-                  <a:txBody>
-                    <a:bodyPr/>
-                    <a:lstStyle/>
-                    <a:p>
-                      <a:endParaRPr lang="en-CH"/>
-                    </a:p>
-                  </a:txBody>
-                  <a:tcPr/>
-                </a:tc>
-                <a:tc gridSpan="3">
-                  <a:txBody>
-                    <a:bodyPr/>
-                    <a:lstStyle/>
-                    <a:p>
-                      <a:r>
-                        <a:rPr lang="en-CH" dirty="0"/>
-                        <a:t>Class1</a:t>
-                      </a:r>
-                    </a:p>
-                  </a:txBody>
-                  <a:tcPr/>
-                </a:tc>
-                <a:tc hMerge="1">
-                  <a:txBody>
-                    <a:bodyPr/>
-                    <a:lstStyle/>
-                    <a:p>
-                      <a:endParaRPr lang="en-CH" dirty="0"/>
-                    </a:p>
-                  </a:txBody>
-                  <a:tcPr/>
-                </a:tc>
-                <a:tc hMerge="1">
-                  <a:txBody>
-                    <a:bodyPr/>
-                    <a:lstStyle/>
-                    <a:p>
-                      <a:endParaRPr lang="en-CH" dirty="0"/>
-                    </a:p>
-                  </a:txBody>
-                  <a:tcPr/>
-                </a:tc>
-                <a:tc gridSpan="3">
-                  <a:txBody>
-                    <a:bodyPr/>
-                    <a:lstStyle/>
-                    <a:p>
-                      <a:r>
-                        <a:rPr lang="en-CH" dirty="0"/>
-                        <a:t>Class2</a:t>
-                      </a:r>
-                    </a:p>
-                  </a:txBody>
-                  <a:tcPr/>
-                </a:tc>
-                <a:tc hMerge="1">
-                  <a:txBody>
-                    <a:bodyPr/>
-                    <a:lstStyle/>
-                    <a:p>
-                      <a:endParaRPr lang="en-CH" dirty="0"/>
-                    </a:p>
-                  </a:txBody>
-                  <a:tcPr/>
-                </a:tc>
-                <a:tc hMerge="1">
-                  <a:txBody>
-                    <a:bodyPr/>
-                    <a:lstStyle/>
-                    <a:p>
-                      <a:endParaRPr lang="en-CH" dirty="0"/>
-                    </a:p>
-                  </a:txBody>
-                  <a:tcPr/>
-                </a:tc>
-                <a:extLst>
-                  <a:ext uri="{0D108BD9-81ED-4DB2-BD59-A6C34878D82A}">
-                    <a16:rowId xmlns:a16="http://schemas.microsoft.com/office/drawing/2014/main" val="2935929401"/>
-                  </a:ext>
-                </a:extLst>
-              </a:tr>
-              <a:tr h="370840">
-                <a:tc>
-                  <a:txBody>
-                    <a:bodyPr/>
-                    <a:lstStyle/>
-                    <a:p>
-                      <a:endParaRPr lang="en-CH" dirty="0"/>
-                    </a:p>
-                  </a:txBody>
-                  <a:tcPr/>
-                </a:tc>
-                <a:tc gridSpan="2">
-                  <a:txBody>
-                    <a:bodyPr/>
-                    <a:lstStyle/>
-                    <a:p>
-                      <a:r>
-                        <a:rPr lang="en-CH"/>
-                        <a:t>A merged with B</a:t>
-                      </a:r>
-                      <a:endParaRPr lang="en-CH" dirty="0"/>
-                    </a:p>
-                  </a:txBody>
-                  <a:tcPr/>
-                </a:tc>
-                <a:tc hMerge="1">
-                  <a:txBody>
-                    <a:bodyPr/>
-                    <a:lstStyle/>
-                    <a:p>
-                      <a:endParaRPr dirty="0"/>
-                    </a:p>
-                  </a:txBody>
-                  <a:tcPr/>
-                </a:tc>
+              <a:tr h="457200">
                 <a:tc>
                   <a:txBody>
                     <a:bodyPr/>
                     <a:lstStyle/>
                     <a:p>
                       <a:r>
-                        <a:rPr lang="en-CH" dirty="0"/>
-                        <a:t>C</a:t>
+                        <a:t>Metric</a:t>
                       </a:r>
                     </a:p>
                   </a:txBody>
@@ -4128,8 +3715,7 @@
                     <a:lstStyle/>
                     <a:p>
                       <a:r>
-                        <a:rPr lang="en-CH" dirty="0"/>
-                        <a:t>A</a:t>
+                        <a:t>Before</a:t>
                       </a:r>
                     </a:p>
                   </a:txBody>
@@ -4141,8 +3727,21 @@
                     <a:lstStyle/>
                     <a:p>
                       <a:r>
-                        <a:rPr lang="en-CH" dirty="0"/>
-                        <a:t>B</a:t>
+                        <a:t>After</a:t>
+                      </a:r>
+                    </a:p>
+                  </a:txBody>
+                  <a:tcPr/>
+                </a:tc>
+              </a:tr>
+              <a:tr h="457200">
+                <a:tc>
+                  <a:txBody>
+                    <a:bodyPr/>
+                    <a:lstStyle/>
+                    <a:p>
+                      <a:r>
+                        <a:t>PDF</a:t>
                       </a:r>
                     </a:p>
                   </a:txBody>
@@ -4154,28 +3753,7 @@
                     <a:lstStyle/>
                     <a:p>
                       <a:r>
-                        <a:rPr lang="en-CH" dirty="0"/>
-                        <a:t>C</a:t>
-                      </a:r>
-                    </a:p>
-                  </a:txBody>
-                  <a:tcPr/>
-                </a:tc>
-                <a:extLst>
-                  <a:ext uri="{0D108BD9-81ED-4DB2-BD59-A6C34878D82A}">
-                    <a16:rowId xmlns:a16="http://schemas.microsoft.com/office/drawing/2014/main" val="1140256270"/>
-                  </a:ext>
-                </a:extLst>
-              </a:tr>
-              <a:tr h="370840">
-                <a:tc>
-                  <a:txBody>
-                    <a:bodyPr/>
-                    <a:lstStyle/>
-                    <a:p>
-                      <a:r>
-                        <a:rPr lang="en-CH" dirty="0"/>
-                        <a:t>R1</a:t>
+                        <a:t>Docling/Marker</a:t>
                       </a:r>
                     </a:p>
                   </a:txBody>
@@ -4187,8 +3765,21 @@
                     <a:lstStyle/>
                     <a:p>
                       <a:r>
-                        <a:rPr lang="en-CH" dirty="0"/>
-                        <a:t>True</a:t>
+                        <a:t>OpenDataLoader</a:t>
+                      </a:r>
+                    </a:p>
+                  </a:txBody>
+                  <a:tcPr/>
+                </a:tc>
+              </a:tr>
+              <a:tr h="457200">
+                <a:tc>
+                  <a:txBody>
+                    <a:bodyPr/>
+                    <a:lstStyle/>
+                    <a:p>
+                      <a:r>
+                        <a:t>Office</a:t>
                       </a:r>
                     </a:p>
                   </a:txBody>
@@ -4200,31 +3791,7 @@
                     <a:lstStyle/>
                     <a:p>
                       <a:r>
-                        <a:rPr lang="en-CH" dirty="0"/>
-                        <a:t>False</a:t>
-                      </a:r>
-                    </a:p>
-                  </a:txBody>
-                  <a:tcPr/>
-                </a:tc>
-                <a:tc>
-                  <a:txBody>
-                    <a:bodyPr/>
-                    <a:lstStyle/>
-                    <a:p>
-                      <a:endParaRPr lang="en-CH"/>
-                    </a:p>
-                  </a:txBody>
-                  <a:tcPr/>
-                </a:tc>
-                <a:tc>
-                  <a:txBody>
-                    <a:bodyPr/>
-                    <a:lstStyle/>
-                    <a:p>
-                      <a:r>
-                        <a:rPr lang="en-CH" dirty="0"/>
-                        <a:t>False</a:t>
+                        <a:t>Docling</a:t>
                       </a:r>
                     </a:p>
                   </a:txBody>
@@ -4236,1089 +3803,18 @@
                     <a:lstStyle/>
                     <a:p>
                       <a:r>
-                        <a:rPr lang="en-CH" dirty="0"/>
-                        <a:t>True</a:t>
+                        <a:t>Specialized parsers</a:t>
                       </a:r>
                     </a:p>
                   </a:txBody>
                   <a:tcPr/>
                 </a:tc>
-                <a:tc>
-                  <a:txBody>
-                    <a:bodyPr/>
-                    <a:lstStyle/>
-                    <a:p>
-                      <a:r>
-                        <a:rPr lang="en-CH" dirty="0"/>
-                        <a:t>True</a:t>
-                      </a:r>
-                    </a:p>
-                  </a:txBody>
-                  <a:tcPr/>
-                </a:tc>
-                <a:extLst>
-                  <a:ext uri="{0D108BD9-81ED-4DB2-BD59-A6C34878D82A}">
-                    <a16:rowId xmlns:a16="http://schemas.microsoft.com/office/drawing/2014/main" val="4255439588"/>
-                  </a:ext>
-                </a:extLst>
-              </a:tr>
-              <a:tr h="370840">
-                <a:tc>
-                  <a:txBody>
-                    <a:bodyPr/>
-                    <a:lstStyle/>
-                    <a:p>
-                      <a:r>
-                        <a:rPr lang="en-CH" dirty="0"/>
-                        <a:t>R2</a:t>
-                      </a:r>
-                    </a:p>
-                  </a:txBody>
-                  <a:tcPr/>
-                </a:tc>
-                <a:tc>
-                  <a:txBody>
-                    <a:bodyPr/>
-                    <a:lstStyle/>
-                    <a:p>
-                      <a:endParaRPr lang="en-CH" dirty="0"/>
-                    </a:p>
-                  </a:txBody>
-                  <a:tcPr/>
-                </a:tc>
-                <a:tc>
-                  <a:txBody>
-                    <a:bodyPr/>
-                    <a:lstStyle/>
-                    <a:p>
-                      <a:endParaRPr lang="en-CH" dirty="0"/>
-                    </a:p>
-                  </a:txBody>
-                  <a:tcPr/>
-                </a:tc>
-                <a:tc>
-                  <a:txBody>
-                    <a:bodyPr/>
-                    <a:lstStyle/>
-                    <a:p>
-                      <a:r>
-                        <a:rPr lang="en-CH" dirty="0"/>
-                        <a:t>True</a:t>
-                      </a:r>
-                    </a:p>
-                  </a:txBody>
-                  <a:tcPr/>
-                </a:tc>
-                <a:tc>
-                  <a:txBody>
-                    <a:bodyPr/>
-                    <a:lstStyle/>
-                    <a:p>
-                      <a:r>
-                        <a:rPr lang="en-CH" dirty="0"/>
-                        <a:t>False</a:t>
-                      </a:r>
-                    </a:p>
-                  </a:txBody>
-                  <a:tcPr/>
-                </a:tc>
-                <a:tc>
-                  <a:txBody>
-                    <a:bodyPr/>
-                    <a:lstStyle/>
-                    <a:p>
-                      <a:endParaRPr lang="en-CH" dirty="0"/>
-                    </a:p>
-                  </a:txBody>
-                  <a:tcPr/>
-                </a:tc>
-                <a:tc>
-                  <a:txBody>
-                    <a:bodyPr/>
-                    <a:lstStyle/>
-                    <a:p>
-                      <a:endParaRPr lang="en-CH" dirty="0"/>
-                    </a:p>
-                  </a:txBody>
-                  <a:tcPr/>
-                </a:tc>
-                <a:extLst>
-                  <a:ext uri="{0D108BD9-81ED-4DB2-BD59-A6C34878D82A}">
-                    <a16:rowId xmlns:a16="http://schemas.microsoft.com/office/drawing/2014/main" val="660981734"/>
-                  </a:ext>
-                </a:extLst>
-              </a:tr>
-              <a:tr h="370840">
-                <a:tc rowSpan="2">
-                  <a:txBody>
-                    <a:bodyPr/>
-                    <a:lstStyle/>
-                    <a:p>
-                      <a:r>
-                        <a:rPr lang="en-CH" dirty="0"/>
-                        <a:t>R3</a:t>
-                      </a:r>
-                    </a:p>
-                  </a:txBody>
-                  <a:tcPr/>
-                </a:tc>
-                <a:tc>
-                  <a:txBody>
-                    <a:bodyPr/>
-                    <a:lstStyle/>
-                    <a:p>
-                      <a:r>
-                        <a:rPr lang="en-CH" dirty="0"/>
-                        <a:t>False</a:t>
-                      </a:r>
-                    </a:p>
-                  </a:txBody>
-                  <a:tcPr/>
-                </a:tc>
-                <a:tc>
-                  <a:txBody>
-                    <a:bodyPr/>
-                    <a:lstStyle/>
-                    <a:p>
-                      <a:endParaRPr lang="en-CH" dirty="0"/>
-                    </a:p>
-                  </a:txBody>
-                  <a:tcPr/>
-                </a:tc>
-                <a:tc>
-                  <a:txBody>
-                    <a:bodyPr/>
-                    <a:lstStyle/>
-                    <a:p>
-                      <a:endParaRPr lang="en-CH" dirty="0"/>
-                    </a:p>
-                  </a:txBody>
-                  <a:tcPr/>
-                </a:tc>
-                <a:tc>
-                  <a:txBody>
-                    <a:bodyPr/>
-                    <a:lstStyle/>
-                    <a:p>
-                      <a:endParaRPr lang="en-CH" dirty="0"/>
-                    </a:p>
-                  </a:txBody>
-                  <a:tcPr/>
-                </a:tc>
-                <a:tc>
-                  <a:txBody>
-                    <a:bodyPr/>
-                    <a:lstStyle/>
-                    <a:p>
-                      <a:r>
-                        <a:rPr lang="en-CH" dirty="0"/>
-                        <a:t>False</a:t>
-                      </a:r>
-                    </a:p>
-                  </a:txBody>
-                  <a:tcPr/>
-                </a:tc>
-                <a:tc>
-                  <a:txBody>
-                    <a:bodyPr/>
-                    <a:lstStyle/>
-                    <a:p>
-                      <a:endParaRPr lang="en-CH" dirty="0"/>
-                    </a:p>
-                  </a:txBody>
-                  <a:tcPr/>
-                </a:tc>
-                <a:extLst>
-                  <a:ext uri="{0D108BD9-81ED-4DB2-BD59-A6C34878D82A}">
-                    <a16:rowId xmlns:a16="http://schemas.microsoft.com/office/drawing/2014/main" val="2614541836"/>
-                  </a:ext>
-                </a:extLst>
-              </a:tr>
-              <a:tr h="370840">
-                <a:tc vMerge="1">
-                  <a:txBody>
-                    <a:bodyPr/>
-                    <a:lstStyle/>
-                    <a:p>
-                      <a:endParaRPr lang="en-CH" dirty="0"/>
-                    </a:p>
-                  </a:txBody>
-                  <a:tcPr/>
-                </a:tc>
-                <a:tc>
-                  <a:txBody>
-                    <a:bodyPr/>
-                    <a:lstStyle/>
-                    <a:p>
-                      <a:endParaRPr lang="en-CH" dirty="0"/>
-                    </a:p>
-                  </a:txBody>
-                  <a:tcPr/>
-                </a:tc>
-                <a:tc>
-                  <a:txBody>
-                    <a:bodyPr/>
-                    <a:lstStyle/>
-                    <a:p>
-                      <a:r>
-                        <a:rPr lang="en-CH" dirty="0"/>
-                        <a:t>True</a:t>
-                      </a:r>
-                    </a:p>
-                  </a:txBody>
-                  <a:tcPr/>
-                </a:tc>
-                <a:tc>
-                  <a:txBody>
-                    <a:bodyPr/>
-                    <a:lstStyle/>
-                    <a:p>
-                      <a:endParaRPr lang="en-CH" dirty="0"/>
-                    </a:p>
-                  </a:txBody>
-                  <a:tcPr/>
-                </a:tc>
-                <a:tc>
-                  <a:txBody>
-                    <a:bodyPr/>
-                    <a:lstStyle/>
-                    <a:p>
-                      <a:r>
-                        <a:rPr lang="en-CH" dirty="0"/>
-                        <a:t>True</a:t>
-                      </a:r>
-                    </a:p>
-                  </a:txBody>
-                  <a:tcPr/>
-                </a:tc>
-                <a:tc>
-                  <a:txBody>
-                    <a:bodyPr/>
-                    <a:lstStyle/>
-                    <a:p>
-                      <a:endParaRPr lang="en-CH" dirty="0"/>
-                    </a:p>
-                  </a:txBody>
-                  <a:tcPr/>
-                </a:tc>
-                <a:tc>
-                  <a:txBody>
-                    <a:bodyPr/>
-                    <a:lstStyle/>
-                    <a:p>
-                      <a:endParaRPr lang="en-CH" dirty="0"/>
-                    </a:p>
-                  </a:txBody>
-                  <a:tcPr/>
-                </a:tc>
-                <a:extLst>
-                  <a:ext uri="{0D108BD9-81ED-4DB2-BD59-A6C34878D82A}">
-                    <a16:rowId xmlns:a16="http://schemas.microsoft.com/office/drawing/2014/main" val="2915165263"/>
-                  </a:ext>
-                </a:extLst>
-              </a:tr>
-              <a:tr h="370840">
-                <a:tc rowSpan="3">
-                  <a:txBody>
-                    <a:bodyPr/>
-                    <a:lstStyle/>
-                    <a:p>
-                      <a:r>
-                        <a:rPr lang="en-CH" dirty="0"/>
-                        <a:t>R4</a:t>
-                      </a:r>
-                    </a:p>
-                  </a:txBody>
-                  <a:tcPr/>
-                </a:tc>
-                <a:tc>
-                  <a:txBody>
-                    <a:bodyPr/>
-                    <a:lstStyle/>
-                    <a:p>
-                      <a:endParaRPr lang="en-CH" dirty="0"/>
-                    </a:p>
-                  </a:txBody>
-                  <a:tcPr/>
-                </a:tc>
-                <a:tc>
-                  <a:txBody>
-                    <a:bodyPr/>
-                    <a:lstStyle/>
-                    <a:p>
-                      <a:endParaRPr lang="en-CH" dirty="0"/>
-                    </a:p>
-                  </a:txBody>
-                  <a:tcPr/>
-                </a:tc>
-                <a:tc>
-                  <a:txBody>
-                    <a:bodyPr/>
-                    <a:lstStyle/>
-                    <a:p>
-                      <a:r>
-                        <a:rPr lang="en-CH" dirty="0"/>
-                        <a:t>False</a:t>
-                      </a:r>
-                    </a:p>
-                  </a:txBody>
-                  <a:tcPr/>
-                </a:tc>
-                <a:tc>
-                  <a:txBody>
-                    <a:bodyPr/>
-                    <a:lstStyle/>
-                    <a:p>
-                      <a:endParaRPr lang="en-CH" dirty="0"/>
-                    </a:p>
-                  </a:txBody>
-                  <a:tcPr/>
-                </a:tc>
-                <a:tc>
-                  <a:txBody>
-                    <a:bodyPr/>
-                    <a:lstStyle/>
-                    <a:p>
-                      <a:r>
-                        <a:rPr lang="en-CH" dirty="0"/>
-                        <a:t>False</a:t>
-                      </a:r>
-                    </a:p>
-                  </a:txBody>
-                  <a:tcPr/>
-                </a:tc>
-                <a:tc>
-                  <a:txBody>
-                    <a:bodyPr/>
-                    <a:lstStyle/>
-                    <a:p>
-                      <a:endParaRPr lang="en-CH" dirty="0"/>
-                    </a:p>
-                  </a:txBody>
-                  <a:tcPr/>
-                </a:tc>
-                <a:extLst>
-                  <a:ext uri="{0D108BD9-81ED-4DB2-BD59-A6C34878D82A}">
-                    <a16:rowId xmlns:a16="http://schemas.microsoft.com/office/drawing/2014/main" val="754948846"/>
-                  </a:ext>
-                </a:extLst>
-              </a:tr>
-              <a:tr h="370840">
-                <a:tc vMerge="1">
-                  <a:txBody>
-                    <a:bodyPr/>
-                    <a:lstStyle/>
-                    <a:p>
-                      <a:endParaRPr lang="en-CH" dirty="0"/>
-                    </a:p>
-                  </a:txBody>
-                  <a:tcPr/>
-                </a:tc>
-                <a:tc>
-                  <a:txBody>
-                    <a:bodyPr/>
-                    <a:lstStyle/>
-                    <a:p>
-                      <a:endParaRPr lang="en-CH" dirty="0"/>
-                    </a:p>
-                  </a:txBody>
-                  <a:tcPr/>
-                </a:tc>
-                <a:tc>
-                  <a:txBody>
-                    <a:bodyPr/>
-                    <a:lstStyle/>
-                    <a:p>
-                      <a:r>
-                        <a:rPr lang="en-CH" dirty="0"/>
-                        <a:t>True</a:t>
-                      </a:r>
-                    </a:p>
-                  </a:txBody>
-                  <a:tcPr/>
-                </a:tc>
-                <a:tc>
-                  <a:txBody>
-                    <a:bodyPr/>
-                    <a:lstStyle/>
-                    <a:p>
-                      <a:endParaRPr lang="en-CH" dirty="0"/>
-                    </a:p>
-                  </a:txBody>
-                  <a:tcPr/>
-                </a:tc>
-                <a:tc>
-                  <a:txBody>
-                    <a:bodyPr/>
-                    <a:lstStyle/>
-                    <a:p>
-                      <a:r>
-                        <a:rPr lang="en-CH" dirty="0"/>
-                        <a:t>True</a:t>
-                      </a:r>
-                    </a:p>
-                  </a:txBody>
-                  <a:tcPr/>
-                </a:tc>
-                <a:tc>
-                  <a:txBody>
-                    <a:bodyPr/>
-                    <a:lstStyle/>
-                    <a:p>
-                      <a:r>
-                        <a:rPr lang="en-CH" dirty="0"/>
-                        <a:t>False</a:t>
-                      </a:r>
-                    </a:p>
-                  </a:txBody>
-                  <a:tcPr/>
-                </a:tc>
-                <a:tc>
-                  <a:txBody>
-                    <a:bodyPr/>
-                    <a:lstStyle/>
-                    <a:p>
-                      <a:r>
-                        <a:rPr lang="en-CH" dirty="0"/>
-                        <a:t>False</a:t>
-                      </a:r>
-                    </a:p>
-                  </a:txBody>
-                  <a:tcPr/>
-                </a:tc>
-                <a:extLst>
-                  <a:ext uri="{0D108BD9-81ED-4DB2-BD59-A6C34878D82A}">
-                    <a16:rowId xmlns:a16="http://schemas.microsoft.com/office/drawing/2014/main" val="407579754"/>
-                  </a:ext>
-                </a:extLst>
-              </a:tr>
-              <a:tr h="370840">
-                <a:tc vMerge="1">
-                  <a:txBody>
-                    <a:bodyPr/>
-                    <a:lstStyle/>
-                    <a:p>
-                      <a:endParaRPr lang="en-CH" dirty="0"/>
-                    </a:p>
-                  </a:txBody>
-                  <a:tcPr/>
-                </a:tc>
-                <a:tc>
-                  <a:txBody>
-                    <a:bodyPr/>
-                    <a:lstStyle/>
-                    <a:p>
-                      <a:r>
-                        <a:rPr lang="en-CH" dirty="0"/>
-                        <a:t>True</a:t>
-                      </a:r>
-                    </a:p>
-                  </a:txBody>
-                  <a:tcPr/>
-                </a:tc>
-                <a:tc>
-                  <a:txBody>
-                    <a:bodyPr/>
-                    <a:lstStyle/>
-                    <a:p>
-                      <a:r>
-                        <a:rPr lang="en-CH" dirty="0"/>
-                        <a:t>False</a:t>
-                      </a:r>
-                    </a:p>
-                  </a:txBody>
-                  <a:tcPr/>
-                </a:tc>
-                <a:tc>
-                  <a:txBody>
-                    <a:bodyPr/>
-                    <a:lstStyle/>
-                    <a:p>
-                      <a:r>
-                        <a:rPr lang="en-CH" dirty="0"/>
-                        <a:t>True</a:t>
-                      </a:r>
-                    </a:p>
-                  </a:txBody>
-                  <a:tcPr/>
-                </a:tc>
-                <a:tc>
-                  <a:txBody>
-                    <a:bodyPr/>
-                    <a:lstStyle/>
-                    <a:p>
-                      <a:r>
-                        <a:rPr lang="en-CH" dirty="0"/>
-                        <a:t>False</a:t>
-                      </a:r>
-                    </a:p>
-                  </a:txBody>
-                  <a:tcPr/>
-                </a:tc>
-                <a:tc>
-                  <a:txBody>
-                    <a:bodyPr/>
-                    <a:lstStyle/>
-                    <a:p>
-                      <a:r>
-                        <a:rPr lang="en-CH" dirty="0"/>
-                        <a:t>True</a:t>
-                      </a:r>
-                    </a:p>
-                  </a:txBody>
-                  <a:tcPr/>
-                </a:tc>
-                <a:tc>
-                  <a:txBody>
-                    <a:bodyPr/>
-                    <a:lstStyle/>
-                    <a:p>
-                      <a:r>
-                        <a:rPr lang="en-CH" dirty="0"/>
-                        <a:t>False</a:t>
-                      </a:r>
-                    </a:p>
-                  </a:txBody>
-                  <a:tcPr/>
-                </a:tc>
-                <a:extLst>
-                  <a:ext uri="{0D108BD9-81ED-4DB2-BD59-A6C34878D82A}">
-                    <a16:rowId xmlns:a16="http://schemas.microsoft.com/office/drawing/2014/main" val="350421794"/>
-                  </a:ext>
-                </a:extLst>
               </a:tr>
             </a:tbl>
           </a:graphicData>
         </a:graphic>
       </p:graphicFrame>
     </p:spTree>
-    <p:extLst>
-      <p:ext uri="{BB962C8B-B14F-4D97-AF65-F5344CB8AC3E}">
-        <p14:creationId xmlns:p14="http://schemas.microsoft.com/office/powerpoint/2010/main" val="748081851"/>
-      </p:ext>
-    </p:extLst>
-  </p:cSld>
-  <p:clrMapOvr>
-    <a:masterClrMapping/>
-  </p:clrMapOvr>
-</p:sld>
-</file>
-
-<file path=ppt/slides/slide2.xml><?xml version="1.0" encoding="utf-8"?>
-<p:sld xmlns:a="http://schemas.openxmlformats.org/drawingml/2006/main" xmlns:r="http://schemas.openxmlformats.org/officeDocument/2006/relationships" xmlns:p="http://schemas.openxmlformats.org/presentationml/2006/main">
-  <p:cSld>
-    <p:spTree>
-      <p:nvGrpSpPr>
-        <p:cNvPr id="1" name=""/>
-        <p:cNvGrpSpPr/>
-        <p:nvPr/>
-      </p:nvGrpSpPr>
-      <p:grpSpPr>
-        <a:xfrm>
-          <a:off x="0" y="0"/>
-          <a:ext cx="0" cy="0"/>
-          <a:chOff x="0" y="0"/>
-          <a:chExt cx="0" cy="0"/>
-        </a:xfrm>
-      </p:grpSpPr>
-      <p:sp>
-        <p:nvSpPr>
-          <p:cNvPr id="2" name="Title 1">
-            <a:extLst>
-              <a:ext uri="{FF2B5EF4-FFF2-40B4-BE49-F238E27FC236}">
-                <a16:creationId xmlns:a16="http://schemas.microsoft.com/office/drawing/2014/main" id="{172A6AA4-FDAA-E2CD-679D-B548146A416A}"/>
-              </a:ext>
-            </a:extLst>
-          </p:cNvPr>
-          <p:cNvSpPr>
-            <a:spLocks noGrp="1"/>
-          </p:cNvSpPr>
-          <p:nvPr>
-            <p:ph type="title"/>
-          </p:nvPr>
-        </p:nvSpPr>
-        <p:spPr/>
-        <p:txBody>
-          <a:bodyPr/>
-          <a:lstStyle/>
-          <a:p>
-            <a:r>
-              <a:rPr lang="en-US" dirty="0"/>
-              <a:t>Second slide title</a:t>
-            </a:r>
-          </a:p>
-        </p:txBody>
-      </p:sp>
-      <p:sp>
-        <p:nvSpPr>
-          <p:cNvPr id="3" name="Content Placeholder 2">
-            <a:extLst>
-              <a:ext uri="{FF2B5EF4-FFF2-40B4-BE49-F238E27FC236}">
-                <a16:creationId xmlns:a16="http://schemas.microsoft.com/office/drawing/2014/main" id="{A47A81CE-C247-03A8-FAEA-FCC3BE5735F2}"/>
-              </a:ext>
-            </a:extLst>
-          </p:cNvPr>
-          <p:cNvSpPr>
-            <a:spLocks noGrp="1"/>
-          </p:cNvSpPr>
-          <p:nvPr>
-            <p:ph idx="1"/>
-          </p:nvPr>
-        </p:nvSpPr>
-        <p:spPr>
-          <a:xfrm>
-            <a:off x="838200" y="1825625"/>
-            <a:ext cx="3623631" cy="2136775"/>
-          </a:xfrm>
-        </p:spPr>
-        <p:txBody>
-          <a:bodyPr/>
-          <a:lstStyle/>
-          <a:p>
-            <a:pPr marL="0" indent="0">
-              <a:buNone/>
-            </a:pPr>
-            <a:r>
-              <a:rPr lang="en-US" dirty="0"/>
-              <a:t>Let’s introduce a list</a:t>
-            </a:r>
-          </a:p>
-          <a:p>
-            <a:r>
-              <a:rPr lang="en-US" dirty="0"/>
-              <a:t>With foo</a:t>
-            </a:r>
-          </a:p>
-          <a:p>
-            <a:r>
-              <a:rPr lang="en-US" dirty="0"/>
-              <a:t>Bar</a:t>
-            </a:r>
-          </a:p>
-          <a:p>
-            <a:r>
-              <a:rPr lang="en-US" dirty="0"/>
-              <a:t>And </a:t>
-            </a:r>
-            <a:r>
-              <a:rPr lang="en-US" dirty="0" err="1"/>
-              <a:t>baz</a:t>
-            </a:r>
-            <a:r>
-              <a:rPr lang="en-US" dirty="0"/>
-              <a:t> things</a:t>
-            </a:r>
-          </a:p>
-        </p:txBody>
-      </p:sp>
-      <p:sp>
-        <p:nvSpPr>
-          <p:cNvPr id="4" name="Rectangle 3">
-            <a:extLst>
-              <a:ext uri="{FF2B5EF4-FFF2-40B4-BE49-F238E27FC236}">
-                <a16:creationId xmlns:a16="http://schemas.microsoft.com/office/drawing/2014/main" id="{5F90ABF3-1D93-D35B-9CD4-07A12B50DF41}"/>
-              </a:ext>
-            </a:extLst>
-          </p:cNvPr>
-          <p:cNvSpPr/>
-          <p:nvPr/>
-        </p:nvSpPr>
-        <p:spPr>
-          <a:xfrm>
-            <a:off x="6180463" y="1344058"/>
-            <a:ext cx="4076241" cy="3877937"/>
-          </a:xfrm>
-          <a:prstGeom prst="rect">
-            <a:avLst/>
-          </a:prstGeom>
-        </p:spPr>
-        <p:style>
-          <a:lnRef idx="2">
-            <a:schemeClr val="accent1">
-              <a:shade val="15000"/>
-            </a:schemeClr>
-          </a:lnRef>
-          <a:fillRef idx="1">
-            <a:schemeClr val="accent1"/>
-          </a:fillRef>
-          <a:effectRef idx="0">
-            <a:schemeClr val="accent1"/>
-          </a:effectRef>
-          <a:fontRef idx="minor">
-            <a:schemeClr val="lt1"/>
-          </a:fontRef>
-        </p:style>
-        <p:txBody>
-          <a:bodyPr rtlCol="0" anchor="ctr"/>
-          <a:lstStyle/>
-          <a:p>
-            <a:pPr algn="ctr"/>
-            <a:r>
-              <a:rPr lang="en-US" dirty="0"/>
-              <a:t>A rectangle shape with this text inside.</a:t>
-            </a:r>
-          </a:p>
-        </p:txBody>
-      </p:sp>
-    </p:spTree>
-    <p:extLst>
-      <p:ext uri="{BB962C8B-B14F-4D97-AF65-F5344CB8AC3E}">
-        <p14:creationId xmlns:p14="http://schemas.microsoft.com/office/powerpoint/2010/main" val="2367400921"/>
-      </p:ext>
-    </p:extLst>
-  </p:cSld>
-  <p:clrMapOvr>
-    <a:masterClrMapping/>
-  </p:clrMapOvr>
-</p:sld>
-</file>
-
-<file path=ppt/slides/slide3.xml><?xml version="1.0" encoding="utf-8"?>
-<p:sld xmlns:a="http://schemas.openxmlformats.org/drawingml/2006/main" xmlns:r="http://schemas.openxmlformats.org/officeDocument/2006/relationships" xmlns:p="http://schemas.openxmlformats.org/presentationml/2006/main">
-  <p:cSld>
-    <p:spTree>
-      <p:nvGrpSpPr>
-        <p:cNvPr id="1" name=""/>
-        <p:cNvGrpSpPr/>
-        <p:nvPr/>
-      </p:nvGrpSpPr>
-      <p:grpSpPr>
-        <a:xfrm>
-          <a:off x="0" y="0"/>
-          <a:ext cx="0" cy="0"/>
-          <a:chOff x="0" y="0"/>
-          <a:chExt cx="0" cy="0"/>
-        </a:xfrm>
-      </p:grpSpPr>
-      <p:sp>
-        <p:nvSpPr>
-          <p:cNvPr id="4" name="TextBox 3">
-            <a:extLst>
-              <a:ext uri="{FF2B5EF4-FFF2-40B4-BE49-F238E27FC236}">
-                <a16:creationId xmlns:a16="http://schemas.microsoft.com/office/drawing/2014/main" id="{7381B1C6-C1F4-5AC6-6B79-00CE4EDEFBC6}"/>
-              </a:ext>
-            </a:extLst>
-          </p:cNvPr>
-          <p:cNvSpPr txBox="1"/>
-          <p:nvPr/>
-        </p:nvSpPr>
-        <p:spPr>
-          <a:xfrm>
-            <a:off x="2423634" y="2434665"/>
-            <a:ext cx="1504643" cy="923330"/>
-          </a:xfrm>
-          <a:prstGeom prst="rect">
-            <a:avLst/>
-          </a:prstGeom>
-          <a:noFill/>
-        </p:spPr>
-        <p:txBody>
-          <a:bodyPr wrap="none" rtlCol="0">
-            <a:spAutoFit/>
-          </a:bodyPr>
-          <a:lstStyle/>
-          <a:p>
-            <a:pPr marL="342900" indent="-342900">
-              <a:buFont typeface="+mj-lt"/>
-              <a:buAutoNum type="arabicPeriod"/>
-            </a:pPr>
-            <a:r>
-              <a:rPr lang="en-CH" dirty="0"/>
-              <a:t>List item4</a:t>
-            </a:r>
-          </a:p>
-          <a:p>
-            <a:pPr marL="342900" indent="-342900">
-              <a:buFont typeface="+mj-lt"/>
-              <a:buAutoNum type="arabicPeriod"/>
-            </a:pPr>
-            <a:r>
-              <a:rPr lang="en-CH" dirty="0"/>
-              <a:t>List item5</a:t>
-            </a:r>
-          </a:p>
-          <a:p>
-            <a:pPr marL="342900" indent="-342900">
-              <a:buFont typeface="+mj-lt"/>
-              <a:buAutoNum type="arabicPeriod"/>
-            </a:pPr>
-            <a:r>
-              <a:rPr lang="en-CH" dirty="0"/>
-              <a:t>List item6</a:t>
-            </a:r>
-          </a:p>
-        </p:txBody>
-      </p:sp>
-      <p:sp>
-        <p:nvSpPr>
-          <p:cNvPr id="5" name="TextBox 4">
-            <a:extLst>
-              <a:ext uri="{FF2B5EF4-FFF2-40B4-BE49-F238E27FC236}">
-                <a16:creationId xmlns:a16="http://schemas.microsoft.com/office/drawing/2014/main" id="{0DC25B02-12B2-DAE2-08A6-35F2058F6C2F}"/>
-              </a:ext>
-            </a:extLst>
-          </p:cNvPr>
-          <p:cNvSpPr txBox="1"/>
-          <p:nvPr/>
-        </p:nvSpPr>
-        <p:spPr>
-          <a:xfrm>
-            <a:off x="4453634" y="2457553"/>
-            <a:ext cx="655949" cy="1200329"/>
-          </a:xfrm>
-          <a:prstGeom prst="rect">
-            <a:avLst/>
-          </a:prstGeom>
-          <a:noFill/>
-        </p:spPr>
-        <p:txBody>
-          <a:bodyPr wrap="none" rtlCol="0">
-            <a:spAutoFit/>
-          </a:bodyPr>
-          <a:lstStyle/>
-          <a:p>
-            <a:pPr marL="285750" indent="-285750">
-              <a:buFont typeface="Arial" panose="020B0604020202020204" pitchFamily="34" charset="0"/>
-              <a:buChar char="•"/>
-            </a:pPr>
-            <a:r>
-              <a:rPr lang="en-GB" dirty="0"/>
-              <a:t>I</a:t>
-            </a:r>
-            <a:r>
-              <a:rPr lang="en-CH" dirty="0"/>
-              <a:t>1</a:t>
-            </a:r>
-          </a:p>
-          <a:p>
-            <a:pPr marL="285750" indent="-285750">
-              <a:buFont typeface="Arial" panose="020B0604020202020204" pitchFamily="34" charset="0"/>
-              <a:buChar char="•"/>
-            </a:pPr>
-            <a:r>
-              <a:rPr lang="en-CH" dirty="0"/>
-              <a:t>I2</a:t>
-            </a:r>
-          </a:p>
-          <a:p>
-            <a:pPr marL="285750" indent="-285750">
-              <a:buFont typeface="Arial" panose="020B0604020202020204" pitchFamily="34" charset="0"/>
-              <a:buChar char="•"/>
-            </a:pPr>
-            <a:r>
-              <a:rPr lang="en-CH" dirty="0"/>
-              <a:t>I3</a:t>
-            </a:r>
-          </a:p>
-          <a:p>
-            <a:pPr marL="285750" indent="-285750">
-              <a:buFont typeface="Arial" panose="020B0604020202020204" pitchFamily="34" charset="0"/>
-              <a:buChar char="•"/>
-            </a:pPr>
-            <a:r>
-              <a:rPr lang="en-CH" dirty="0"/>
-              <a:t>I4</a:t>
-            </a:r>
-          </a:p>
-        </p:txBody>
-      </p:sp>
-      <p:sp>
-        <p:nvSpPr>
-          <p:cNvPr id="6" name="TextBox 5">
-            <a:extLst>
-              <a:ext uri="{FF2B5EF4-FFF2-40B4-BE49-F238E27FC236}">
-                <a16:creationId xmlns:a16="http://schemas.microsoft.com/office/drawing/2014/main" id="{0D55D766-B80F-0851-1D87-68A6C8D6E184}"/>
-              </a:ext>
-            </a:extLst>
-          </p:cNvPr>
-          <p:cNvSpPr txBox="1"/>
-          <p:nvPr/>
-        </p:nvSpPr>
-        <p:spPr>
-          <a:xfrm>
-            <a:off x="5634940" y="2457554"/>
-            <a:ext cx="1246110" cy="923330"/>
-          </a:xfrm>
-          <a:prstGeom prst="rect">
-            <a:avLst/>
-          </a:prstGeom>
-          <a:noFill/>
-        </p:spPr>
-        <p:txBody>
-          <a:bodyPr wrap="none" rtlCol="0">
-            <a:spAutoFit/>
-          </a:bodyPr>
-          <a:lstStyle/>
-          <a:p>
-            <a:r>
-              <a:rPr lang="en-GB" dirty="0"/>
-              <a:t>S</a:t>
-            </a:r>
-            <a:r>
-              <a:rPr lang="en-CH" dirty="0"/>
-              <a:t>ome info:</a:t>
-            </a:r>
-          </a:p>
-          <a:p>
-            <a:pPr marL="285750" indent="-285750">
-              <a:buFont typeface="Arial" panose="020B0604020202020204" pitchFamily="34" charset="0"/>
-              <a:buChar char="•"/>
-            </a:pPr>
-            <a:r>
-              <a:rPr lang="en-GB" dirty="0"/>
-              <a:t>I</a:t>
-            </a:r>
-            <a:r>
-              <a:rPr lang="en-CH" dirty="0"/>
-              <a:t>tem A</a:t>
-            </a:r>
-          </a:p>
-          <a:p>
-            <a:pPr marL="285750" indent="-285750">
-              <a:buFont typeface="Arial" panose="020B0604020202020204" pitchFamily="34" charset="0"/>
-              <a:buChar char="•"/>
-            </a:pPr>
-            <a:r>
-              <a:rPr lang="en-CH" dirty="0"/>
-              <a:t>Item B</a:t>
-            </a:r>
-          </a:p>
-        </p:txBody>
-      </p:sp>
-      <p:sp>
-        <p:nvSpPr>
-          <p:cNvPr id="7" name="TextBox 6">
-            <a:extLst>
-              <a:ext uri="{FF2B5EF4-FFF2-40B4-BE49-F238E27FC236}">
-                <a16:creationId xmlns:a16="http://schemas.microsoft.com/office/drawing/2014/main" id="{C696EAC4-97A5-9367-FBEB-A8A320736154}"/>
-              </a:ext>
-            </a:extLst>
-          </p:cNvPr>
-          <p:cNvSpPr txBox="1"/>
-          <p:nvPr/>
-        </p:nvSpPr>
-        <p:spPr>
-          <a:xfrm>
-            <a:off x="7531336" y="2459421"/>
-            <a:ext cx="1478290" cy="1200329"/>
-          </a:xfrm>
-          <a:prstGeom prst="rect">
-            <a:avLst/>
-          </a:prstGeom>
-          <a:noFill/>
-        </p:spPr>
-        <p:txBody>
-          <a:bodyPr wrap="none" rtlCol="0">
-            <a:spAutoFit/>
-          </a:bodyPr>
-          <a:lstStyle/>
-          <a:p>
-            <a:r>
-              <a:rPr lang="en-GB" dirty="0"/>
-              <a:t>M</a:t>
-            </a:r>
-            <a:r>
-              <a:rPr lang="en-CH" dirty="0"/>
-              <a:t>aybe a list?</a:t>
-            </a:r>
-          </a:p>
-          <a:p>
-            <a:pPr marL="342900" indent="-342900">
-              <a:buFont typeface="+mj-lt"/>
-              <a:buAutoNum type="arabicPeriod"/>
-            </a:pPr>
-            <a:r>
-              <a:rPr lang="en-CH" dirty="0"/>
-              <a:t>List1</a:t>
-            </a:r>
-          </a:p>
-          <a:p>
-            <a:pPr marL="342900" indent="-342900">
-              <a:buFont typeface="+mj-lt"/>
-              <a:buAutoNum type="arabicPeriod"/>
-            </a:pPr>
-            <a:r>
-              <a:rPr lang="en-CH" dirty="0"/>
-              <a:t>List2</a:t>
-            </a:r>
-          </a:p>
-          <a:p>
-            <a:pPr marL="342900" indent="-342900">
-              <a:buFont typeface="+mj-lt"/>
-              <a:buAutoNum type="arabicPeriod"/>
-            </a:pPr>
-            <a:r>
-              <a:rPr lang="en-CH" dirty="0"/>
-              <a:t>List3</a:t>
-            </a:r>
-          </a:p>
-        </p:txBody>
-      </p:sp>
-      <p:sp>
-        <p:nvSpPr>
-          <p:cNvPr id="8" name="TextBox 7">
-            <a:extLst>
-              <a:ext uri="{FF2B5EF4-FFF2-40B4-BE49-F238E27FC236}">
-                <a16:creationId xmlns:a16="http://schemas.microsoft.com/office/drawing/2014/main" id="{C5E6CC22-2CC3-5548-61EB-D2E26A377E47}"/>
-              </a:ext>
-            </a:extLst>
-          </p:cNvPr>
-          <p:cNvSpPr txBox="1"/>
-          <p:nvPr/>
-        </p:nvSpPr>
-        <p:spPr>
-          <a:xfrm>
-            <a:off x="9404392" y="2434665"/>
-            <a:ext cx="655949" cy="923330"/>
-          </a:xfrm>
-          <a:prstGeom prst="rect">
-            <a:avLst/>
-          </a:prstGeom>
-          <a:noFill/>
-        </p:spPr>
-        <p:txBody>
-          <a:bodyPr wrap="square" rtlCol="0">
-            <a:spAutoFit/>
-          </a:bodyPr>
-          <a:lstStyle/>
-          <a:p>
-            <a:pPr marL="285750" indent="-285750">
-              <a:buFont typeface="Arial" panose="020B0604020202020204" pitchFamily="34" charset="0"/>
-              <a:buChar char="•"/>
-            </a:pPr>
-            <a:r>
-              <a:rPr lang="en-GB" dirty="0"/>
-              <a:t>l1 </a:t>
-            </a:r>
-          </a:p>
-          <a:p>
-            <a:pPr marL="285750" indent="-285750">
-              <a:buFont typeface="Arial" panose="020B0604020202020204" pitchFamily="34" charset="0"/>
-              <a:buChar char="•"/>
-            </a:pPr>
-            <a:r>
-              <a:rPr lang="en-GB" dirty="0"/>
-              <a:t>l2</a:t>
-            </a:r>
-          </a:p>
-          <a:p>
-            <a:pPr marL="285750" indent="-285750">
-              <a:buFont typeface="Arial" panose="020B0604020202020204" pitchFamily="34" charset="0"/>
-              <a:buChar char="•"/>
-            </a:pPr>
-            <a:r>
-              <a:rPr lang="en-CH" dirty="0"/>
-              <a:t>l3</a:t>
-            </a:r>
-          </a:p>
-        </p:txBody>
-      </p:sp>
-    </p:spTree>
-    <p:extLst>
-      <p:ext uri="{BB962C8B-B14F-4D97-AF65-F5344CB8AC3E}">
-        <p14:creationId xmlns:p14="http://schemas.microsoft.com/office/powerpoint/2010/main" val="3650019037"/>
-      </p:ext>
-    </p:extLst>
   </p:cSld>
   <p:clrMapOvr>
     <a:masterClrMapping/>
@@ -5337,44 +3833,44 @@
         <a:sysClr val="window" lastClr="FFFFFF"/>
       </a:lt1>
       <a:dk2>
-        <a:srgbClr val="0E2841"/>
+        <a:srgbClr val="1F497D"/>
       </a:dk2>
       <a:lt2>
-        <a:srgbClr val="E8E8E8"/>
+        <a:srgbClr val="EEECE1"/>
       </a:lt2>
       <a:accent1>
-        <a:srgbClr val="156082"/>
+        <a:srgbClr val="4F81BD"/>
       </a:accent1>
       <a:accent2>
-        <a:srgbClr val="E97132"/>
+        <a:srgbClr val="C0504D"/>
       </a:accent2>
       <a:accent3>
-        <a:srgbClr val="196B24"/>
+        <a:srgbClr val="9BBB59"/>
       </a:accent3>
       <a:accent4>
-        <a:srgbClr val="0F9ED5"/>
+        <a:srgbClr val="8064A2"/>
       </a:accent4>
       <a:accent5>
-        <a:srgbClr val="A02B93"/>
+        <a:srgbClr val="4BACC6"/>
       </a:accent5>
       <a:accent6>
-        <a:srgbClr val="4EA72E"/>
+        <a:srgbClr val="F79646"/>
       </a:accent6>
       <a:hlink>
-        <a:srgbClr val="467886"/>
+        <a:srgbClr val="0000FF"/>
       </a:hlink>
       <a:folHlink>
-        <a:srgbClr val="96607D"/>
+        <a:srgbClr val="800080"/>
       </a:folHlink>
     </a:clrScheme>
     <a:fontScheme name="Office">
       <a:majorFont>
-        <a:latin typeface="Aptos Display" panose="02110004020202020204"/>
+        <a:latin typeface="Calibri"/>
         <a:ea typeface=""/>
         <a:cs typeface=""/>
-        <a:font script="Jpan" typeface="游ゴシック Light"/>
+        <a:font script="Jpan" typeface="ＭＳ Ｐゴシック"/>
         <a:font script="Hang" typeface="맑은 고딕"/>
-        <a:font script="Hans" typeface="等线 Light"/>
+        <a:font script="Hans" typeface="宋体"/>
         <a:font script="Hant" typeface="新細明體"/>
         <a:font script="Arab" typeface="Times New Roman"/>
         <a:font script="Hebr" typeface="Times New Roman"/>
@@ -5402,31 +3898,14 @@
         <a:font script="Viet" typeface="Times New Roman"/>
         <a:font script="Uigh" typeface="Microsoft Uighur"/>
         <a:font script="Geor" typeface="Sylfaen"/>
-        <a:font script="Armn" typeface="Arial"/>
-        <a:font script="Bugi" typeface="Leelawadee UI"/>
-        <a:font script="Bopo" typeface="Microsoft JhengHei"/>
-        <a:font script="Java" typeface="Javanese Text"/>
-        <a:font script="Lisu" typeface="Segoe UI"/>
-        <a:font script="Mymr" typeface="Myanmar Text"/>
-        <a:font script="Nkoo" typeface="Ebrima"/>
-        <a:font script="Olck" typeface="Nirmala UI"/>
-        <a:font script="Osma" typeface="Ebrima"/>
-        <a:font script="Phag" typeface="Phagspa"/>
-        <a:font script="Syrn" typeface="Estrangelo Edessa"/>
-        <a:font script="Syrj" typeface="Estrangelo Edessa"/>
-        <a:font script="Syre" typeface="Estrangelo Edessa"/>
-        <a:font script="Sora" typeface="Nirmala UI"/>
-        <a:font script="Tale" typeface="Microsoft Tai Le"/>
-        <a:font script="Talu" typeface="Microsoft New Tai Lue"/>
-        <a:font script="Tfng" typeface="Ebrima"/>
       </a:majorFont>
       <a:minorFont>
-        <a:latin typeface="Aptos" panose="02110004020202020204"/>
+        <a:latin typeface="Calibri"/>
         <a:ea typeface=""/>
         <a:cs typeface=""/>
-        <a:font script="Jpan" typeface="游ゴシック"/>
+        <a:font script="Jpan" typeface="ＭＳ Ｐゴシック"/>
         <a:font script="Hang" typeface="맑은 고딕"/>
-        <a:font script="Hans" typeface="等线"/>
+        <a:font script="Hans" typeface="宋体"/>
         <a:font script="Hant" typeface="新細明體"/>
         <a:font script="Arab" typeface="Arial"/>
         <a:font script="Hebr" typeface="Arial"/>
@@ -5454,23 +3933,6 @@
         <a:font script="Viet" typeface="Arial"/>
         <a:font script="Uigh" typeface="Microsoft Uighur"/>
         <a:font script="Geor" typeface="Sylfaen"/>
-        <a:font script="Armn" typeface="Arial"/>
-        <a:font script="Bugi" typeface="Leelawadee UI"/>
-        <a:font script="Bopo" typeface="Microsoft JhengHei"/>
-        <a:font script="Java" typeface="Javanese Text"/>
-        <a:font script="Lisu" typeface="Segoe UI"/>
-        <a:font script="Mymr" typeface="Myanmar Text"/>
-        <a:font script="Nkoo" typeface="Ebrima"/>
-        <a:font script="Olck" typeface="Nirmala UI"/>
-        <a:font script="Osma" typeface="Ebrima"/>
-        <a:font script="Phag" typeface="Phagspa"/>
-        <a:font script="Syrn" typeface="Estrangelo Edessa"/>
-        <a:font script="Syrj" typeface="Estrangelo Edessa"/>
-        <a:font script="Syre" typeface="Estrangelo Edessa"/>
-        <a:font script="Sora" typeface="Nirmala UI"/>
-        <a:font script="Tale" typeface="Microsoft Tai Le"/>
-        <a:font script="Talu" typeface="Microsoft New Tai Lue"/>
-        <a:font script="Tfng" typeface="Ebrima"/>
       </a:minorFont>
     </a:fontScheme>
     <a:fmtScheme name="Office">
@@ -5482,136 +3944,180 @@
           <a:gsLst>
             <a:gs pos="0">
               <a:schemeClr val="phClr">
-                <a:lumMod val="110000"/>
-                <a:satMod val="105000"/>
-                <a:tint val="67000"/>
+                <a:tint val="50000"/>
+                <a:satMod val="300000"/>
               </a:schemeClr>
             </a:gs>
-            <a:gs pos="50000">
+            <a:gs pos="35000">
               <a:schemeClr val="phClr">
-                <a:lumMod val="105000"/>
-                <a:satMod val="103000"/>
-                <a:tint val="73000"/>
+                <a:tint val="37000"/>
+                <a:satMod val="300000"/>
               </a:schemeClr>
             </a:gs>
             <a:gs pos="100000">
               <a:schemeClr val="phClr">
-                <a:lumMod val="105000"/>
-                <a:satMod val="109000"/>
-                <a:tint val="81000"/>
+                <a:tint val="15000"/>
+                <a:satMod val="350000"/>
               </a:schemeClr>
             </a:gs>
           </a:gsLst>
-          <a:lin ang="5400000" scaled="0"/>
+          <a:lin ang="16200000" scaled="1"/>
         </a:gradFill>
         <a:gradFill rotWithShape="1">
           <a:gsLst>
             <a:gs pos="0">
               <a:schemeClr val="phClr">
-                <a:satMod val="103000"/>
-                <a:lumMod val="102000"/>
-                <a:tint val="94000"/>
-              </a:schemeClr>
-            </a:gs>
-            <a:gs pos="50000">
-              <a:schemeClr val="phClr">
-                <a:satMod val="110000"/>
-                <a:lumMod val="100000"/>
+                <a:tint val="100000"/>
                 <a:shade val="100000"/>
+                <a:satMod val="130000"/>
               </a:schemeClr>
             </a:gs>
             <a:gs pos="100000">
               <a:schemeClr val="phClr">
-                <a:lumMod val="99000"/>
-                <a:satMod val="120000"/>
-                <a:shade val="78000"/>
+                <a:tint val="50000"/>
+                <a:shade val="100000"/>
+                <a:satMod val="350000"/>
               </a:schemeClr>
             </a:gs>
           </a:gsLst>
-          <a:lin ang="5400000" scaled="0"/>
+          <a:lin ang="16200000" scaled="0"/>
         </a:gradFill>
       </a:fillStyleLst>
       <a:lnStyleLst>
-        <a:ln w="12700" cap="flat" cmpd="sng" algn="ctr">
+        <a:ln w="9525" cap="flat" cmpd="sng" algn="ctr">
           <a:solidFill>
-            <a:schemeClr val="phClr"/>
+            <a:schemeClr val="phClr">
+              <a:shade val="95000"/>
+              <a:satMod val="105000"/>
+            </a:schemeClr>
           </a:solidFill>
           <a:prstDash val="solid"/>
-          <a:miter lim="800000"/>
-        </a:ln>
-        <a:ln w="19050" cap="flat" cmpd="sng" algn="ctr">
-          <a:solidFill>
-            <a:schemeClr val="phClr"/>
-          </a:solidFill>
-          <a:prstDash val="solid"/>
-          <a:miter lim="800000"/>
         </a:ln>
         <a:ln w="25400" cap="flat" cmpd="sng" algn="ctr">
           <a:solidFill>
             <a:schemeClr val="phClr"/>
           </a:solidFill>
           <a:prstDash val="solid"/>
-          <a:miter lim="800000"/>
+        </a:ln>
+        <a:ln w="38100" cap="flat" cmpd="sng" algn="ctr">
+          <a:solidFill>
+            <a:schemeClr val="phClr"/>
+          </a:solidFill>
+          <a:prstDash val="solid"/>
         </a:ln>
       </a:lnStyleLst>
       <a:effectStyleLst>
         <a:effectStyle>
-          <a:effectLst/>
-        </a:effectStyle>
-        <a:effectStyle>
-          <a:effectLst/>
+          <a:effectLst>
+            <a:outerShdw blurRad="40000" dist="20000" dir="5400000" rotWithShape="0">
+              <a:srgbClr val="000000">
+                <a:alpha val="38000"/>
+              </a:srgbClr>
+            </a:outerShdw>
+          </a:effectLst>
         </a:effectStyle>
         <a:effectStyle>
           <a:effectLst>
-            <a:outerShdw blurRad="57150" dist="19050" dir="5400000" algn="ctr" rotWithShape="0">
+            <a:outerShdw blurRad="40000" dist="23000" dir="5400000" rotWithShape="0">
               <a:srgbClr val="000000">
-                <a:alpha val="63000"/>
+                <a:alpha val="35000"/>
               </a:srgbClr>
             </a:outerShdw>
           </a:effectLst>
+        </a:effectStyle>
+        <a:effectStyle>
+          <a:effectLst>
+            <a:outerShdw blurRad="40000" dist="23000" dir="5400000" rotWithShape="0">
+              <a:srgbClr val="000000">
+                <a:alpha val="35000"/>
+              </a:srgbClr>
+            </a:outerShdw>
+          </a:effectLst>
+          <a:scene3d>
+            <a:camera prst="orthographicFront">
+              <a:rot lat="0" lon="0" rev="0"/>
+            </a:camera>
+            <a:lightRig rig="threePt" dir="t">
+              <a:rot lat="0" lon="0" rev="1200000"/>
+            </a:lightRig>
+          </a:scene3d>
+          <a:sp3d>
+            <a:bevelT w="63500" h="25400"/>
+          </a:sp3d>
         </a:effectStyle>
       </a:effectStyleLst>
       <a:bgFillStyleLst>
         <a:solidFill>
           <a:schemeClr val="phClr"/>
         </a:solidFill>
-        <a:solidFill>
-          <a:schemeClr val="phClr">
-            <a:tint val="95000"/>
-            <a:satMod val="170000"/>
-          </a:schemeClr>
-        </a:solidFill>
         <a:gradFill rotWithShape="1">
           <a:gsLst>
             <a:gs pos="0">
               <a:schemeClr val="phClr">
-                <a:tint val="93000"/>
-                <a:satMod val="150000"/>
-                <a:shade val="98000"/>
-                <a:lumMod val="102000"/>
+                <a:tint val="40000"/>
+                <a:satMod val="350000"/>
               </a:schemeClr>
             </a:gs>
-            <a:gs pos="50000">
+            <a:gs pos="40000">
               <a:schemeClr val="phClr">
-                <a:tint val="98000"/>
-                <a:satMod val="130000"/>
-                <a:shade val="90000"/>
-                <a:lumMod val="103000"/>
+                <a:tint val="45000"/>
+                <a:shade val="99000"/>
+                <a:satMod val="350000"/>
               </a:schemeClr>
             </a:gs>
             <a:gs pos="100000">
               <a:schemeClr val="phClr">
-                <a:shade val="63000"/>
-                <a:satMod val="120000"/>
+                <a:shade val="20000"/>
+                <a:satMod val="255000"/>
               </a:schemeClr>
             </a:gs>
           </a:gsLst>
-          <a:lin ang="5400000" scaled="0"/>
+          <a:path path="circle">
+            <a:fillToRect l="50000" t="-80000" r="50000" b="180000"/>
+          </a:path>
+        </a:gradFill>
+        <a:gradFill rotWithShape="1">
+          <a:gsLst>
+            <a:gs pos="0">
+              <a:schemeClr val="phClr">
+                <a:tint val="80000"/>
+                <a:satMod val="300000"/>
+              </a:schemeClr>
+            </a:gs>
+            <a:gs pos="100000">
+              <a:schemeClr val="phClr">
+                <a:shade val="30000"/>
+                <a:satMod val="200000"/>
+              </a:schemeClr>
+            </a:gs>
+          </a:gsLst>
+          <a:path path="circle">
+            <a:fillToRect l="50000" t="50000" r="50000" b="50000"/>
+          </a:path>
         </a:gradFill>
       </a:bgFillStyleLst>
     </a:fmtScheme>
   </a:themeElements>
   <a:objectDefaults>
+    <a:spDef>
+      <a:spPr/>
+      <a:bodyPr/>
+      <a:lstStyle/>
+      <a:style>
+        <a:lnRef idx="1">
+          <a:schemeClr val="accent1"/>
+        </a:lnRef>
+        <a:fillRef idx="3">
+          <a:schemeClr val="accent1"/>
+        </a:fillRef>
+        <a:effectRef idx="2">
+          <a:schemeClr val="accent1"/>
+        </a:effectRef>
+        <a:fontRef idx="minor">
+          <a:schemeClr val="lt1"/>
+        </a:fontRef>
+      </a:style>
+    </a:spDef>
     <a:lnDef>
       <a:spPr/>
       <a:bodyPr/>
@@ -5633,11 +4139,6 @@
     </a:lnDef>
   </a:objectDefaults>
   <a:extraClrSchemeLst/>
-  <a:extLst>
-    <a:ext uri="{05A4C25C-085E-4340-85A3-A5531E510DB2}">
-      <thm15:themeFamily xmlns:thm15="http://schemas.microsoft.com/office/thememl/2012/main" name="Office Theme" id="{2E142A2C-CD16-42D6-873A-C26D2A0506FA}" vid="{1BDDFF52-6CD6-40A5-AB3C-68EB2F1E4D0A}"/>
-    </a:ext>
-  </a:extLst>
 </a:theme>
 </file>
 
